--- a/presentation/BRSET_ConvNeXtV2_Progress.pptx
+++ b/presentation/BRSET_ConvNeXtV2_Progress.pptx
@@ -7402,7 +7402,19 @@
               </a:defRPr>
             </a:pPr>
             <a:r>
-              <a:t>Diagnosis 1 — Most of the collapse was prevalence, not blindness</a:t>
+              <a:t>Diagnosis 1 — the referral cutoff was wrong, not the model</a:t>
+            </a:r>
+          </a:p>
+          <a:p>
+            <a:pPr>
+              <a:defRPr sz="1500">
+                <a:solidFill>
+                  <a:srgbClr val="5A5A5A"/>
+                </a:solidFill>
+              </a:defRPr>
+            </a:pPr>
+            <a:r>
+              <a:t>The model scores each image from 0 (healthy) to 1 (diseased). A cutoff decides who gets referred.</a:t>
             </a:r>
           </a:p>
         </p:txBody>
@@ -7416,8 +7428,8 @@
           <p:nvPr/>
         </p:nvGraphicFramePr>
         <p:xfrm>
-          <a:off x="685800" y="1828800"/>
-          <a:ext cx="8229598" cy="987552"/>
+          <a:off x="685800" y="2057400"/>
+          <a:ext cx="9875518" cy="1371600"/>
         </p:xfrm>
         <a:graphic>
           <a:graphicData uri="http://schemas.openxmlformats.org/drawingml/2006/table">
@@ -7426,12 +7438,11 @@
                 <a:tableStyleId>{5C22544A-7EE6-4342-B048-85BDC9FD1C3A}</a:tableStyleId>
               </a:tblPr>
               <a:tblGrid>
-                <a:gridCol w="2939142"/>
-                <a:gridCol w="1959428"/>
-                <a:gridCol w="1959428"/>
-                <a:gridCol w="1371600"/>
+                <a:gridCol w="2904564"/>
+                <a:gridCol w="4066390"/>
+                <a:gridCol w="2904564"/>
               </a:tblGrid>
-              <a:tr h="329184">
+              <a:tr h="457200">
                 <a:tc>
                   <a:txBody>
                     <a:bodyPr/>
@@ -7465,7 +7476,7 @@
                         </a:defRPr>
                       </a:pPr>
                       <a:r>
-                        <a:t>BRSET (source)</a:t>
+                        <a:t>How many patients have the disease</a:t>
                       </a:r>
                     </a:p>
                   </a:txBody>
@@ -7488,7 +7499,7 @@
                         </a:defRPr>
                       </a:pPr>
                       <a:r>
-                        <a:t>mBRSET (target)</a:t>
+                        <a:t>Best cutoff for that group</a:t>
                       </a:r>
                     </a:p>
                   </a:txBody>
@@ -7498,31 +7509,8 @@
                     </a:solidFill>
                   </a:tcPr>
                 </a:tc>
-                <a:tc>
-                  <a:txBody>
-                    <a:bodyPr/>
-                    <a:lstStyle/>
-                    <a:p>
-                      <a:pPr algn="ctr">
-                        <a:defRPr sz="1500" b="1">
-                          <a:solidFill>
-                            <a:srgbClr val="FFFFFF"/>
-                          </a:solidFill>
-                        </a:defRPr>
-                      </a:pPr>
-                      <a:r>
-                        <a:t>Shift</a:t>
-                      </a:r>
-                    </a:p>
-                  </a:txBody>
-                  <a:tcPr marL="73152" marR="73152" marT="27432" marB="27432">
-                    <a:solidFill>
-                      <a:srgbClr val="1F4E79"/>
-                    </a:solidFill>
-                  </a:tcPr>
-                </a:tc>
               </a:tr>
-              <a:tr h="329184">
+              <a:tr h="457200">
                 <a:tc>
                   <a:txBody>
                     <a:bodyPr/>
@@ -7536,7 +7524,7 @@
                         </a:defRPr>
                       </a:pPr>
                       <a:r>
-                        <a:t>DR positive rate</a:t>
+                        <a:t>BRSET — where we trained</a:t>
                       </a:r>
                     </a:p>
                   </a:txBody>
@@ -7559,7 +7547,7 @@
                         </a:defRPr>
                       </a:pPr>
                       <a:r>
-                        <a:t>6.58%</a:t>
+                        <a:t>6.6% of eyes  (1 in 15)</a:t>
                       </a:r>
                     </a:p>
                   </a:txBody>
@@ -7582,7 +7570,7 @@
                         </a:defRPr>
                       </a:pPr>
                       <a:r>
-                        <a:t>23.30%</a:t>
+                        <a:t>0.61   be strict</a:t>
                       </a:r>
                     </a:p>
                   </a:txBody>
@@ -7592,31 +7580,8 @@
                     </a:solidFill>
                   </a:tcPr>
                 </a:tc>
-                <a:tc>
-                  <a:txBody>
-                    <a:bodyPr/>
-                    <a:lstStyle/>
-                    <a:p>
-                      <a:pPr algn="ctr">
-                        <a:defRPr sz="1500">
-                          <a:solidFill>
-                            <a:srgbClr val="1A1A1A"/>
-                          </a:solidFill>
-                        </a:defRPr>
-                      </a:pPr>
-                      <a:r>
-                        <a:t>4.31×</a:t>
-                      </a:r>
-                    </a:p>
-                  </a:txBody>
-                  <a:tcPr marL="73152" marR="73152" marT="27432" marB="27432">
-                    <a:solidFill>
-                      <a:srgbClr val="FFFFFF"/>
-                    </a:solidFill>
-                  </a:tcPr>
-                </a:tc>
               </a:tr>
-              <a:tr h="329184">
+              <a:tr h="457200">
                 <a:tc>
                   <a:txBody>
                     <a:bodyPr/>
@@ -7630,7 +7595,7 @@
                         </a:defRPr>
                       </a:pPr>
                       <a:r>
-                        <a:t>ME positive rate</a:t>
+                        <a:t>mBRSET — where we tested</a:t>
                       </a:r>
                     </a:p>
                   </a:txBody>
@@ -7653,7 +7618,7 @@
                         </a:defRPr>
                       </a:pPr>
                       <a:r>
-                        <a:t>2.46%</a:t>
+                        <a:t>23.3% of eyes  (1 in 4)</a:t>
                       </a:r>
                     </a:p>
                   </a:txBody>
@@ -7676,30 +7641,7 @@
                         </a:defRPr>
                       </a:pPr>
                       <a:r>
-                        <a:t>8.68%</a:t>
-                      </a:r>
-                    </a:p>
-                  </a:txBody>
-                  <a:tcPr marL="73152" marR="73152" marT="27432" marB="27432">
-                    <a:solidFill>
-                      <a:srgbClr val="F2F4F7"/>
-                    </a:solidFill>
-                  </a:tcPr>
-                </a:tc>
-                <a:tc>
-                  <a:txBody>
-                    <a:bodyPr/>
-                    <a:lstStyle/>
-                    <a:p>
-                      <a:pPr algn="ctr">
-                        <a:defRPr sz="1500">
-                          <a:solidFill>
-                            <a:srgbClr val="1A1A1A"/>
-                          </a:solidFill>
-                        </a:defRPr>
-                      </a:pPr>
-                      <a:r>
-                        <a:t>3.77×</a:t>
+                        <a:t>0.19   be lenient</a:t>
                       </a:r>
                     </a:p>
                   </a:txBody>
@@ -7722,8 +7664,8 @@
         </p:nvSpPr>
         <p:spPr>
           <a:xfrm>
-            <a:off x="685800" y="3291840"/>
-            <a:ext cx="10881360" cy="2423160"/>
+            <a:off x="685800" y="3886200"/>
+            <a:ext cx="10881360" cy="1783080"/>
           </a:xfrm>
           <a:prstGeom prst="rect">
             <a:avLst/>
@@ -7747,7 +7689,7 @@
               </a:defRPr>
             </a:pPr>
             <a:r>
-              <a:t>• BRSET is a general eye clinic. mBRSET is a diabetes screening campaign — a far sicker population by design.</a:t>
+              <a:t>• We applied BRSET's strict 0.61 cutoff to mBRSET, where nearly 1 in 4 patients is diseased. The model stayed quiet and missed half the cases.</a:t>
             </a:r>
           </a:p>
           <a:p>
@@ -7762,37 +7704,7 @@
               </a:defRPr>
             </a:pPr>
             <a:r>
-              <a:t>• The referral cutoff had to move from 0.61 to 0.19. We calculated why: 77% of that move is explained by the higher disease rate alone; only 23% by the model being less confident.</a:t>
-            </a:r>
-          </a:p>
-          <a:p>
-            <a:pPr lvl="1">
-              <a:spcAft>
-                <a:spcPts val="1000"/>
-              </a:spcAft>
-              <a:defRPr sz="1400">
-                <a:solidFill>
-                  <a:srgbClr val="5A5A5A"/>
-                </a:solidFill>
-              </a:defRPr>
-            </a:pPr>
-            <a:r>
-              <a:t>– Same metal detector at an airport and at a prison. At the airport you set sensitivity low, or it beeps all day. At the prison you turn it up. The detector did not change — the crowd did.</a:t>
-            </a:r>
-          </a:p>
-          <a:p>
-            <a:pPr lvl="1">
-              <a:spcAft>
-                <a:spcPts val="1000"/>
-              </a:spcAft>
-              <a:defRPr sz="1400">
-                <a:solidFill>
-                  <a:srgbClr val="5A5A5A"/>
-                </a:solidFill>
-              </a:defRPr>
-            </a:pPr>
-            <a:r>
-              <a:t>– Our model walked into the prison still on the airport setting. It stayed quiet and missed half the cases.</a:t>
+              <a:t>• Of the move needed from 0.61 down to 0.19:  77% is explained by the higher disease rate alone, and only 23% by the model being less certain on blurrier images.</a:t>
             </a:r>
           </a:p>
           <a:p>
@@ -7807,7 +7719,7 @@
               </a:defRPr>
             </a:pPr>
             <a:r>
-              <a:t>• The disease-rate part can be estimated from unlabelled images — no answer key needed.</a:t>
+              <a:t>• The disease-rate part can be estimated from unlabelled images — no answer key required.</a:t>
             </a:r>
           </a:p>
         </p:txBody>
@@ -7842,7 +7754,7 @@
               </a:defRPr>
             </a:pPr>
             <a:r>
-              <a:t>The crash from F1 0.869 to 0.661 was mostly a wrongly-set dial, not the model going blind.</a:t>
+              <a:t>Moving the cutoff alone — no retraining — lifted F1 from 0.661 to 0.717, and recall from 0.503 to 0.780.</a:t>
             </a:r>
           </a:p>
         </p:txBody>

--- a/presentation/BRSET_ConvNeXtV2_Progress.pptx
+++ b/presentation/BRSET_ConvNeXtV2_Progress.pptx
@@ -5148,7 +5148,7 @@
               </a:defRPr>
             </a:pPr>
             <a:r>
-              <a:t>ConvNeXt V2 Large @ 512px, all 16,258 images, patient-level split. 95% CI from 2,000 bootstrap resamples.</a:t>
+              <a:t>One ConvNeXt V2 Large model at 512px, all 16,258 images, split by patient, trained with focal loss.</a:t>
             </a:r>
           </a:p>
         </p:txBody>
@@ -5162,8 +5162,8 @@
           <p:nvPr/>
         </p:nvGraphicFramePr>
         <p:xfrm>
-          <a:off x="685800" y="1920240"/>
-          <a:ext cx="10789917" cy="1645919"/>
+          <a:off x="685800" y="1965960"/>
+          <a:ext cx="10789918" cy="1645919"/>
         </p:xfrm>
         <a:graphic>
           <a:graphicData uri="http://schemas.openxmlformats.org/drawingml/2006/table">
@@ -5172,11 +5172,10 @@
                 <a:tableStyleId>{5C22544A-7EE6-4342-B048-85BDC9FD1C3A}</a:tableStyleId>
               </a:tblPr>
               <a:tblGrid>
-                <a:gridCol w="1815126"/>
-                <a:gridCol w="2420168"/>
-                <a:gridCol w="1310924"/>
-                <a:gridCol w="2218488"/>
-                <a:gridCol w="3025211"/>
+                <a:gridCol w="2976529"/>
+                <a:gridCol w="2232397"/>
+                <a:gridCol w="1581281"/>
+                <a:gridCol w="3999711"/>
               </a:tblGrid>
               <a:tr h="329183">
                 <a:tc>
@@ -5238,30 +5237,7 @@
                         </a:defRPr>
                       </a:pPr>
                       <a:r>
-                        <a:t>Ours</a:t>
-                      </a:r>
-                    </a:p>
-                  </a:txBody>
-                  <a:tcPr marL="73152" marR="73152" marT="27432" marB="27432">
-                    <a:solidFill>
-                      <a:srgbClr val="1F4E79"/>
-                    </a:solidFill>
-                  </a:tcPr>
-                </a:tc>
-                <a:tc>
-                  <a:txBody>
-                    <a:bodyPr/>
-                    <a:lstStyle/>
-                    <a:p>
-                      <a:pPr algn="ctr">
-                        <a:defRPr sz="1400" b="1">
-                          <a:solidFill>
-                            <a:srgbClr val="FFFFFF"/>
-                          </a:solidFill>
-                        </a:defRPr>
-                      </a:pPr>
-                      <a:r>
-                        <a:t>95% CI</a:t>
+                        <a:t>Our model</a:t>
                       </a:r>
                     </a:p>
                   </a:txBody>
@@ -5309,7 +5285,7 @@
                         </a:defRPr>
                       </a:pPr>
                       <a:r>
-                        <a:t>DR — AUC</a:t>
+                        <a:t>Diabetic retinopathy — AUC</a:t>
                       </a:r>
                     </a:p>
                   </a:txBody>
@@ -5355,7 +5331,7 @@
                         </a:defRPr>
                       </a:pPr>
                       <a:r>
-                        <a:t>0.988</a:t>
+                        <a:t>0.992</a:t>
                       </a:r>
                     </a:p>
                   </a:txBody>
@@ -5378,30 +5354,7 @@
                         </a:defRPr>
                       </a:pPr>
                       <a:r>
-                        <a:t>[0.975, 0.996]</a:t>
-                      </a:r>
-                    </a:p>
-                  </a:txBody>
-                  <a:tcPr marL="73152" marR="73152" marT="27432" marB="27432">
-                    <a:solidFill>
-                      <a:srgbClr val="E3EFE3"/>
-                    </a:solidFill>
-                  </a:tcPr>
-                </a:tc>
-                <a:tc>
-                  <a:txBody>
-                    <a:bodyPr/>
-                    <a:lstStyle/>
-                    <a:p>
-                      <a:pPr algn="ctr">
-                        <a:defRPr sz="1400" b="1">
-                          <a:solidFill>
-                            <a:srgbClr val="1A1A1A"/>
-                          </a:solidFill>
-                        </a:defRPr>
-                      </a:pPr>
-                      <a:r>
-                        <a:t>Beats paper (significant)</a:t>
+                        <a:t>Better than the paper</a:t>
                       </a:r>
                     </a:p>
                   </a:txBody>
@@ -5426,7 +5379,7 @@
                         </a:defRPr>
                       </a:pPr>
                       <a:r>
-                        <a:t>DR — F1</a:t>
+                        <a:t>Diabetic retinopathy — F1</a:t>
                       </a:r>
                     </a:p>
                   </a:txBody>
@@ -5495,30 +5448,7 @@
                         </a:defRPr>
                       </a:pPr>
                       <a:r>
-                        <a:t>[0.827, 0.905]</a:t>
-                      </a:r>
-                    </a:p>
-                  </a:txBody>
-                  <a:tcPr marL="73152" marR="73152" marT="27432" marB="27432">
-                    <a:solidFill>
-                      <a:srgbClr val="E3EFE3"/>
-                    </a:solidFill>
-                  </a:tcPr>
-                </a:tc>
-                <a:tc>
-                  <a:txBody>
-                    <a:bodyPr/>
-                    <a:lstStyle/>
-                    <a:p>
-                      <a:pPr algn="ctr">
-                        <a:defRPr sz="1400" b="1">
-                          <a:solidFill>
-                            <a:srgbClr val="1A1A1A"/>
-                          </a:solidFill>
-                        </a:defRPr>
-                      </a:pPr>
-                      <a:r>
-                        <a:t>Statistically tied</a:t>
+                        <a:t>The same, within measurement error</a:t>
                       </a:r>
                     </a:p>
                   </a:txBody>
@@ -5543,7 +5473,7 @@
                         </a:defRPr>
                       </a:pPr>
                       <a:r>
-                        <a:t>ME — AUC</a:t>
+                        <a:t>Macular edema — AUC</a:t>
                       </a:r>
                     </a:p>
                   </a:txBody>
@@ -5589,7 +5519,7 @@
                         </a:defRPr>
                       </a:pPr>
                       <a:r>
-                        <a:t>0.993</a:t>
+                        <a:t>0.989</a:t>
                       </a:r>
                     </a:p>
                   </a:txBody>
@@ -5612,30 +5542,7 @@
                         </a:defRPr>
                       </a:pPr>
                       <a:r>
-                        <a:t>[0.988, 0.997]</a:t>
-                      </a:r>
-                    </a:p>
-                  </a:txBody>
-                  <a:tcPr marL="73152" marR="73152" marT="27432" marB="27432">
-                    <a:solidFill>
-                      <a:srgbClr val="FFFFFF"/>
-                    </a:solidFill>
-                  </a:tcPr>
-                </a:tc>
-                <a:tc>
-                  <a:txBody>
-                    <a:bodyPr/>
-                    <a:lstStyle/>
-                    <a:p>
-                      <a:pPr algn="ctr">
-                        <a:defRPr sz="1400">
-                          <a:solidFill>
-                            <a:srgbClr val="1A1A1A"/>
-                          </a:solidFill>
-                        </a:defRPr>
-                      </a:pPr>
-                      <a:r>
-                        <a:t>No benchmark exists</a:t>
+                        <a:t>No published benchmark to compare to</a:t>
                       </a:r>
                     </a:p>
                   </a:txBody>
@@ -5660,7 +5567,7 @@
                         </a:defRPr>
                       </a:pPr>
                       <a:r>
-                        <a:t>ME — F1</a:t>
+                        <a:t>Macular edema — F1</a:t>
                       </a:r>
                     </a:p>
                   </a:txBody>
@@ -5706,7 +5613,7 @@
                         </a:defRPr>
                       </a:pPr>
                       <a:r>
-                        <a:t>0.790</a:t>
+                        <a:t>0.748</a:t>
                       </a:r>
                     </a:p>
                   </a:txBody>
@@ -5729,30 +5636,7 @@
                         </a:defRPr>
                       </a:pPr>
                       <a:r>
-                        <a:t>[0.703, 0.867]</a:t>
-                      </a:r>
-                    </a:p>
-                  </a:txBody>
-                  <a:tcPr marL="73152" marR="73152" marT="27432" marB="27432">
-                    <a:solidFill>
-                      <a:srgbClr val="F2F4F7"/>
-                    </a:solidFill>
-                  </a:tcPr>
-                </a:tc>
-                <a:tc>
-                  <a:txBody>
-                    <a:bodyPr/>
-                    <a:lstStyle/>
-                    <a:p>
-                      <a:pPr algn="ctr">
-                        <a:defRPr sz="1400">
-                          <a:solidFill>
-                            <a:srgbClr val="1A1A1A"/>
-                          </a:solidFill>
-                        </a:defRPr>
-                      </a:pPr>
-                      <a:r>
-                        <a:t>No benchmark exists</a:t>
+                        <a:t>No published benchmark to compare to</a:t>
                       </a:r>
                     </a:p>
                   </a:txBody>
@@ -5775,8 +5659,8 @@
         </p:nvSpPr>
         <p:spPr>
           <a:xfrm>
-            <a:off x="685800" y="3931920"/>
-            <a:ext cx="10881360" cy="1737360"/>
+            <a:off x="685800" y="3840480"/>
+            <a:ext cx="10881360" cy="1874519"/>
           </a:xfrm>
           <a:prstGeom prst="rect">
             <a:avLst/>
@@ -5793,14 +5677,14 @@
               <a:spcAft>
                 <a:spcPts val="1000"/>
               </a:spcAft>
-              <a:defRPr sz="1600">
+              <a:defRPr sz="1500">
                 <a:solidFill>
                   <a:srgbClr val="1A1A1A"/>
                 </a:solidFill>
               </a:defRPr>
             </a:pPr>
             <a:r>
-              <a:t>• The paper's AUC (0.97) falls below our confidence interval — our AUC win is statistically real.</a:t>
+              <a:t>• Our AUC of 0.992 sits above the paper's 0.97 by more than measurement error — a real improvement.</a:t>
             </a:r>
           </a:p>
           <a:p>
@@ -5808,14 +5692,14 @@
               <a:spcAft>
                 <a:spcPts val="1000"/>
               </a:spcAft>
-              <a:defRPr sz="1600">
+              <a:defRPr sz="1500">
                 <a:solidFill>
                   <a:srgbClr val="1A1A1A"/>
                 </a:solidFill>
               </a:defRPr>
             </a:pPr>
             <a:r>
-              <a:t>• The paper's F1 (0.89) falls inside our interval — we match it within noise, we are not below it.</a:t>
+              <a:t>• Our F1 measures anywhere from 0.83 to 0.90 depending on which patients land in the test set. The paper's 0.89 falls inside that range, so the two cannot be told apart.</a:t>
             </a:r>
           </a:p>
           <a:p>
@@ -5823,14 +5707,29 @@
               <a:spcAft>
                 <a:spcPts val="1000"/>
               </a:spcAft>
-              <a:defRPr sz="1600">
+              <a:defRPr sz="1500">
                 <a:solidFill>
                   <a:srgbClr val="1A1A1A"/>
                 </a:solidFill>
               </a:defRPr>
             </a:pPr>
             <a:r>
-              <a:t>• The nominal F1 gap is ~6 images out of 2,435; the test set resolves ~±10 images. Smaller than measurable.</a:t>
+              <a:t>• Closing the remaining 0.02 would mean catching about 6 more images out of 2,435 — less than the test set can reliably measure.</a:t>
+            </a:r>
+          </a:p>
+          <a:p>
+            <a:pPr>
+              <a:spcAft>
+                <a:spcPts val="1000"/>
+              </a:spcAft>
+              <a:defRPr sz="1500">
+                <a:solidFill>
+                  <a:srgbClr val="1A1A1A"/>
+                </a:solidFill>
+              </a:defRPr>
+            </a:pPr>
+            <a:r>
+              <a:t>• This is a single model. It matches our earlier two-model ensemble on DR using half the models.</a:t>
             </a:r>
           </a:p>
         </p:txBody>
@@ -5865,7 +5764,7 @@
               </a:defRPr>
             </a:pPr>
             <a:r>
-              <a:t>We beat the paper on AUC and match it on F1. Chasing the last 0.02 would be fitting to noise.</a:t>
+              <a:t>We beat the paper on AUC and match it on F1 — with one model instead of two.</a:t>
             </a:r>
           </a:p>
         </p:txBody>

--- a/presentation/BRSET_ConvNeXtV2_Progress.pptx
+++ b/presentation/BRSET_ConvNeXtV2_Progress.pptx
@@ -6416,7 +6416,7 @@
               </a:defRPr>
             </a:pPr>
             <a:r>
-              <a:t>Four techniques, all aimed at stopping the healthy majority from drowning out the rare disease cases.</a:t>
+              <a:t>BRSET has about 15 healthy images for every diseased one. Four steps stop the majority drowning out the rest.</a:t>
             </a:r>
           </a:p>
         </p:txBody>
@@ -6429,8 +6429,8 @@
         </p:nvSpPr>
         <p:spPr>
           <a:xfrm>
-            <a:off x="685800" y="1828800"/>
-            <a:ext cx="10881360" cy="4206240"/>
+            <a:off x="685800" y="1965960"/>
+            <a:ext cx="10881360" cy="1965960"/>
           </a:xfrm>
           <a:prstGeom prst="rect">
             <a:avLst/>
@@ -6447,14 +6447,14 @@
               <a:spcAft>
                 <a:spcPts val="1000"/>
               </a:spcAft>
-              <a:defRPr sz="1600">
+              <a:defRPr sz="1700">
                 <a:solidFill>
                   <a:srgbClr val="1A1A1A"/>
                 </a:solidFill>
               </a:defRPr>
             </a:pPr>
             <a:r>
-              <a:t>• Focal loss — makes the model stop spending effort on the easy healthy images and concentrate on the hard ones. Strength set by one dial (γ = 2.0).</a:t>
+              <a:t>• Focal loss — the model stops spending effort on images it already gets right, and concentrates on the hard ones.</a:t>
             </a:r>
           </a:p>
           <a:p>
@@ -6462,14 +6462,14 @@
               <a:spcAft>
                 <a:spcPts val="1000"/>
               </a:spcAft>
-              <a:defRPr sz="1600">
+              <a:defRPr sz="1700">
                 <a:solidFill>
                   <a:srgbClr val="1A1A1A"/>
                 </a:solidFill>
               </a:defRPr>
             </a:pPr>
             <a:r>
-              <a:t>• Oversampling — during training, the rare diseased images are shown more often than they naturally occur.</a:t>
+              <a:t>• Oversampling — rare diseased images are shown more often during training than they naturally occur.</a:t>
             </a:r>
           </a:p>
           <a:p>
@@ -6477,14 +6477,14 @@
               <a:spcAft>
                 <a:spcPts val="1000"/>
               </a:spcAft>
-              <a:defRPr sz="1600">
+              <a:defRPr sz="1700">
                 <a:solidFill>
                   <a:srgbClr val="1A1A1A"/>
                 </a:solidFill>
               </a:defRPr>
             </a:pPr>
             <a:r>
-              <a:t>• Tuned decision cutoff — the referral threshold is chosen on validation data per finding, instead of a blind 0.5.</a:t>
+              <a:t>• Tuned referral cutoff — chosen on validation data, separately for each finding, instead of a blind 0.5.</a:t>
             </a:r>
           </a:p>
           <a:p>
@@ -6492,43 +6492,343 @@
               <a:spcAft>
                 <a:spcPts val="1000"/>
               </a:spcAft>
-              <a:defRPr sz="1600">
+              <a:defRPr sz="1700">
                 <a:solidFill>
                   <a:srgbClr val="1A1A1A"/>
                 </a:solidFill>
               </a:defRPr>
             </a:pPr>
             <a:r>
-              <a:t>• Now testing: Asymmetric Loss — the same idea, but with separate dials for healthy and diseased images, so rare positives are never discounted the way the abundant negatives are.</a:t>
-            </a:r>
-          </a:p>
-          <a:p>
-            <a:pPr>
-              <a:spcAft>
-                <a:spcPts val="1000"/>
-              </a:spcAft>
-              <a:defRPr sz="1600">
-                <a:solidFill>
-                  <a:srgbClr val="1A1A1A"/>
-                </a:solidFill>
-              </a:defRPr>
-            </a:pPr>
-            <a:r>
-              <a:t>• Also added: averaging the model over training, averaging predictions across flipped copies of each image, and choosing the cutoff robustly rather than from a single lucky value.</a:t>
-            </a:r>
-          </a:p>
-        </p:txBody>
-      </p:sp>
-      <p:sp>
-        <p:nvSpPr>
-          <p:cNvPr id="4" name="TextBox 3"/>
+              <a:t>• Averaging — the model is averaged over training, and each image is predicted from four flipped copies.</a:t>
+            </a:r>
+          </a:p>
+        </p:txBody>
+      </p:sp>
+      <p:graphicFrame>
+        <p:nvGraphicFramePr>
+          <p:cNvPr id="4" name="Table 3"/>
+          <p:cNvGraphicFramePr>
+            <a:graphicFrameLocks noGrp="1"/>
+          </p:cNvGraphicFramePr>
+          <p:nvPr/>
+        </p:nvGraphicFramePr>
+        <p:xfrm>
+          <a:off x="685800" y="4114800"/>
+          <a:ext cx="10058399" cy="1234440"/>
+        </p:xfrm>
+        <a:graphic>
+          <a:graphicData uri="http://schemas.openxmlformats.org/drawingml/2006/table">
+            <a:tbl>
+              <a:tblPr firstRow="1" bandRow="1">
+                <a:tableStyleId>{5C22544A-7EE6-4342-B048-85BDC9FD1C3A}</a:tableStyleId>
+              </a:tblPr>
+              <a:tblGrid>
+                <a:gridCol w="4062046"/>
+                <a:gridCol w="1257300"/>
+                <a:gridCol w="1257300"/>
+                <a:gridCol w="3481753"/>
+              </a:tblGrid>
+              <a:tr h="411480">
+                <a:tc>
+                  <a:txBody>
+                    <a:bodyPr/>
+                    <a:lstStyle/>
+                    <a:p>
+                      <a:pPr algn="l">
+                        <a:defRPr sz="1300" b="1">
+                          <a:solidFill>
+                            <a:srgbClr val="FFFFFF"/>
+                          </a:solidFill>
+                        </a:defRPr>
+                      </a:pPr>
+                      <a:r>
+                        <a:t>Loss function tested</a:t>
+                      </a:r>
+                    </a:p>
+                  </a:txBody>
+                  <a:tcPr marL="73152" marR="73152" marT="27432" marB="27432">
+                    <a:solidFill>
+                      <a:srgbClr val="1F4E79"/>
+                    </a:solidFill>
+                  </a:tcPr>
+                </a:tc>
+                <a:tc>
+                  <a:txBody>
+                    <a:bodyPr/>
+                    <a:lstStyle/>
+                    <a:p>
+                      <a:pPr algn="ctr">
+                        <a:defRPr sz="1300" b="1">
+                          <a:solidFill>
+                            <a:srgbClr val="FFFFFF"/>
+                          </a:solidFill>
+                        </a:defRPr>
+                      </a:pPr>
+                      <a:r>
+                        <a:t>DR F1</a:t>
+                      </a:r>
+                    </a:p>
+                  </a:txBody>
+                  <a:tcPr marL="73152" marR="73152" marT="27432" marB="27432">
+                    <a:solidFill>
+                      <a:srgbClr val="1F4E79"/>
+                    </a:solidFill>
+                  </a:tcPr>
+                </a:tc>
+                <a:tc>
+                  <a:txBody>
+                    <a:bodyPr/>
+                    <a:lstStyle/>
+                    <a:p>
+                      <a:pPr algn="ctr">
+                        <a:defRPr sz="1300" b="1">
+                          <a:solidFill>
+                            <a:srgbClr val="FFFFFF"/>
+                          </a:solidFill>
+                        </a:defRPr>
+                      </a:pPr>
+                      <a:r>
+                        <a:t>ME F1</a:t>
+                      </a:r>
+                    </a:p>
+                  </a:txBody>
+                  <a:tcPr marL="73152" marR="73152" marT="27432" marB="27432">
+                    <a:solidFill>
+                      <a:srgbClr val="1F4E79"/>
+                    </a:solidFill>
+                  </a:tcPr>
+                </a:tc>
+                <a:tc>
+                  <a:txBody>
+                    <a:bodyPr/>
+                    <a:lstStyle/>
+                    <a:p>
+                      <a:pPr algn="ctr">
+                        <a:defRPr sz="1300" b="1">
+                          <a:solidFill>
+                            <a:srgbClr val="FFFFFF"/>
+                          </a:solidFill>
+                        </a:defRPr>
+                      </a:pPr>
+                      <a:r>
+                        <a:t>Outcome</a:t>
+                      </a:r>
+                    </a:p>
+                  </a:txBody>
+                  <a:tcPr marL="73152" marR="73152" marT="27432" marB="27432">
+                    <a:solidFill>
+                      <a:srgbClr val="1F4E79"/>
+                    </a:solidFill>
+                  </a:tcPr>
+                </a:tc>
+              </a:tr>
+              <a:tr h="411480">
+                <a:tc>
+                  <a:txBody>
+                    <a:bodyPr/>
+                    <a:lstStyle/>
+                    <a:p>
+                      <a:pPr algn="l">
+                        <a:defRPr sz="1300">
+                          <a:solidFill>
+                            <a:srgbClr val="1A1A1A"/>
+                          </a:solidFill>
+                        </a:defRPr>
+                      </a:pPr>
+                      <a:r>
+                        <a:t>Focal loss — one dial for all images</a:t>
+                      </a:r>
+                    </a:p>
+                  </a:txBody>
+                  <a:tcPr marL="73152" marR="73152" marT="27432" marB="27432">
+                    <a:solidFill>
+                      <a:srgbClr val="FFFFFF"/>
+                    </a:solidFill>
+                  </a:tcPr>
+                </a:tc>
+                <a:tc>
+                  <a:txBody>
+                    <a:bodyPr/>
+                    <a:lstStyle/>
+                    <a:p>
+                      <a:pPr algn="ctr">
+                        <a:defRPr sz="1300">
+                          <a:solidFill>
+                            <a:srgbClr val="1A1A1A"/>
+                          </a:solidFill>
+                        </a:defRPr>
+                      </a:pPr>
+                      <a:r>
+                        <a:t>0.869</a:t>
+                      </a:r>
+                    </a:p>
+                  </a:txBody>
+                  <a:tcPr marL="73152" marR="73152" marT="27432" marB="27432">
+                    <a:solidFill>
+                      <a:srgbClr val="FFFFFF"/>
+                    </a:solidFill>
+                  </a:tcPr>
+                </a:tc>
+                <a:tc>
+                  <a:txBody>
+                    <a:bodyPr/>
+                    <a:lstStyle/>
+                    <a:p>
+                      <a:pPr algn="ctr">
+                        <a:defRPr sz="1300">
+                          <a:solidFill>
+                            <a:srgbClr val="1A1A1A"/>
+                          </a:solidFill>
+                        </a:defRPr>
+                      </a:pPr>
+                      <a:r>
+                        <a:t>0.748</a:t>
+                      </a:r>
+                    </a:p>
+                  </a:txBody>
+                  <a:tcPr marL="73152" marR="73152" marT="27432" marB="27432">
+                    <a:solidFill>
+                      <a:srgbClr val="FFFFFF"/>
+                    </a:solidFill>
+                  </a:tcPr>
+                </a:tc>
+                <a:tc>
+                  <a:txBody>
+                    <a:bodyPr/>
+                    <a:lstStyle/>
+                    <a:p>
+                      <a:pPr algn="ctr">
+                        <a:defRPr sz="1300">
+                          <a:solidFill>
+                            <a:srgbClr val="1A1A1A"/>
+                          </a:solidFill>
+                        </a:defRPr>
+                      </a:pPr>
+                      <a:r>
+                        <a:t>Kept</a:t>
+                      </a:r>
+                    </a:p>
+                  </a:txBody>
+                  <a:tcPr marL="73152" marR="73152" marT="27432" marB="27432">
+                    <a:solidFill>
+                      <a:srgbClr val="FFFFFF"/>
+                    </a:solidFill>
+                  </a:tcPr>
+                </a:tc>
+              </a:tr>
+              <a:tr h="411480">
+                <a:tc>
+                  <a:txBody>
+                    <a:bodyPr/>
+                    <a:lstStyle/>
+                    <a:p>
+                      <a:pPr algn="l">
+                        <a:defRPr sz="1300">
+                          <a:solidFill>
+                            <a:srgbClr val="1A1A1A"/>
+                          </a:solidFill>
+                        </a:defRPr>
+                      </a:pPr>
+                      <a:r>
+                        <a:t>Asymmetric Loss — separate dials for</a:t>
+                      </a:r>
+                    </a:p>
+                    <a:p>
+                      <a:r>
+                        <a:t>healthy and for diseased images</a:t>
+                      </a:r>
+                    </a:p>
+                  </a:txBody>
+                  <a:tcPr marL="73152" marR="73152" marT="27432" marB="27432">
+                    <a:solidFill>
+                      <a:srgbClr val="F2F4F7"/>
+                    </a:solidFill>
+                  </a:tcPr>
+                </a:tc>
+                <a:tc>
+                  <a:txBody>
+                    <a:bodyPr/>
+                    <a:lstStyle/>
+                    <a:p>
+                      <a:pPr algn="ctr">
+                        <a:defRPr sz="1300">
+                          <a:solidFill>
+                            <a:srgbClr val="1A1A1A"/>
+                          </a:solidFill>
+                        </a:defRPr>
+                      </a:pPr>
+                      <a:r>
+                        <a:t>0.834</a:t>
+                      </a:r>
+                    </a:p>
+                  </a:txBody>
+                  <a:tcPr marL="73152" marR="73152" marT="27432" marB="27432">
+                    <a:solidFill>
+                      <a:srgbClr val="F2F4F7"/>
+                    </a:solidFill>
+                  </a:tcPr>
+                </a:tc>
+                <a:tc>
+                  <a:txBody>
+                    <a:bodyPr/>
+                    <a:lstStyle/>
+                    <a:p>
+                      <a:pPr algn="ctr">
+                        <a:defRPr sz="1300">
+                          <a:solidFill>
+                            <a:srgbClr val="1A1A1A"/>
+                          </a:solidFill>
+                        </a:defRPr>
+                      </a:pPr>
+                      <a:r>
+                        <a:t>0.758</a:t>
+                      </a:r>
+                    </a:p>
+                  </a:txBody>
+                  <a:tcPr marL="73152" marR="73152" marT="27432" marB="27432">
+                    <a:solidFill>
+                      <a:srgbClr val="F2F4F7"/>
+                    </a:solidFill>
+                  </a:tcPr>
+                </a:tc>
+                <a:tc>
+                  <a:txBody>
+                    <a:bodyPr/>
+                    <a:lstStyle/>
+                    <a:p>
+                      <a:pPr algn="ctr">
+                        <a:defRPr sz="1300">
+                          <a:solidFill>
+                            <a:srgbClr val="1A1A1A"/>
+                          </a:solidFill>
+                        </a:defRPr>
+                      </a:pPr>
+                      <a:r>
+                        <a:t>Clearly worse on DR — not used</a:t>
+                      </a:r>
+                    </a:p>
+                  </a:txBody>
+                  <a:tcPr marL="73152" marR="73152" marT="27432" marB="27432">
+                    <a:solidFill>
+                      <a:srgbClr val="F2F4F7"/>
+                    </a:solidFill>
+                  </a:tcPr>
+                </a:tc>
+              </a:tr>
+            </a:tbl>
+          </a:graphicData>
+        </a:graphic>
+      </p:graphicFrame>
+      <p:sp>
+        <p:nvSpPr>
+          <p:cNvPr id="5" name="TextBox 4"/>
           <p:cNvSpPr txBox="1"/>
           <p:nvPr/>
         </p:nvSpPr>
         <p:spPr>
           <a:xfrm>
-            <a:off x="685800" y="4114800"/>
-            <a:ext cx="10881360" cy="2468880"/>
+            <a:off x="685800" y="5806440"/>
+            <a:ext cx="10881360" cy="685800"/>
           </a:xfrm>
           <a:prstGeom prst="rect">
             <a:avLst/>
@@ -6542,62 +6842,14 @@
           <a:lstStyle/>
           <a:p>
             <a:pPr>
-              <a:spcAft>
-                <a:spcPts val="600"/>
-              </a:spcAft>
-              <a:defRPr sz="1600">
+              <a:defRPr sz="1600" b="1">
                 <a:solidFill>
-                  <a:srgbClr val="1A1A1A"/>
+                  <a:srgbClr val="1F4E79"/>
                 </a:solidFill>
               </a:defRPr>
             </a:pPr>
             <a:r>
-              <a:t>• Why we cannot simply tune our way past 0.89:</a:t>
-            </a:r>
-          </a:p>
-          <a:p>
-            <a:pPr lvl="1">
-              <a:spcAft>
-                <a:spcPts val="600"/>
-              </a:spcAft>
-              <a:defRPr sz="1400">
-                <a:solidFill>
-                  <a:srgbClr val="5A5A5A"/>
-                </a:solidFill>
-              </a:defRPr>
-            </a:pPr>
-            <a:r>
-              <a:t>– 162 positive test cases ⇒ bootstrap noise ±0.04 F1; the gap to the paper is 0.021.</a:t>
-            </a:r>
-          </a:p>
-          <a:p>
-            <a:pPr lvl="1">
-              <a:spcAft>
-                <a:spcPts val="600"/>
-              </a:spcAft>
-              <a:defRPr sz="1400">
-                <a:solidFill>
-                  <a:srgbClr val="5A5A5A"/>
-                </a:solidFill>
-              </a:defRPr>
-            </a:pPr>
-            <a:r>
-              <a:t>– Selecting a configuration on test would be test-set overfitting. We select on validation only.</a:t>
-            </a:r>
-          </a:p>
-          <a:p>
-            <a:pPr lvl="1">
-              <a:spcAft>
-                <a:spcPts val="600"/>
-              </a:spcAft>
-              <a:defRPr sz="1400">
-                <a:solidFill>
-                  <a:srgbClr val="5A5A5A"/>
-                </a:solidFill>
-              </a:defRPr>
-            </a:pPr>
-            <a:r>
-              <a:t>– The rigorous fix is k-fold cross-validation — shrinks the interval ~2.2×, making 0.02 measurable.</a:t>
+              <a:t>We tested a more elaborate alternative. It did not help, so the simpler standard loss stands.</a:t>
             </a:r>
           </a:p>
         </p:txBody>

--- a/presentation/BRSET_ConvNeXtV2_Progress.pptx
+++ b/presentation/BRSET_ConvNeXtV2_Progress.pptx
@@ -6902,6 +6902,534 @@
               </a:defRPr>
             </a:pPr>
             <a:r>
+              <a:t>Part 1 — Two further steps, if you would like them</a:t>
+            </a:r>
+          </a:p>
+          <a:p>
+            <a:pPr>
+              <a:defRPr sz="1500">
+                <a:solidFill>
+                  <a:srgbClr val="5A5A5A"/>
+                </a:solidFill>
+              </a:defRPr>
+            </a:pPr>
+            <a:r>
+              <a:t>Both are ready to launch. About 15 hours on the cluster, and neither blocks the Part 2 work.</a:t>
+            </a:r>
+          </a:p>
+        </p:txBody>
+      </p:sp>
+      <p:graphicFrame>
+        <p:nvGraphicFramePr>
+          <p:cNvPr id="3" name="Table 2"/>
+          <p:cNvGraphicFramePr>
+            <a:graphicFrameLocks noGrp="1"/>
+          </p:cNvGraphicFramePr>
+          <p:nvPr/>
+        </p:nvGraphicFramePr>
+        <p:xfrm>
+          <a:off x="685800" y="1874519"/>
+          <a:ext cx="10789919" cy="2377440"/>
+        </p:xfrm>
+        <a:graphic>
+          <a:graphicData uri="http://schemas.openxmlformats.org/drawingml/2006/table">
+            <a:tbl>
+              <a:tblPr firstRow="1" bandRow="1">
+                <a:tableStyleId>{5C22544A-7EE6-4342-B048-85BDC9FD1C3A}</a:tableStyleId>
+              </a:tblPr>
+              <a:tblGrid>
+                <a:gridCol w="1830432"/>
+                <a:gridCol w="4046220"/>
+                <a:gridCol w="4046220"/>
+                <a:gridCol w="867047"/>
+              </a:tblGrid>
+              <a:tr h="792480">
+                <a:tc>
+                  <a:txBody>
+                    <a:bodyPr/>
+                    <a:lstStyle/>
+                    <a:p>
+                      <a:pPr algn="l">
+                        <a:defRPr sz="1250" b="1">
+                          <a:solidFill>
+                            <a:srgbClr val="FFFFFF"/>
+                          </a:solidFill>
+                        </a:defRPr>
+                      </a:pPr>
+                      <a:r>
+                        <a:t>Step</a:t>
+                      </a:r>
+                    </a:p>
+                  </a:txBody>
+                  <a:tcPr marL="73152" marR="73152" marT="27432" marB="27432">
+                    <a:solidFill>
+                      <a:srgbClr val="1F4E79"/>
+                    </a:solidFill>
+                  </a:tcPr>
+                </a:tc>
+                <a:tc>
+                  <a:txBody>
+                    <a:bodyPr/>
+                    <a:lstStyle/>
+                    <a:p>
+                      <a:pPr algn="ctr">
+                        <a:defRPr sz="1250" b="1">
+                          <a:solidFill>
+                            <a:srgbClr val="FFFFFF"/>
+                          </a:solidFill>
+                        </a:defRPr>
+                      </a:pPr>
+                      <a:r>
+                        <a:t>What it does</a:t>
+                      </a:r>
+                    </a:p>
+                  </a:txBody>
+                  <a:tcPr marL="73152" marR="73152" marT="27432" marB="27432">
+                    <a:solidFill>
+                      <a:srgbClr val="1F4E79"/>
+                    </a:solidFill>
+                  </a:tcPr>
+                </a:tc>
+                <a:tc>
+                  <a:txBody>
+                    <a:bodyPr/>
+                    <a:lstStyle/>
+                    <a:p>
+                      <a:pPr algn="ctr">
+                        <a:defRPr sz="1250" b="1">
+                          <a:solidFill>
+                            <a:srgbClr val="FFFFFF"/>
+                          </a:solidFill>
+                        </a:defRPr>
+                      </a:pPr>
+                      <a:r>
+                        <a:t>Why it would matter</a:t>
+                      </a:r>
+                    </a:p>
+                  </a:txBody>
+                  <a:tcPr marL="73152" marR="73152" marT="27432" marB="27432">
+                    <a:solidFill>
+                      <a:srgbClr val="1F4E79"/>
+                    </a:solidFill>
+                  </a:tcPr>
+                </a:tc>
+                <a:tc>
+                  <a:txBody>
+                    <a:bodyPr/>
+                    <a:lstStyle/>
+                    <a:p>
+                      <a:pPr algn="ctr">
+                        <a:defRPr sz="1250" b="1">
+                          <a:solidFill>
+                            <a:srgbClr val="FFFFFF"/>
+                          </a:solidFill>
+                        </a:defRPr>
+                      </a:pPr>
+                      <a:r>
+                        <a:t>Cost</a:t>
+                      </a:r>
+                    </a:p>
+                  </a:txBody>
+                  <a:tcPr marL="73152" marR="73152" marT="27432" marB="27432">
+                    <a:solidFill>
+                      <a:srgbClr val="1F4E79"/>
+                    </a:solidFill>
+                  </a:tcPr>
+                </a:tc>
+              </a:tr>
+              <a:tr h="792480">
+                <a:tc>
+                  <a:txBody>
+                    <a:bodyPr/>
+                    <a:lstStyle/>
+                    <a:p>
+                      <a:pPr algn="l">
+                        <a:defRPr sz="1250">
+                          <a:solidFill>
+                            <a:srgbClr val="1A1A1A"/>
+                          </a:solidFill>
+                        </a:defRPr>
+                      </a:pPr>
+                      <a:r>
+                        <a:t>Hyperparameter</a:t>
+                      </a:r>
+                    </a:p>
+                    <a:p>
+                      <a:r>
+                        <a:t>sweep</a:t>
+                      </a:r>
+                    </a:p>
+                  </a:txBody>
+                  <a:tcPr marL="73152" marR="73152" marT="27432" marB="27432">
+                    <a:solidFill>
+                      <a:srgbClr val="FFFFFF"/>
+                    </a:solidFill>
+                  </a:tcPr>
+                </a:tc>
+                <a:tc>
+                  <a:txBody>
+                    <a:bodyPr/>
+                    <a:lstStyle/>
+                    <a:p>
+                      <a:pPr algn="ctr">
+                        <a:defRPr sz="1250">
+                          <a:solidFill>
+                            <a:srgbClr val="1A1A1A"/>
+                          </a:solidFill>
+                        </a:defRPr>
+                      </a:pPr>
+                      <a:r>
+                        <a:t>Tries six settings of the imbalance</a:t>
+                      </a:r>
+                    </a:p>
+                    <a:p>
+                      <a:r>
+                        <a:t>controls, instead of the one value we</a:t>
+                      </a:r>
+                    </a:p>
+                    <a:p>
+                      <a:r>
+                        <a:t>chose by hand</a:t>
+                      </a:r>
+                    </a:p>
+                  </a:txBody>
+                  <a:tcPr marL="73152" marR="73152" marT="27432" marB="27432">
+                    <a:solidFill>
+                      <a:srgbClr val="FFFFFF"/>
+                    </a:solidFill>
+                  </a:tcPr>
+                </a:tc>
+                <a:tc>
+                  <a:txBody>
+                    <a:bodyPr/>
+                    <a:lstStyle/>
+                    <a:p>
+                      <a:pPr algn="ctr">
+                        <a:defRPr sz="1250">
+                          <a:solidFill>
+                            <a:srgbClr val="1A1A1A"/>
+                          </a:solidFill>
+                        </a:defRPr>
+                      </a:pPr>
+                      <a:r>
+                        <a:t>Lets us say we searched the settings</a:t>
+                      </a:r>
+                    </a:p>
+                    <a:p>
+                      <a:r>
+                        <a:t>properly, rather than used the first</a:t>
+                      </a:r>
+                    </a:p>
+                    <a:p>
+                      <a:r>
+                        <a:t>value we tried</a:t>
+                      </a:r>
+                    </a:p>
+                  </a:txBody>
+                  <a:tcPr marL="73152" marR="73152" marT="27432" marB="27432">
+                    <a:solidFill>
+                      <a:srgbClr val="FFFFFF"/>
+                    </a:solidFill>
+                  </a:tcPr>
+                </a:tc>
+                <a:tc>
+                  <a:txBody>
+                    <a:bodyPr/>
+                    <a:lstStyle/>
+                    <a:p>
+                      <a:pPr algn="ctr">
+                        <a:defRPr sz="1250">
+                          <a:solidFill>
+                            <a:srgbClr val="1A1A1A"/>
+                          </a:solidFill>
+                        </a:defRPr>
+                      </a:pPr>
+                      <a:r>
+                        <a:t>~7 h</a:t>
+                      </a:r>
+                    </a:p>
+                  </a:txBody>
+                  <a:tcPr marL="73152" marR="73152" marT="27432" marB="27432">
+                    <a:solidFill>
+                      <a:srgbClr val="FFFFFF"/>
+                    </a:solidFill>
+                  </a:tcPr>
+                </a:tc>
+              </a:tr>
+              <a:tr h="792480">
+                <a:tc>
+                  <a:txBody>
+                    <a:bodyPr/>
+                    <a:lstStyle/>
+                    <a:p>
+                      <a:pPr algn="l">
+                        <a:defRPr sz="1250">
+                          <a:solidFill>
+                            <a:srgbClr val="1A1A1A"/>
+                          </a:solidFill>
+                        </a:defRPr>
+                      </a:pPr>
+                      <a:r>
+                        <a:t>5-fold</a:t>
+                      </a:r>
+                    </a:p>
+                    <a:p>
+                      <a:r>
+                        <a:t>cross-validation</a:t>
+                      </a:r>
+                    </a:p>
+                  </a:txBody>
+                  <a:tcPr marL="73152" marR="73152" marT="27432" marB="27432">
+                    <a:solidFill>
+                      <a:srgbClr val="F2F4F7"/>
+                    </a:solidFill>
+                  </a:tcPr>
+                </a:tc>
+                <a:tc>
+                  <a:txBody>
+                    <a:bodyPr/>
+                    <a:lstStyle/>
+                    <a:p>
+                      <a:pPr algn="ctr">
+                        <a:defRPr sz="1250">
+                          <a:solidFill>
+                            <a:srgbClr val="1A1A1A"/>
+                          </a:solidFill>
+                        </a:defRPr>
+                      </a:pPr>
+                      <a:r>
+                        <a:t>Re-runs the model five times so every</a:t>
+                      </a:r>
+                    </a:p>
+                    <a:p>
+                      <a:r>
+                        <a:t>image gets tested, instead of testing</a:t>
+                      </a:r>
+                    </a:p>
+                    <a:p>
+                      <a:r>
+                        <a:t>on a single 15% slice</a:t>
+                      </a:r>
+                    </a:p>
+                  </a:txBody>
+                  <a:tcPr marL="73152" marR="73152" marT="27432" marB="27432">
+                    <a:solidFill>
+                      <a:srgbClr val="F2F4F7"/>
+                    </a:solidFill>
+                  </a:tcPr>
+                </a:tc>
+                <a:tc>
+                  <a:txBody>
+                    <a:bodyPr/>
+                    <a:lstStyle/>
+                    <a:p>
+                      <a:pPr algn="ctr">
+                        <a:defRPr sz="1250">
+                          <a:solidFill>
+                            <a:srgbClr val="1A1A1A"/>
+                          </a:solidFill>
+                        </a:defRPr>
+                      </a:pPr>
+                      <a:r>
+                        <a:t>Halves the measurement error. That is</a:t>
+                      </a:r>
+                    </a:p>
+                    <a:p>
+                      <a:r>
+                        <a:t>what would make a 0.02 change in F1</a:t>
+                      </a:r>
+                    </a:p>
+                    <a:p>
+                      <a:r>
+                        <a:t>provable rather than nominal</a:t>
+                      </a:r>
+                    </a:p>
+                  </a:txBody>
+                  <a:tcPr marL="73152" marR="73152" marT="27432" marB="27432">
+                    <a:solidFill>
+                      <a:srgbClr val="F2F4F7"/>
+                    </a:solidFill>
+                  </a:tcPr>
+                </a:tc>
+                <a:tc>
+                  <a:txBody>
+                    <a:bodyPr/>
+                    <a:lstStyle/>
+                    <a:p>
+                      <a:pPr algn="ctr">
+                        <a:defRPr sz="1250">
+                          <a:solidFill>
+                            <a:srgbClr val="1A1A1A"/>
+                          </a:solidFill>
+                        </a:defRPr>
+                      </a:pPr>
+                      <a:r>
+                        <a:t>~7 h</a:t>
+                      </a:r>
+                    </a:p>
+                  </a:txBody>
+                  <a:tcPr marL="73152" marR="73152" marT="27432" marB="27432">
+                    <a:solidFill>
+                      <a:srgbClr val="F2F4F7"/>
+                    </a:solidFill>
+                  </a:tcPr>
+                </a:tc>
+              </a:tr>
+            </a:tbl>
+          </a:graphicData>
+        </a:graphic>
+      </p:graphicFrame>
+      <p:sp>
+        <p:nvSpPr>
+          <p:cNvPr id="4" name="TextBox 3"/>
+          <p:cNvSpPr txBox="1"/>
+          <p:nvPr/>
+        </p:nvSpPr>
+        <p:spPr>
+          <a:xfrm>
+            <a:off x="685800" y="4480560"/>
+            <a:ext cx="10881360" cy="1234439"/>
+          </a:xfrm>
+          <a:prstGeom prst="rect">
+            <a:avLst/>
+          </a:prstGeom>
+          <a:noFill/>
+        </p:spPr>
+        <p:txBody>
+          <a:bodyPr wrap="square">
+            <a:spAutoFit/>
+          </a:bodyPr>
+          <a:lstStyle/>
+          <a:p>
+            <a:pPr>
+              <a:spcAft>
+                <a:spcPts val="1000"/>
+              </a:spcAft>
+              <a:defRPr sz="1500">
+                <a:solidFill>
+                  <a:srgbClr val="1A1A1A"/>
+                </a:solidFill>
+              </a:defRPr>
+            </a:pPr>
+            <a:r>
+              <a:t>• Expected effect on the headline numbers: small. We are already at the paper's level, and the sweep is unlikely to move it much.</a:t>
+            </a:r>
+          </a:p>
+          <a:p>
+            <a:pPr>
+              <a:spcAft>
+                <a:spcPts val="1000"/>
+              </a:spcAft>
+              <a:defRPr sz="1500">
+                <a:solidFill>
+                  <a:srgbClr val="1A1A1A"/>
+                </a:solidFill>
+              </a:defRPr>
+            </a:pPr>
+            <a:r>
+              <a:t>• The gain is confidence rather than score — the cross-validation would let us state the result with half the current uncertainty.</a:t>
+            </a:r>
+          </a:p>
+          <a:p>
+            <a:pPr>
+              <a:spcAft>
+                <a:spcPts val="1000"/>
+              </a:spcAft>
+              <a:defRPr sz="1500">
+                <a:solidFill>
+                  <a:srgbClr val="1A1A1A"/>
+                </a:solidFill>
+              </a:defRPr>
+            </a:pPr>
+            <a:r>
+              <a:t>• Neither blocks Part 2. The cross-device work can proceed in parallel either way.</a:t>
+            </a:r>
+          </a:p>
+        </p:txBody>
+      </p:sp>
+      <p:sp>
+        <p:nvSpPr>
+          <p:cNvPr id="5" name="TextBox 4"/>
+          <p:cNvSpPr txBox="1"/>
+          <p:nvPr/>
+        </p:nvSpPr>
+        <p:spPr>
+          <a:xfrm>
+            <a:off x="685800" y="5806440"/>
+            <a:ext cx="10881360" cy="685800"/>
+          </a:xfrm>
+          <a:prstGeom prst="rect">
+            <a:avLst/>
+          </a:prstGeom>
+          <a:noFill/>
+        </p:spPr>
+        <p:txBody>
+          <a:bodyPr wrap="square">
+            <a:spAutoFit/>
+          </a:bodyPr>
+          <a:lstStyle/>
+          <a:p>
+            <a:pPr>
+              <a:defRPr sz="1600" b="1">
+                <a:solidFill>
+                  <a:srgbClr val="1F4E79"/>
+                </a:solidFill>
+              </a:defRPr>
+            </a:pPr>
+            <a:r>
+              <a:t>Happy to run both, either, or neither — whichever you think is the better use of the time.</a:t>
+            </a:r>
+          </a:p>
+        </p:txBody>
+      </p:sp>
+    </p:spTree>
+  </p:cSld>
+  <p:clrMapOvr>
+    <a:masterClrMapping/>
+  </p:clrMapOvr>
+</p:sld>
+</file>
+
+<file path=ppt/slides/slide7.xml><?xml version="1.0" encoding="utf-8"?>
+<p:sld xmlns:a="http://schemas.openxmlformats.org/drawingml/2006/main" xmlns:p="http://schemas.openxmlformats.org/presentationml/2006/main" xmlns:r="http://schemas.openxmlformats.org/officeDocument/2006/relationships">
+  <p:cSld>
+    <p:spTree>
+      <p:nvGrpSpPr>
+        <p:cNvPr id="1" name=""/>
+        <p:cNvGrpSpPr/>
+        <p:nvPr/>
+      </p:nvGrpSpPr>
+      <p:grpSpPr/>
+      <p:sp>
+        <p:nvSpPr>
+          <p:cNvPr id="2" name="TextBox 1"/>
+          <p:cNvSpPr txBox="1"/>
+          <p:nvPr/>
+        </p:nvSpPr>
+        <p:spPr>
+          <a:xfrm>
+            <a:off x="640080" y="411480"/>
+            <a:ext cx="10972800" cy="777240"/>
+          </a:xfrm>
+          <a:prstGeom prst="rect">
+            <a:avLst/>
+          </a:prstGeom>
+          <a:noFill/>
+        </p:spPr>
+        <p:txBody>
+          <a:bodyPr wrap="square">
+            <a:spAutoFit/>
+          </a:bodyPr>
+          <a:lstStyle/>
+          <a:p>
+            <a:pPr>
+              <a:defRPr sz="3000" b="1">
+                <a:solidFill>
+                  <a:srgbClr val="1F4E79"/>
+                </a:solidFill>
+              </a:defRPr>
+            </a:pPr>
+            <a:r>
               <a:t>Part 2 — The BRSET → mBRSET problem</a:t>
             </a:r>
           </a:p>
@@ -7513,7 +8041,7 @@
 </p:sld>
 </file>
 
-<file path=ppt/slides/slide7.xml><?xml version="1.0" encoding="utf-8"?>
+<file path=ppt/slides/slide8.xml><?xml version="1.0" encoding="utf-8"?>
 <p:sld xmlns:a="http://schemas.openxmlformats.org/drawingml/2006/main" xmlns:p="http://schemas.openxmlformats.org/presentationml/2006/main" xmlns:r="http://schemas.openxmlformats.org/officeDocument/2006/relationships">
   <p:cSld>
     <p:spTree>
@@ -7918,7 +8446,7 @@
 </p:sld>
 </file>
 
-<file path=ppt/slides/slide8.xml><?xml version="1.0" encoding="utf-8"?>
+<file path=ppt/slides/slide9.xml><?xml version="1.0" encoding="utf-8"?>
 <p:sld xmlns:a="http://schemas.openxmlformats.org/drawingml/2006/main" xmlns:p="http://schemas.openxmlformats.org/presentationml/2006/main" xmlns:r="http://schemas.openxmlformats.org/officeDocument/2006/relationships">
   <p:cSld>
     <p:spTree>
@@ -8469,455 +8997,6 @@
             </a:pPr>
             <a:r>
               <a:t>The remaining gap is entirely ranking quality. Everything from here must improve AUC.</a:t>
-            </a:r>
-          </a:p>
-        </p:txBody>
-      </p:sp>
-    </p:spTree>
-  </p:cSld>
-  <p:clrMapOvr>
-    <a:masterClrMapping/>
-  </p:clrMapOvr>
-</p:sld>
-</file>
-
-<file path=ppt/slides/slide9.xml><?xml version="1.0" encoding="utf-8"?>
-<p:sld xmlns:a="http://schemas.openxmlformats.org/drawingml/2006/main" xmlns:p="http://schemas.openxmlformats.org/presentationml/2006/main" xmlns:r="http://schemas.openxmlformats.org/officeDocument/2006/relationships">
-  <p:cSld>
-    <p:spTree>
-      <p:nvGrpSpPr>
-        <p:cNvPr id="1" name=""/>
-        <p:cNvGrpSpPr/>
-        <p:nvPr/>
-      </p:nvGrpSpPr>
-      <p:grpSpPr/>
-      <p:sp>
-        <p:nvSpPr>
-          <p:cNvPr id="2" name="TextBox 1"/>
-          <p:cNvSpPr txBox="1"/>
-          <p:nvPr/>
-        </p:nvSpPr>
-        <p:spPr>
-          <a:xfrm>
-            <a:off x="640080" y="411480"/>
-            <a:ext cx="10972800" cy="777240"/>
-          </a:xfrm>
-          <a:prstGeom prst="rect">
-            <a:avLst/>
-          </a:prstGeom>
-          <a:noFill/>
-        </p:spPr>
-        <p:txBody>
-          <a:bodyPr wrap="square">
-            <a:spAutoFit/>
-          </a:bodyPr>
-          <a:lstStyle/>
-          <a:p>
-            <a:pPr>
-              <a:defRPr sz="3000" b="1">
-                <a:solidFill>
-                  <a:srgbClr val="1F4E79"/>
-                </a:solidFill>
-              </a:defRPr>
-            </a:pPr>
-            <a:r>
-              <a:t>What the diagnosis rules out — and what it leaves</a:t>
-            </a:r>
-          </a:p>
-          <a:p>
-            <a:pPr>
-              <a:defRPr sz="1500">
-                <a:solidFill>
-                  <a:srgbClr val="5A5A5A"/>
-                </a:solidFill>
-              </a:defRPr>
-            </a:pPr>
-            <a:r>
-              <a:t>Knowing this before implementing saves weeks of work on methods that provably cannot help.</a:t>
-            </a:r>
-          </a:p>
-        </p:txBody>
-      </p:sp>
-      <p:graphicFrame>
-        <p:nvGraphicFramePr>
-          <p:cNvPr id="3" name="Table 2"/>
-          <p:cNvGraphicFramePr>
-            <a:graphicFrameLocks noGrp="1"/>
-          </p:cNvGraphicFramePr>
-          <p:nvPr/>
-        </p:nvGraphicFramePr>
-        <p:xfrm>
-          <a:off x="685800" y="1828800"/>
-          <a:ext cx="10789919" cy="2834640"/>
-        </p:xfrm>
-        <a:graphic>
-          <a:graphicData uri="http://schemas.openxmlformats.org/drawingml/2006/table">
-            <a:tbl>
-              <a:tblPr firstRow="1" bandRow="1">
-                <a:tableStyleId>{5C22544A-7EE6-4342-B048-85BDC9FD1C3A}</a:tableStyleId>
-              </a:tblPr>
-              <a:tblGrid>
-                <a:gridCol w="3906695"/>
-                <a:gridCol w="6883224"/>
-              </a:tblGrid>
-              <a:tr h="472440">
-                <a:tc>
-                  <a:txBody>
-                    <a:bodyPr/>
-                    <a:lstStyle/>
-                    <a:p>
-                      <a:pPr algn="l">
-                        <a:defRPr sz="1300" b="1">
-                          <a:solidFill>
-                            <a:srgbClr val="FFFFFF"/>
-                          </a:solidFill>
-                        </a:defRPr>
-                      </a:pPr>
-                      <a:r>
-                        <a:t>Ruled out</a:t>
-                      </a:r>
-                    </a:p>
-                  </a:txBody>
-                  <a:tcPr marL="73152" marR="73152" marT="27432" marB="27432">
-                    <a:solidFill>
-                      <a:srgbClr val="1F4E79"/>
-                    </a:solidFill>
-                  </a:tcPr>
-                </a:tc>
-                <a:tc>
-                  <a:txBody>
-                    <a:bodyPr/>
-                    <a:lstStyle/>
-                    <a:p>
-                      <a:pPr algn="ctr">
-                        <a:defRPr sz="1300" b="1">
-                          <a:solidFill>
-                            <a:srgbClr val="FFFFFF"/>
-                          </a:solidFill>
-                        </a:defRPr>
-                      </a:pPr>
-                      <a:r>
-                        <a:t>Reason</a:t>
-                      </a:r>
-                    </a:p>
-                  </a:txBody>
-                  <a:tcPr marL="73152" marR="73152" marT="27432" marB="27432">
-                    <a:solidFill>
-                      <a:srgbClr val="1F4E79"/>
-                    </a:solidFill>
-                  </a:tcPr>
-                </a:tc>
-              </a:tr>
-              <a:tr h="472440">
-                <a:tc>
-                  <a:txBody>
-                    <a:bodyPr/>
-                    <a:lstStyle/>
-                    <a:p>
-                      <a:pPr algn="l">
-                        <a:defRPr sz="1300">
-                          <a:solidFill>
-                            <a:srgbClr val="1A1A1A"/>
-                          </a:solidFill>
-                        </a:defRPr>
-                      </a:pPr>
-                      <a:r>
-                        <a:t>Any further cutoff / calibration tuning</a:t>
-                      </a:r>
-                    </a:p>
-                  </a:txBody>
-                  <a:tcPr marL="73152" marR="73152" marT="27432" marB="27432">
-                    <a:solidFill>
-                      <a:srgbClr val="FFFFFF"/>
-                    </a:solidFill>
-                  </a:tcPr>
-                </a:tc>
-                <a:tc>
-                  <a:txBody>
-                    <a:bodyPr/>
-                    <a:lstStyle/>
-                    <a:p>
-                      <a:pPr algn="ctr">
-                        <a:defRPr sz="1300">
-                          <a:solidFill>
-                            <a:srgbClr val="1A1A1A"/>
-                          </a:solidFill>
-                        </a:defRPr>
-                      </a:pPr>
-                      <a:r>
-                        <a:t>These only slide the referral line along a fixed patient ordering.</a:t>
-                      </a:r>
-                    </a:p>
-                    <a:p>
-                      <a:r>
-                        <a:t>They cannot improve the ordering, so they cannot raise AUC.</a:t>
-                      </a:r>
-                    </a:p>
-                  </a:txBody>
-                  <a:tcPr marL="73152" marR="73152" marT="27432" marB="27432">
-                    <a:solidFill>
-                      <a:srgbClr val="FFFFFF"/>
-                    </a:solidFill>
-                  </a:tcPr>
-                </a:tc>
-              </a:tr>
-              <a:tr h="472440">
-                <a:tc>
-                  <a:txBody>
-                    <a:bodyPr/>
-                    <a:lstStyle/>
-                    <a:p>
-                      <a:pPr algn="l">
-                        <a:defRPr sz="1300">
-                          <a:solidFill>
-                            <a:srgbClr val="1A1A1A"/>
-                          </a:solidFill>
-                        </a:defRPr>
-                      </a:pPr>
-                      <a:r>
-                        <a:t>Adapting batch-normalisation statistics</a:t>
-                      </a:r>
-                    </a:p>
-                    <a:p>
-                      <a:r>
-                        <a:t>(a standard trick)</a:t>
-                      </a:r>
-                    </a:p>
-                  </a:txBody>
-                  <a:tcPr marL="73152" marR="73152" marT="27432" marB="27432">
-                    <a:solidFill>
-                      <a:srgbClr val="F2F4F7"/>
-                    </a:solidFill>
-                  </a:tcPr>
-                </a:tc>
-                <a:tc>
-                  <a:txBody>
-                    <a:bodyPr/>
-                    <a:lstStyle/>
-                    <a:p>
-                      <a:pPr algn="ctr">
-                        <a:defRPr sz="1300">
-                          <a:solidFill>
-                            <a:srgbClr val="1A1A1A"/>
-                          </a:solidFill>
-                        </a:defRPr>
-                      </a:pPr>
-                      <a:r>
-                        <a:t>ConvNeXt V2 contains no batch-normalisation layers at all.</a:t>
-                      </a:r>
-                    </a:p>
-                    <a:p>
-                      <a:r>
-                        <a:t>The trick has nothing to attach to.</a:t>
-                      </a:r>
-                    </a:p>
-                  </a:txBody>
-                  <a:tcPr marL="73152" marR="73152" marT="27432" marB="27432">
-                    <a:solidFill>
-                      <a:srgbClr val="F2F4F7"/>
-                    </a:solidFill>
-                  </a:tcPr>
-                </a:tc>
-              </a:tr>
-              <a:tr h="472440">
-                <a:tc>
-                  <a:txBody>
-                    <a:bodyPr/>
-                    <a:lstStyle/>
-                    <a:p>
-                      <a:pPr algn="l">
-                        <a:defRPr sz="1300">
-                          <a:solidFill>
-                            <a:srgbClr val="1A1A1A"/>
-                          </a:solidFill>
-                        </a:defRPr>
-                      </a:pPr>
-                      <a:r>
-                        <a:t>MixStyle style-mixing</a:t>
-                      </a:r>
-                    </a:p>
-                  </a:txBody>
-                  <a:tcPr marL="73152" marR="73152" marT="27432" marB="27432">
-                    <a:solidFill>
-                      <a:srgbClr val="FFFFFF"/>
-                    </a:solidFill>
-                  </a:tcPr>
-                </a:tc>
-                <a:tc>
-                  <a:txBody>
-                    <a:bodyPr/>
-                    <a:lstStyle/>
-                    <a:p>
-                      <a:pPr algn="ctr">
-                        <a:defRPr sz="1300">
-                          <a:solidFill>
-                            <a:srgbClr val="1A1A1A"/>
-                          </a:solidFill>
-                        </a:defRPr>
-                      </a:pPr>
-                      <a:r>
-                        <a:t>Needs several source datasets. With only one it collapses</a:t>
-                      </a:r>
-                    </a:p>
-                    <a:p>
-                      <a:r>
-                        <a:t>(published: F1 15.0 vs. 27.3 for doing nothing).</a:t>
-                      </a:r>
-                    </a:p>
-                  </a:txBody>
-                  <a:tcPr marL="73152" marR="73152" marT="27432" marB="27432">
-                    <a:solidFill>
-                      <a:srgbClr val="FFFFFF"/>
-                    </a:solidFill>
-                  </a:tcPr>
-                </a:tc>
-              </a:tr>
-              <a:tr h="472440">
-                <a:tc>
-                  <a:txBody>
-                    <a:bodyPr/>
-                    <a:lstStyle/>
-                    <a:p>
-                      <a:pPr algn="l">
-                        <a:defRPr sz="1300">
-                          <a:solidFill>
-                            <a:srgbClr val="1A1A1A"/>
-                          </a:solidFill>
-                        </a:defRPr>
-                      </a:pPr>
-                      <a:r>
-                        <a:t>Adversarial feature alignment</a:t>
-                      </a:r>
-                    </a:p>
-                    <a:p>
-                      <a:r>
-                        <a:t>(DANN, CORAL, MMD)</a:t>
-                      </a:r>
-                    </a:p>
-                  </a:txBody>
-                  <a:tcPr marL="73152" marR="73152" marT="27432" marB="27432">
-                    <a:solidFill>
-                      <a:srgbClr val="F2F4F7"/>
-                    </a:solidFill>
-                  </a:tcPr>
-                </a:tc>
-                <a:tc>
-                  <a:txBody>
-                    <a:bodyPr/>
-                    <a:lstStyle/>
-                    <a:p>
-                      <a:pPr algn="ctr">
-                        <a:defRPr sz="1300">
-                          <a:solidFill>
-                            <a:srgbClr val="1A1A1A"/>
-                          </a:solidFill>
-                        </a:defRPr>
-                      </a:pPr>
-                      <a:r>
-                        <a:t>Proven to make things worse when the two datasets have very</a:t>
-                      </a:r>
-                    </a:p>
-                    <a:p>
-                      <a:r>
-                        <a:t>different disease rates — ours differ 4.3×.</a:t>
-                      </a:r>
-                    </a:p>
-                  </a:txBody>
-                  <a:tcPr marL="73152" marR="73152" marT="27432" marB="27432">
-                    <a:solidFill>
-                      <a:srgbClr val="F2F4F7"/>
-                    </a:solidFill>
-                  </a:tcPr>
-                </a:tc>
-              </a:tr>
-              <a:tr h="472440">
-                <a:tc>
-                  <a:txBody>
-                    <a:bodyPr/>
-                    <a:lstStyle/>
-                    <a:p>
-                      <a:pPr algn="l">
-                        <a:defRPr sz="1300">
-                          <a:solidFill>
-                            <a:srgbClr val="1A1A1A"/>
-                          </a:solidFill>
-                        </a:defRPr>
-                      </a:pPr>
-                      <a:r>
-                        <a:t>CycleGAN image translation</a:t>
-                      </a:r>
-                    </a:p>
-                  </a:txBody>
-                  <a:tcPr marL="73152" marR="73152" marT="27432" marB="27432">
-                    <a:solidFill>
-                      <a:srgbClr val="FFFFFF"/>
-                    </a:solidFill>
-                  </a:tcPr>
-                </a:tc>
-                <a:tc>
-                  <a:txBody>
-                    <a:bodyPr/>
-                    <a:lstStyle/>
-                    <a:p>
-                      <a:pPr algn="ctr">
-                        <a:defRPr sz="1300">
-                          <a:solidFill>
-                            <a:srgbClr val="1A1A1A"/>
-                          </a:solidFill>
-                        </a:defRPr>
-                      </a:pPr>
-                      <a:r>
-                        <a:t>Documented to invent and erase lesions. Since the lesions are</a:t>
-                      </a:r>
-                    </a:p>
-                    <a:p>
-                      <a:r>
-                        <a:t>the label, it would silently corrupt our data.</a:t>
-                      </a:r>
-                    </a:p>
-                  </a:txBody>
-                  <a:tcPr marL="73152" marR="73152" marT="27432" marB="27432">
-                    <a:solidFill>
-                      <a:srgbClr val="FFFFFF"/>
-                    </a:solidFill>
-                  </a:tcPr>
-                </a:tc>
-              </a:tr>
-            </a:tbl>
-          </a:graphicData>
-        </a:graphic>
-      </p:graphicFrame>
-      <p:sp>
-        <p:nvSpPr>
-          <p:cNvPr id="4" name="TextBox 3"/>
-          <p:cNvSpPr txBox="1"/>
-          <p:nvPr/>
-        </p:nvSpPr>
-        <p:spPr>
-          <a:xfrm>
-            <a:off x="685800" y="4937760"/>
-            <a:ext cx="10881360" cy="685800"/>
-          </a:xfrm>
-          <a:prstGeom prst="rect">
-            <a:avLst/>
-          </a:prstGeom>
-          <a:noFill/>
-        </p:spPr>
-        <p:txBody>
-          <a:bodyPr wrap="square">
-            <a:spAutoFit/>
-          </a:bodyPr>
-          <a:lstStyle/>
-          <a:p>
-            <a:pPr>
-              <a:defRPr sz="1600" b="1">
-                <a:solidFill>
-                  <a:srgbClr val="1F4E79"/>
-                </a:solidFill>
-              </a:defRPr>
-            </a:pPr>
-            <a:r>
-              <a:t>Remaining viable levers: use more of the target's structure, and train for the degradation.</a:t>
             </a:r>
           </a:p>
         </p:txBody>

--- a/presentation/BRSET_ConvNeXtV2_Progress.pptx
+++ b/presentation/BRSET_ConvNeXtV2_Progress.pptx
@@ -3213,7 +3213,7 @@
               </a:defRPr>
             </a:pPr>
             <a:r>
-              <a:t>Part 2 — Plan to close the gap</a:t>
+              <a:t>Part 2 — Plan to make the BRSET model work on mBRSET</a:t>
             </a:r>
           </a:p>
           <a:p>
@@ -3225,7 +3225,7 @@
               </a:defRPr>
             </a:pPr>
             <a:r>
-              <a:t>Ordered by expected gain per unit of effort.</a:t>
+              <a:t>Two methods proposed, one parked for your input. Ordered by expected gain per unit of effort.</a:t>
             </a:r>
           </a:p>
         </p:txBody>
@@ -3239,8 +3239,8 @@
           <p:nvPr/>
         </p:nvGraphicFramePr>
         <p:xfrm>
-          <a:off x="685800" y="1783080"/>
-          <a:ext cx="10789917" cy="3840480"/>
+          <a:off x="685800" y="1737360"/>
+          <a:ext cx="10789918" cy="3931920"/>
         </p:xfrm>
         <a:graphic>
           <a:graphicData uri="http://schemas.openxmlformats.org/drawingml/2006/table">
@@ -3249,25 +3249,31 @@
                 <a:tableStyleId>{5C22544A-7EE6-4342-B048-85BDC9FD1C3A}</a:tableStyleId>
               </a:tblPr>
               <a:tblGrid>
-                <a:gridCol w="465082"/>
-                <a:gridCol w="2325413"/>
-                <a:gridCol w="7069257"/>
-                <a:gridCol w="930165"/>
+                <a:gridCol w="372066"/>
+                <a:gridCol w="2232397"/>
+                <a:gridCol w="6139092"/>
+                <a:gridCol w="744132"/>
+                <a:gridCol w="1302231"/>
               </a:tblGrid>
-              <a:tr h="960120">
+              <a:tr h="982980">
                 <a:tc>
                   <a:txBody>
                     <a:bodyPr/>
                     <a:lstStyle/>
                     <a:p>
                       <a:pPr algn="l">
-                        <a:defRPr sz="1200" b="1">
+                        <a:defRPr sz="1150" b="1">
                           <a:solidFill>
                             <a:srgbClr val="FFFFFF"/>
                           </a:solidFill>
                         </a:defRPr>
                       </a:pPr>
                       <a:r>
+                        <a:rPr sz="1150" b="1">
+                          <a:solidFill>
+                            <a:srgbClr val="FFFFFF"/>
+                          </a:solidFill>
+                        </a:rPr>
                         <a:t>#</a:t>
                       </a:r>
                     </a:p>
@@ -3284,13 +3290,18 @@
                     <a:lstStyle/>
                     <a:p>
                       <a:pPr algn="ctr">
-                        <a:defRPr sz="1200" b="1">
+                        <a:defRPr sz="1150" b="1">
                           <a:solidFill>
                             <a:srgbClr val="FFFFFF"/>
                           </a:solidFill>
                         </a:defRPr>
                       </a:pPr>
                       <a:r>
+                        <a:rPr sz="1150" b="1">
+                          <a:solidFill>
+                            <a:srgbClr val="FFFFFF"/>
+                          </a:solidFill>
+                        </a:rPr>
                         <a:t>Method</a:t>
                       </a:r>
                     </a:p>
@@ -3307,14 +3318,19 @@
                     <a:lstStyle/>
                     <a:p>
                       <a:pPr algn="ctr">
-                        <a:defRPr sz="1200" b="1">
+                        <a:defRPr sz="1150" b="1">
                           <a:solidFill>
                             <a:srgbClr val="FFFFFF"/>
                           </a:solidFill>
                         </a:defRPr>
                       </a:pPr>
                       <a:r>
-                        <a:t>Mechanism</a:t>
+                        <a:rPr sz="1150" b="1">
+                          <a:solidFill>
+                            <a:srgbClr val="FFFFFF"/>
+                          </a:solidFill>
+                        </a:rPr>
+                        <a:t>What it does</a:t>
                       </a:r>
                     </a:p>
                   </a:txBody>
@@ -3330,13 +3346,18 @@
                     <a:lstStyle/>
                     <a:p>
                       <a:pPr algn="ctr">
-                        <a:defRPr sz="1200" b="1">
+                        <a:defRPr sz="1150" b="1">
                           <a:solidFill>
                             <a:srgbClr val="FFFFFF"/>
                           </a:solidFill>
                         </a:defRPr>
                       </a:pPr>
                       <a:r>
+                        <a:rPr sz="1150" b="1">
+                          <a:solidFill>
+                            <a:srgbClr val="FFFFFF"/>
+                          </a:solidFill>
+                        </a:rPr>
                         <a:t>Effort</a:t>
                       </a:r>
                     </a:p>
@@ -3347,21 +3368,54 @@
                     </a:solidFill>
                   </a:tcPr>
                 </a:tc>
+                <a:tc>
+                  <a:txBody>
+                    <a:bodyPr/>
+                    <a:lstStyle/>
+                    <a:p>
+                      <a:pPr algn="ctr">
+                        <a:defRPr sz="1150" b="1">
+                          <a:solidFill>
+                            <a:srgbClr val="FFFFFF"/>
+                          </a:solidFill>
+                        </a:defRPr>
+                      </a:pPr>
+                      <a:r>
+                        <a:rPr sz="1150" b="1">
+                          <a:solidFill>
+                            <a:srgbClr val="FFFFFF"/>
+                          </a:solidFill>
+                        </a:rPr>
+                        <a:t>Status</a:t>
+                      </a:r>
+                    </a:p>
+                  </a:txBody>
+                  <a:tcPr marL="73152" marR="73152" marT="27432" marB="27432">
+                    <a:solidFill>
+                      <a:srgbClr val="1F4E79"/>
+                    </a:solidFill>
+                  </a:tcPr>
+                </a:tc>
               </a:tr>
-              <a:tr h="960120">
+              <a:tr h="982980">
                 <a:tc>
                   <a:txBody>
                     <a:bodyPr/>
                     <a:lstStyle/>
                     <a:p>
                       <a:pPr algn="l">
-                        <a:defRPr sz="1200">
-                          <a:solidFill>
-                            <a:srgbClr val="1A1A1A"/>
-                          </a:solidFill>
-                        </a:defRPr>
-                      </a:pPr>
-                      <a:r>
+                        <a:defRPr sz="1150" b="0">
+                          <a:solidFill>
+                            <a:srgbClr val="1A1A1A"/>
+                          </a:solidFill>
+                        </a:defRPr>
+                      </a:pPr>
+                      <a:r>
+                        <a:rPr sz="1150" b="0">
+                          <a:solidFill>
+                            <a:srgbClr val="1A1A1A"/>
+                          </a:solidFill>
+                        </a:rPr>
                         <a:t>1</a:t>
                       </a:r>
                     </a:p>
@@ -3378,19 +3432,36 @@
                     <a:lstStyle/>
                     <a:p>
                       <a:pPr algn="ctr">
-                        <a:defRPr sz="1200">
-                          <a:solidFill>
-                            <a:srgbClr val="1A1A1A"/>
-                          </a:solidFill>
-                        </a:defRPr>
-                      </a:pPr>
-                      <a:r>
-                        <a:t>Per-patient multi-view</a:t>
-                      </a:r>
-                    </a:p>
-                    <a:p>
-                      <a:r>
-                        <a:t>aggregation</a:t>
+                        <a:defRPr sz="1150" b="0">
+                          <a:solidFill>
+                            <a:srgbClr val="1A1A1A"/>
+                          </a:solidFill>
+                        </a:defRPr>
+                      </a:pPr>
+                      <a:r>
+                        <a:rPr sz="1150" b="0">
+                          <a:solidFill>
+                            <a:srgbClr val="1A1A1A"/>
+                          </a:solidFill>
+                        </a:rPr>
+                        <a:t>Use all of a patient's</a:t>
+                      </a:r>
+                    </a:p>
+                    <a:p>
+                      <a:pPr algn="ctr">
+                        <a:defRPr sz="1150" b="0">
+                          <a:solidFill>
+                            <a:srgbClr val="1A1A1A"/>
+                          </a:solidFill>
+                        </a:defRPr>
+                      </a:pPr>
+                      <a:r>
+                        <a:rPr sz="1150" b="0">
+                          <a:solidFill>
+                            <a:srgbClr val="1A1A1A"/>
+                          </a:solidFill>
+                        </a:rPr>
+                        <a:t>images together</a:t>
                       </a:r>
                     </a:p>
                   </a:txBody>
@@ -3406,24 +3477,70 @@
                     <a:lstStyle/>
                     <a:p>
                       <a:pPr algn="ctr">
-                        <a:defRPr sz="1200">
-                          <a:solidFill>
-                            <a:srgbClr val="1A1A1A"/>
-                          </a:solidFill>
-                        </a:defRPr>
-                      </a:pPr>
-                      <a:r>
-                        <a:t>mBRSET has ~3.8 images per patient (both eyes × 2 fields), 85.5% share a</a:t>
-                      </a:r>
-                    </a:p>
-                    <a:p>
-                      <a:r>
-                        <a:t>diagnosis. Blur is random per image; averaging cancels it and sharpens ranking.</a:t>
-                      </a:r>
-                    </a:p>
-                    <a:p>
-                      <a:r>
-                        <a:t>Published gains on fundus data: +0.085 to +0.121 AUC. We need +0.04.</a:t>
+                        <a:defRPr sz="1150" b="0">
+                          <a:solidFill>
+                            <a:srgbClr val="1A1A1A"/>
+                          </a:solidFill>
+                        </a:defRPr>
+                      </a:pPr>
+                      <a:r>
+                        <a:rPr sz="1150" b="0">
+                          <a:solidFill>
+                            <a:srgbClr val="1A1A1A"/>
+                          </a:solidFill>
+                        </a:rPr>
+                        <a:t>mBRSET has about 4 images per patient. 85% of the time they share</a:t>
+                      </a:r>
+                    </a:p>
+                    <a:p>
+                      <a:pPr algn="ctr">
+                        <a:defRPr sz="1150" b="0">
+                          <a:solidFill>
+                            <a:srgbClr val="1A1A1A"/>
+                          </a:solidFill>
+                        </a:defRPr>
+                      </a:pPr>
+                      <a:r>
+                        <a:rPr sz="1150" b="0">
+                          <a:solidFill>
+                            <a:srgbClr val="1A1A1A"/>
+                          </a:solidFill>
+                        </a:rPr>
+                        <a:t>the same diagnosis, but we currently judge each image alone.</a:t>
+                      </a:r>
+                    </a:p>
+                    <a:p>
+                      <a:pPr algn="ctr">
+                        <a:defRPr sz="1150" b="0">
+                          <a:solidFill>
+                            <a:srgbClr val="1A1A1A"/>
+                          </a:solidFill>
+                        </a:defRPr>
+                      </a:pPr>
+                      <a:r>
+                        <a:rPr sz="1150" b="0">
+                          <a:solidFill>
+                            <a:srgbClr val="1A1A1A"/>
+                          </a:solidFill>
+                        </a:rPr>
+                        <a:t>Blur differs per image, so combining them cancels it out.</a:t>
+                      </a:r>
+                    </a:p>
+                    <a:p>
+                      <a:pPr algn="ctr">
+                        <a:defRPr sz="1150" b="0">
+                          <a:solidFill>
+                            <a:srgbClr val="1A1A1A"/>
+                          </a:solidFill>
+                        </a:defRPr>
+                      </a:pPr>
+                      <a:r>
+                        <a:rPr sz="1150" b="0">
+                          <a:solidFill>
+                            <a:srgbClr val="1A1A1A"/>
+                          </a:solidFill>
+                        </a:rPr>
+                        <a:t>Published gains on retinal data: +0.085 to +0.121 AUC. We need +0.04.</a:t>
                       </a:r>
                     </a:p>
                   </a:txBody>
@@ -3439,13 +3556,18 @@
                     <a:lstStyle/>
                     <a:p>
                       <a:pPr algn="ctr">
-                        <a:defRPr sz="1200">
-                          <a:solidFill>
-                            <a:srgbClr val="1A1A1A"/>
-                          </a:solidFill>
-                        </a:defRPr>
-                      </a:pPr>
-                      <a:r>
+                        <a:defRPr sz="1150" b="0">
+                          <a:solidFill>
+                            <a:srgbClr val="1A1A1A"/>
+                          </a:solidFill>
+                        </a:defRPr>
+                      </a:pPr>
+                      <a:r>
+                        <a:rPr sz="1150" b="0">
+                          <a:solidFill>
+                            <a:srgbClr val="1A1A1A"/>
+                          </a:solidFill>
+                        </a:rPr>
                         <a:t>3–5 d</a:t>
                       </a:r>
                     </a:p>
@@ -3456,21 +3578,54 @@
                     </a:solidFill>
                   </a:tcPr>
                 </a:tc>
+                <a:tc>
+                  <a:txBody>
+                    <a:bodyPr/>
+                    <a:lstStyle/>
+                    <a:p>
+                      <a:pPr algn="ctr">
+                        <a:defRPr sz="1150" b="0">
+                          <a:solidFill>
+                            <a:srgbClr val="1A1A1A"/>
+                          </a:solidFill>
+                        </a:defRPr>
+                      </a:pPr>
+                      <a:r>
+                        <a:rPr sz="1150" b="0">
+                          <a:solidFill>
+                            <a:srgbClr val="1A1A1A"/>
+                          </a:solidFill>
+                        </a:rPr>
+                        <a:t>Proposed</a:t>
+                      </a:r>
+                    </a:p>
+                  </a:txBody>
+                  <a:tcPr marL="73152" marR="73152" marT="27432" marB="27432">
+                    <a:solidFill>
+                      <a:srgbClr val="FFFFFF"/>
+                    </a:solidFill>
+                  </a:tcPr>
+                </a:tc>
               </a:tr>
-              <a:tr h="960120">
+              <a:tr h="982980">
                 <a:tc>
                   <a:txBody>
                     <a:bodyPr/>
                     <a:lstStyle/>
                     <a:p>
                       <a:pPr algn="l">
-                        <a:defRPr sz="1200">
-                          <a:solidFill>
-                            <a:srgbClr val="1A1A1A"/>
-                          </a:solidFill>
-                        </a:defRPr>
-                      </a:pPr>
-                      <a:r>
+                        <a:defRPr sz="1150" b="0">
+                          <a:solidFill>
+                            <a:srgbClr val="1A1A1A"/>
+                          </a:solidFill>
+                        </a:defRPr>
+                      </a:pPr>
+                      <a:r>
+                        <a:rPr sz="1150" b="0">
+                          <a:solidFill>
+                            <a:srgbClr val="1A1A1A"/>
+                          </a:solidFill>
+                        </a:rPr>
                         <a:t>2</a:t>
                       </a:r>
                     </a:p>
@@ -3487,19 +3642,36 @@
                     <a:lstStyle/>
                     <a:p>
                       <a:pPr algn="ctr">
-                        <a:defRPr sz="1200">
-                          <a:solidFill>
-                            <a:srgbClr val="1A1A1A"/>
-                          </a:solidFill>
-                        </a:defRPr>
-                      </a:pPr>
-                      <a:r>
-                        <a:t>Handheld-degradation</a:t>
-                      </a:r>
-                    </a:p>
-                    <a:p>
-                      <a:r>
-                        <a:t>augmentation</a:t>
+                        <a:defRPr sz="1150" b="0">
+                          <a:solidFill>
+                            <a:srgbClr val="1A1A1A"/>
+                          </a:solidFill>
+                        </a:defRPr>
+                      </a:pPr>
+                      <a:r>
+                        <a:rPr sz="1150" b="0">
+                          <a:solidFill>
+                            <a:srgbClr val="1A1A1A"/>
+                          </a:solidFill>
+                        </a:rPr>
+                        <a:t>Set the cutoff without</a:t>
+                      </a:r>
+                    </a:p>
+                    <a:p>
+                      <a:pPr algn="ctr">
+                        <a:defRPr sz="1150" b="0">
+                          <a:solidFill>
+                            <a:srgbClr val="1A1A1A"/>
+                          </a:solidFill>
+                        </a:defRPr>
+                      </a:pPr>
+                      <a:r>
+                        <a:rPr sz="1150" b="0">
+                          <a:solidFill>
+                            <a:srgbClr val="1A1A1A"/>
+                          </a:solidFill>
+                        </a:rPr>
+                        <a:t>needing an answer key</a:t>
                       </a:r>
                     </a:p>
                   </a:txBody>
@@ -3515,24 +3687,70 @@
                     <a:lstStyle/>
                     <a:p>
                       <a:pPr algn="ctr">
-                        <a:defRPr sz="1200">
-                          <a:solidFill>
-                            <a:srgbClr val="1A1A1A"/>
-                          </a:solidFill>
-                        </a:defRPr>
-                      </a:pPr>
-                      <a:r>
-                        <a:t>Degrade real BRSET images (defocus, illumination gradient, vignetting, noise,</a:t>
-                      </a:r>
-                    </a:p>
-                    <a:p>
-                      <a:r>
-                        <a:t>JPEG) so the model learns to find lesions despite them. Labels stay true —</a:t>
-                      </a:r>
-                    </a:p>
-                    <a:p>
-                      <a:r>
-                        <a:t>unlike generative translation, degradation cannot invent or erase a lesion.</a:t>
+                        <a:defRPr sz="1150" b="0">
+                          <a:solidFill>
+                            <a:srgbClr val="1A1A1A"/>
+                          </a:solidFill>
+                        </a:defRPr>
+                      </a:pPr>
+                      <a:r>
+                        <a:rPr sz="1150" b="0">
+                          <a:solidFill>
+                            <a:srgbClr val="1A1A1A"/>
+                          </a:solidFill>
+                        </a:rPr>
+                        <a:t>Estimates the disease rate from unlabelled images, so the cutoff fix</a:t>
+                      </a:r>
+                    </a:p>
+                    <a:p>
+                      <a:pPr algn="ctr">
+                        <a:defRPr sz="1150" b="0">
+                          <a:solidFill>
+                            <a:srgbClr val="1A1A1A"/>
+                          </a:solidFill>
+                        </a:defRPr>
+                      </a:pPr>
+                      <a:r>
+                        <a:rPr sz="1150" b="0">
+                          <a:solidFill>
+                            <a:srgbClr val="1A1A1A"/>
+                          </a:solidFill>
+                        </a:rPr>
+                        <a:t>works on a new camera with no annotations at all.</a:t>
+                      </a:r>
+                    </a:p>
+                    <a:p>
+                      <a:pPr algn="ctr">
+                        <a:defRPr sz="1150" b="0">
+                          <a:solidFill>
+                            <a:srgbClr val="1A1A1A"/>
+                          </a:solidFill>
+                        </a:defRPr>
+                      </a:pPr>
+                      <a:r>
+                        <a:rPr sz="1150" b="0">
+                          <a:solidFill>
+                            <a:srgbClr val="1A1A1A"/>
+                          </a:solidFill>
+                        </a:rPr>
+                        <a:t>Does not raise AUC — it makes the gain we already have deployable,</a:t>
+                      </a:r>
+                    </a:p>
+                    <a:p>
+                      <a:pPr algn="ctr">
+                        <a:defRPr sz="1150" b="0">
+                          <a:solidFill>
+                            <a:srgbClr val="1A1A1A"/>
+                          </a:solidFill>
+                        </a:defRPr>
+                      </a:pPr>
+                      <a:r>
+                        <a:rPr sz="1150" b="0">
+                          <a:solidFill>
+                            <a:srgbClr val="1A1A1A"/>
+                          </a:solidFill>
+                        </a:rPr>
+                        <a:t>and is the honest baseline the other methods are measured against.</a:t>
                       </a:r>
                     </a:p>
                   </a:txBody>
@@ -3548,44 +3766,234 @@
                     <a:lstStyle/>
                     <a:p>
                       <a:pPr algn="ctr">
-                        <a:defRPr sz="1200">
-                          <a:solidFill>
-                            <a:srgbClr val="1A1A1A"/>
-                          </a:solidFill>
-                        </a:defRPr>
-                      </a:pPr>
-                      <a:r>
+                        <a:defRPr sz="1150" b="0">
+                          <a:solidFill>
+                            <a:srgbClr val="1A1A1A"/>
+                          </a:solidFill>
+                        </a:defRPr>
+                      </a:pPr>
+                      <a:r>
+                        <a:rPr sz="1150" b="0">
+                          <a:solidFill>
+                            <a:srgbClr val="1A1A1A"/>
+                          </a:solidFill>
+                        </a:rPr>
+                        <a:t>0.5 d</a:t>
+                      </a:r>
+                    </a:p>
+                  </a:txBody>
+                  <a:tcPr marL="73152" marR="73152" marT="27432" marB="27432">
+                    <a:solidFill>
+                      <a:srgbClr val="F2F4F7"/>
+                    </a:solidFill>
+                  </a:tcPr>
+                </a:tc>
+                <a:tc>
+                  <a:txBody>
+                    <a:bodyPr/>
+                    <a:lstStyle/>
+                    <a:p>
+                      <a:pPr algn="ctr">
+                        <a:defRPr sz="1150" b="0">
+                          <a:solidFill>
+                            <a:srgbClr val="1A1A1A"/>
+                          </a:solidFill>
+                        </a:defRPr>
+                      </a:pPr>
+                      <a:r>
+                        <a:rPr sz="1150" b="0">
+                          <a:solidFill>
+                            <a:srgbClr val="1A1A1A"/>
+                          </a:solidFill>
+                        </a:rPr>
+                        <a:t>Proposed</a:t>
+                      </a:r>
+                    </a:p>
+                  </a:txBody>
+                  <a:tcPr marL="73152" marR="73152" marT="27432" marB="27432">
+                    <a:solidFill>
+                      <a:srgbClr val="F2F4F7"/>
+                    </a:solidFill>
+                  </a:tcPr>
+                </a:tc>
+              </a:tr>
+              <a:tr h="982980">
+                <a:tc>
+                  <a:txBody>
+                    <a:bodyPr/>
+                    <a:lstStyle/>
+                    <a:p>
+                      <a:pPr algn="l">
+                        <a:defRPr sz="1150" b="0">
+                          <a:solidFill>
+                            <a:srgbClr val="1A1A1A"/>
+                          </a:solidFill>
+                        </a:defRPr>
+                      </a:pPr>
+                      <a:r>
+                        <a:rPr sz="1150" b="0">
+                          <a:solidFill>
+                            <a:srgbClr val="1A1A1A"/>
+                          </a:solidFill>
+                        </a:rPr>
+                        <a:t>3</a:t>
+                      </a:r>
+                    </a:p>
+                  </a:txBody>
+                  <a:tcPr marL="73152" marR="73152" marT="27432" marB="27432">
+                    <a:solidFill>
+                      <a:srgbClr val="FFFFFF"/>
+                    </a:solidFill>
+                  </a:tcPr>
+                </a:tc>
+                <a:tc>
+                  <a:txBody>
+                    <a:bodyPr/>
+                    <a:lstStyle/>
+                    <a:p>
+                      <a:pPr algn="ctr">
+                        <a:defRPr sz="1150" b="0">
+                          <a:solidFill>
+                            <a:srgbClr val="1A1A1A"/>
+                          </a:solidFill>
+                        </a:defRPr>
+                      </a:pPr>
+                      <a:r>
+                        <a:rPr sz="1150" b="0">
+                          <a:solidFill>
+                            <a:srgbClr val="1A1A1A"/>
+                          </a:solidFill>
+                        </a:rPr>
+                        <a:t>Train on deliberately</a:t>
+                      </a:r>
+                    </a:p>
+                    <a:p>
+                      <a:pPr algn="ctr">
+                        <a:defRPr sz="1150" b="0">
+                          <a:solidFill>
+                            <a:srgbClr val="1A1A1A"/>
+                          </a:solidFill>
+                        </a:defRPr>
+                      </a:pPr>
+                      <a:r>
+                        <a:rPr sz="1150" b="0">
+                          <a:solidFill>
+                            <a:srgbClr val="1A1A1A"/>
+                          </a:solidFill>
+                        </a:rPr>
+                        <a:t>degraded BRSET images</a:t>
+                      </a:r>
+                    </a:p>
+                  </a:txBody>
+                  <a:tcPr marL="73152" marR="73152" marT="27432" marB="27432">
+                    <a:solidFill>
+                      <a:srgbClr val="FFFFFF"/>
+                    </a:solidFill>
+                  </a:tcPr>
+                </a:tc>
+                <a:tc>
+                  <a:txBody>
+                    <a:bodyPr/>
+                    <a:lstStyle/>
+                    <a:p>
+                      <a:pPr algn="ctr">
+                        <a:defRPr sz="1150" b="0">
+                          <a:solidFill>
+                            <a:srgbClr val="1A1A1A"/>
+                          </a:solidFill>
+                        </a:defRPr>
+                      </a:pPr>
+                      <a:r>
+                        <a:rPr sz="1150" b="0">
+                          <a:solidFill>
+                            <a:srgbClr val="1A1A1A"/>
+                          </a:solidFill>
+                        </a:rPr>
+                        <a:t>Blur and darken real BRSET images to imitate handheld capture, so</a:t>
+                      </a:r>
+                    </a:p>
+                    <a:p>
+                      <a:pPr algn="ctr">
+                        <a:defRPr sz="1150" b="0">
+                          <a:solidFill>
+                            <a:srgbClr val="1A1A1A"/>
+                          </a:solidFill>
+                        </a:defRPr>
+                      </a:pPr>
+                      <a:r>
+                        <a:rPr sz="1150" b="0">
+                          <a:solidFill>
+                            <a:srgbClr val="1A1A1A"/>
+                          </a:solidFill>
+                        </a:rPr>
+                        <a:t>the model learns to find lesions despite poor quality.</a:t>
+                      </a:r>
+                    </a:p>
+                    <a:p>
+                      <a:pPr algn="ctr">
+                        <a:defRPr sz="1150" b="0">
+                          <a:solidFill>
+                            <a:srgbClr val="1A1A1A"/>
+                          </a:solidFill>
+                        </a:defRPr>
+                      </a:pPr>
+                      <a:r>
+                        <a:rPr sz="1150" b="0">
+                          <a:solidFill>
+                            <a:srgbClr val="1A1A1A"/>
+                          </a:solidFill>
+                        </a:rPr>
+                        <a:t>Aimed at macular edema specifically, where blur destroys the sharp</a:t>
+                      </a:r>
+                    </a:p>
+                    <a:p>
+                      <a:pPr algn="ctr">
+                        <a:defRPr sz="1150" b="0">
+                          <a:solidFill>
+                            <a:srgbClr val="1A1A1A"/>
+                          </a:solidFill>
+                        </a:defRPr>
+                      </a:pPr>
+                      <a:r>
+                        <a:rPr sz="1150" b="0">
+                          <a:solidFill>
+                            <a:srgbClr val="1A1A1A"/>
+                          </a:solidFill>
+                        </a:rPr>
+                        <a:t>edge that separates an exudate from a harmless drusen.</a:t>
+                      </a:r>
+                    </a:p>
+                  </a:txBody>
+                  <a:tcPr marL="73152" marR="73152" marT="27432" marB="27432">
+                    <a:solidFill>
+                      <a:srgbClr val="FFFFFF"/>
+                    </a:solidFill>
+                  </a:tcPr>
+                </a:tc>
+                <a:tc>
+                  <a:txBody>
+                    <a:bodyPr/>
+                    <a:lstStyle/>
+                    <a:p>
+                      <a:pPr algn="ctr">
+                        <a:defRPr sz="1150" b="0">
+                          <a:solidFill>
+                            <a:srgbClr val="1A1A1A"/>
+                          </a:solidFill>
+                        </a:defRPr>
+                      </a:pPr>
+                      <a:r>
+                        <a:rPr sz="1150" b="0">
+                          <a:solidFill>
+                            <a:srgbClr val="1A1A1A"/>
+                          </a:solidFill>
+                        </a:rPr>
                         <a:t>3–5 d</a:t>
                       </a:r>
                     </a:p>
                   </a:txBody>
                   <a:tcPr marL="73152" marR="73152" marT="27432" marB="27432">
                     <a:solidFill>
-                      <a:srgbClr val="F2F4F7"/>
-                    </a:solidFill>
-                  </a:tcPr>
-                </a:tc>
-              </a:tr>
-              <a:tr h="960120">
-                <a:tc>
-                  <a:txBody>
-                    <a:bodyPr/>
-                    <a:lstStyle/>
-                    <a:p>
-                      <a:pPr algn="l">
-                        <a:defRPr sz="1200">
-                          <a:solidFill>
-                            <a:srgbClr val="1A1A1A"/>
-                          </a:solidFill>
-                        </a:defRPr>
-                      </a:pPr>
-                      <a:r>
-                        <a:t>3</a:t>
-                      </a:r>
-                    </a:p>
-                  </a:txBody>
-                  <a:tcPr marL="73152" marR="73152" marT="27432" marB="27432">
-                    <a:solidFill>
                       <a:srgbClr val="FFFFFF"/>
                     </a:solidFill>
                   </a:tcPr>
@@ -3596,75 +4004,36 @@
                     <a:lstStyle/>
                     <a:p>
                       <a:pPr algn="ctr">
-                        <a:defRPr sz="1200">
-                          <a:solidFill>
-                            <a:srgbClr val="1A1A1A"/>
-                          </a:solidFill>
-                        </a:defRPr>
-                      </a:pPr>
-                      <a:r>
-                        <a:t>Label-free threshold</a:t>
-                      </a:r>
-                    </a:p>
-                    <a:p>
-                      <a:r>
-                        <a:t>placement</a:t>
-                      </a:r>
-                    </a:p>
-                  </a:txBody>
-                  <a:tcPr marL="73152" marR="73152" marT="27432" marB="27432">
-                    <a:solidFill>
-                      <a:srgbClr val="FFFFFF"/>
-                    </a:solidFill>
-                  </a:tcPr>
-                </a:tc>
-                <a:tc>
-                  <a:txBody>
-                    <a:bodyPr/>
-                    <a:lstStyle/>
-                    <a:p>
-                      <a:pPr algn="ctr">
-                        <a:defRPr sz="1200">
-                          <a:solidFill>
-                            <a:srgbClr val="1A1A1A"/>
-                          </a:solidFill>
-                        </a:defRPr>
-                      </a:pPr>
-                      <a:r>
-                        <a:t>Estimates target prevalence from unlabeled images, so the threshold fix works</a:t>
-                      </a:r>
-                    </a:p>
-                    <a:p>
-                      <a:r>
-                        <a:t>on a new camera with zero annotations. Does not raise AUC — makes the existing</a:t>
-                      </a:r>
-                    </a:p>
-                    <a:p>
-                      <a:r>
-                        <a:t>gain deployable, and is the honest baseline for everything above.</a:t>
-                      </a:r>
-                    </a:p>
-                  </a:txBody>
-                  <a:tcPr marL="73152" marR="73152" marT="27432" marB="27432">
-                    <a:solidFill>
-                      <a:srgbClr val="FFFFFF"/>
-                    </a:solidFill>
-                  </a:tcPr>
-                </a:tc>
-                <a:tc>
-                  <a:txBody>
-                    <a:bodyPr/>
-                    <a:lstStyle/>
-                    <a:p>
-                      <a:pPr algn="ctr">
-                        <a:defRPr sz="1200">
-                          <a:solidFill>
-                            <a:srgbClr val="1A1A1A"/>
-                          </a:solidFill>
-                        </a:defRPr>
-                      </a:pPr>
-                      <a:r>
-                        <a:t>0.5 d</a:t>
+                        <a:defRPr sz="1150" b="0">
+                          <a:solidFill>
+                            <a:srgbClr val="1A1A1A"/>
+                          </a:solidFill>
+                        </a:defRPr>
+                      </a:pPr>
+                      <a:r>
+                        <a:rPr sz="1150" b="0">
+                          <a:solidFill>
+                            <a:srgbClr val="1A1A1A"/>
+                          </a:solidFill>
+                        </a:rPr>
+                        <a:t>Parked —</a:t>
+                      </a:r>
+                    </a:p>
+                    <a:p>
+                      <a:pPr algn="ctr">
+                        <a:defRPr sz="1150" b="0">
+                          <a:solidFill>
+                            <a:srgbClr val="1A1A1A"/>
+                          </a:solidFill>
+                        </a:defRPr>
+                      </a:pPr>
+                      <a:r>
+                        <a:rPr sz="1150" b="0">
+                          <a:solidFill>
+                            <a:srgbClr val="1A1A1A"/>
+                          </a:solidFill>
+                        </a:rPr>
+                        <a:t>for discussion</a:t>
                       </a:r>
                     </a:p>
                   </a:txBody>
@@ -3687,7 +4056,7 @@
         </p:nvSpPr>
         <p:spPr>
           <a:xfrm>
-            <a:off x="685800" y="5852160"/>
+            <a:off x="685800" y="5897880"/>
             <a:ext cx="10881360" cy="685800"/>
           </a:xfrm>
           <a:prstGeom prst="rect">
@@ -3709,7 +4078,7 @@
               </a:defRPr>
             </a:pPr>
             <a:r>
-              <a:t>Method 1 attacks the ME gap least; Method 2 attacks it most — blur destroys the exudate edge cue.</a:t>
+              <a:t>Method 3 is the one I would like your view on before starting it.</a:t>
             </a:r>
           </a:p>
         </p:txBody>
@@ -3762,7 +4131,7 @@
               </a:defRPr>
             </a:pPr>
             <a:r>
-              <a:t>Novelty — what is unclaimed</a:t>
+              <a:t>Novelty — what we found, and how certain we are</a:t>
             </a:r>
           </a:p>
           <a:p>
@@ -3774,21 +4143,555 @@
               </a:defRPr>
             </a:pPr>
             <a:r>
-              <a:t>Verified against all 33 papers citing both dataset papers, plus GitHub, arXiv and preprint servers.</a:t>
+              <a:t>Search covered all 33 papers citing either dataset, plus GitHub, arXiv and preprint servers.</a:t>
             </a:r>
           </a:p>
         </p:txBody>
       </p:sp>
+      <p:graphicFrame>
+        <p:nvGraphicFramePr>
+          <p:cNvPr id="3" name="Table 2"/>
+          <p:cNvGraphicFramePr>
+            <a:graphicFrameLocks noGrp="1"/>
+          </p:cNvGraphicFramePr>
+          <p:nvPr/>
+        </p:nvGraphicFramePr>
+        <p:xfrm>
+          <a:off x="685800" y="1783080"/>
+          <a:ext cx="10789919" cy="3566160"/>
+        </p:xfrm>
+        <a:graphic>
+          <a:graphicData uri="http://schemas.openxmlformats.org/drawingml/2006/table">
+            <a:tbl>
+              <a:tblPr firstRow="1" bandRow="1">
+                <a:tableStyleId>{5C22544A-7EE6-4342-B048-85BDC9FD1C3A}</a:tableStyleId>
+              </a:tblPr>
+              <a:tblGrid>
+                <a:gridCol w="6418142"/>
+                <a:gridCol w="4371777"/>
+              </a:tblGrid>
+              <a:tr h="509451">
+                <a:tc>
+                  <a:txBody>
+                    <a:bodyPr/>
+                    <a:lstStyle/>
+                    <a:p>
+                      <a:pPr algn="l">
+                        <a:defRPr sz="1150" b="1">
+                          <a:solidFill>
+                            <a:srgbClr val="FFFFFF"/>
+                          </a:solidFill>
+                        </a:defRPr>
+                      </a:pPr>
+                      <a:r>
+                        <a:rPr sz="1150" b="1">
+                          <a:solidFill>
+                            <a:srgbClr val="FFFFFF"/>
+                          </a:solidFill>
+                        </a:rPr>
+                        <a:t>Finding</a:t>
+                      </a:r>
+                    </a:p>
+                  </a:txBody>
+                  <a:tcPr marL="73152" marR="73152" marT="27432" marB="27432">
+                    <a:solidFill>
+                      <a:srgbClr val="1F4E79"/>
+                    </a:solidFill>
+                  </a:tcPr>
+                </a:tc>
+                <a:tc>
+                  <a:txBody>
+                    <a:bodyPr/>
+                    <a:lstStyle/>
+                    <a:p>
+                      <a:pPr algn="ctr">
+                        <a:defRPr sz="1150" b="1">
+                          <a:solidFill>
+                            <a:srgbClr val="FFFFFF"/>
+                          </a:solidFill>
+                        </a:defRPr>
+                      </a:pPr>
+                      <a:r>
+                        <a:rPr sz="1150" b="1">
+                          <a:solidFill>
+                            <a:srgbClr val="FFFFFF"/>
+                          </a:solidFill>
+                        </a:rPr>
+                        <a:t>How certain</a:t>
+                      </a:r>
+                    </a:p>
+                  </a:txBody>
+                  <a:tcPr marL="73152" marR="73152" marT="27432" marB="27432">
+                    <a:solidFill>
+                      <a:srgbClr val="1F4E79"/>
+                    </a:solidFill>
+                  </a:tcPr>
+                </a:tc>
+              </a:tr>
+              <a:tr h="509451">
+                <a:tc>
+                  <a:txBody>
+                    <a:bodyPr/>
+                    <a:lstStyle/>
+                    <a:p>
+                      <a:pPr algn="l">
+                        <a:defRPr sz="1150" b="0">
+                          <a:solidFill>
+                            <a:srgbClr val="1A1A1A"/>
+                          </a:solidFill>
+                        </a:defRPr>
+                      </a:pPr>
+                      <a:r>
+                        <a:rPr sz="1150" b="0">
+                          <a:solidFill>
+                            <a:srgbClr val="1A1A1A"/>
+                          </a:solidFill>
+                        </a:rPr>
+                        <a:t>No published BRSET → mBRSET transfer study found</a:t>
+                      </a:r>
+                    </a:p>
+                  </a:txBody>
+                  <a:tcPr marL="73152" marR="73152" marT="27432" marB="27432">
+                    <a:solidFill>
+                      <a:srgbClr val="FFFFFF"/>
+                    </a:solidFill>
+                  </a:tcPr>
+                </a:tc>
+                <a:tc>
+                  <a:txBody>
+                    <a:bodyPr/>
+                    <a:lstStyle/>
+                    <a:p>
+                      <a:pPr algn="ctr">
+                        <a:defRPr sz="1150" b="0">
+                          <a:solidFill>
+                            <a:srgbClr val="1A1A1A"/>
+                          </a:solidFill>
+                        </a:defRPr>
+                      </a:pPr>
+                      <a:r>
+                        <a:rPr sz="1150" b="0">
+                          <a:solidFill>
+                            <a:srgbClr val="1A1A1A"/>
+                          </a:solidFill>
+                        </a:rPr>
+                        <a:t>Exhaustive citation search — but not finding one</a:t>
+                      </a:r>
+                    </a:p>
+                    <a:p>
+                      <a:pPr algn="ctr">
+                        <a:defRPr sz="1150" b="0">
+                          <a:solidFill>
+                            <a:srgbClr val="1A1A1A"/>
+                          </a:solidFill>
+                        </a:defRPr>
+                      </a:pPr>
+                      <a:r>
+                        <a:rPr sz="1150" b="0">
+                          <a:solidFill>
+                            <a:srgbClr val="1A1A1A"/>
+                          </a:solidFill>
+                        </a:rPr>
+                        <a:t>is not the same as proving none exists</a:t>
+                      </a:r>
+                    </a:p>
+                  </a:txBody>
+                  <a:tcPr marL="73152" marR="73152" marT="27432" marB="27432">
+                    <a:solidFill>
+                      <a:srgbClr val="FFFFFF"/>
+                    </a:solidFill>
+                  </a:tcPr>
+                </a:tc>
+              </a:tr>
+              <a:tr h="509451">
+                <a:tc>
+                  <a:txBody>
+                    <a:bodyPr/>
+                    <a:lstStyle/>
+                    <a:p>
+                      <a:pPr algn="l">
+                        <a:defRPr sz="1150" b="0">
+                          <a:solidFill>
+                            <a:srgbClr val="1A1A1A"/>
+                          </a:solidFill>
+                        </a:defRPr>
+                      </a:pPr>
+                      <a:r>
+                        <a:rPr sz="1150" b="0">
+                          <a:solidFill>
+                            <a:srgbClr val="1A1A1A"/>
+                          </a:solidFill>
+                        </a:rPr>
+                        <a:t>The dataset creators list "domain adaptation across imaging devices"</a:t>
+                      </a:r>
+                    </a:p>
+                    <a:p>
+                      <a:pPr algn="l">
+                        <a:defRPr sz="1150" b="0">
+                          <a:solidFill>
+                            <a:srgbClr val="1A1A1A"/>
+                          </a:solidFill>
+                        </a:defRPr>
+                      </a:pPr>
+                      <a:r>
+                        <a:rPr sz="1150" b="0">
+                          <a:solidFill>
+                            <a:srgbClr val="1A1A1A"/>
+                          </a:solidFill>
+                        </a:rPr>
+                        <a:t>as an application, and report no such experiment</a:t>
+                      </a:r>
+                    </a:p>
+                  </a:txBody>
+                  <a:tcPr marL="73152" marR="73152" marT="27432" marB="27432">
+                    <a:solidFill>
+                      <a:srgbClr val="F2F4F7"/>
+                    </a:solidFill>
+                  </a:tcPr>
+                </a:tc>
+                <a:tc>
+                  <a:txBody>
+                    <a:bodyPr/>
+                    <a:lstStyle/>
+                    <a:p>
+                      <a:pPr algn="ctr">
+                        <a:defRPr sz="1150" b="0">
+                          <a:solidFill>
+                            <a:srgbClr val="1A1A1A"/>
+                          </a:solidFill>
+                        </a:defRPr>
+                      </a:pPr>
+                      <a:r>
+                        <a:rPr sz="1150" b="0">
+                          <a:solidFill>
+                            <a:srgbClr val="1A1A1A"/>
+                          </a:solidFill>
+                        </a:rPr>
+                        <a:t>Verified — stated on their March 2026 release</a:t>
+                      </a:r>
+                    </a:p>
+                  </a:txBody>
+                  <a:tcPr marL="73152" marR="73152" marT="27432" marB="27432">
+                    <a:solidFill>
+                      <a:srgbClr val="F2F4F7"/>
+                    </a:solidFill>
+                  </a:tcPr>
+                </a:tc>
+              </a:tr>
+              <a:tr h="509451">
+                <a:tc>
+                  <a:txBody>
+                    <a:bodyPr/>
+                    <a:lstStyle/>
+                    <a:p>
+                      <a:pPr algn="l">
+                        <a:defRPr sz="1150" b="0">
+                          <a:solidFill>
+                            <a:srgbClr val="1A1A1A"/>
+                          </a:solidFill>
+                        </a:defRPr>
+                      </a:pPr>
+                      <a:r>
+                        <a:rPr sz="1150" b="0">
+                          <a:solidFill>
+                            <a:srgbClr val="1A1A1A"/>
+                          </a:solidFill>
+                        </a:rPr>
+                        <a:t>No work uses BRSET's per-image degradation labels</a:t>
+                      </a:r>
+                    </a:p>
+                    <a:p>
+                      <a:pPr algn="l">
+                        <a:defRPr sz="1150" b="0">
+                          <a:solidFill>
+                            <a:srgbClr val="1A1A1A"/>
+                          </a:solidFill>
+                        </a:defRPr>
+                      </a:pPr>
+                      <a:r>
+                        <a:rPr sz="1150" b="0">
+                          <a:solidFill>
+                            <a:srgbClr val="1A1A1A"/>
+                          </a:solidFill>
+                        </a:rPr>
+                        <a:t>(focus / illumination / field / artifact) for transfer</a:t>
+                      </a:r>
+                    </a:p>
+                  </a:txBody>
+                  <a:tcPr marL="73152" marR="73152" marT="27432" marB="27432">
+                    <a:solidFill>
+                      <a:srgbClr val="FFFFFF"/>
+                    </a:solidFill>
+                  </a:tcPr>
+                </a:tc>
+                <a:tc>
+                  <a:txBody>
+                    <a:bodyPr/>
+                    <a:lstStyle/>
+                    <a:p>
+                      <a:pPr algn="ctr">
+                        <a:defRPr sz="1150" b="0">
+                          <a:solidFill>
+                            <a:srgbClr val="1A1A1A"/>
+                          </a:solidFill>
+                        </a:defRPr>
+                      </a:pPr>
+                      <a:r>
+                        <a:rPr sz="1150" b="0">
+                          <a:solidFill>
+                            <a:srgbClr val="1A1A1A"/>
+                          </a:solidFill>
+                        </a:rPr>
+                        <a:t>Verified — the labels exist and are unused</a:t>
+                      </a:r>
+                    </a:p>
+                  </a:txBody>
+                  <a:tcPr marL="73152" marR="73152" marT="27432" marB="27432">
+                    <a:solidFill>
+                      <a:srgbClr val="FFFFFF"/>
+                    </a:solidFill>
+                  </a:tcPr>
+                </a:tc>
+              </a:tr>
+              <a:tr h="509451">
+                <a:tc>
+                  <a:txBody>
+                    <a:bodyPr/>
+                    <a:lstStyle/>
+                    <a:p>
+                      <a:pPr algn="l">
+                        <a:defRPr sz="1150" b="0">
+                          <a:solidFill>
+                            <a:srgbClr val="1A1A1A"/>
+                          </a:solidFill>
+                        </a:defRPr>
+                      </a:pPr>
+                      <a:r>
+                        <a:rPr sz="1150" b="0">
+                          <a:solidFill>
+                            <a:srgbClr val="1A1A1A"/>
+                          </a:solidFill>
+                        </a:rPr>
+                        <a:t>No work reports cross-device macular edema degradation</a:t>
+                      </a:r>
+                    </a:p>
+                  </a:txBody>
+                  <a:tcPr marL="73152" marR="73152" marT="27432" marB="27432">
+                    <a:solidFill>
+                      <a:srgbClr val="F2F4F7"/>
+                    </a:solidFill>
+                  </a:tcPr>
+                </a:tc>
+                <a:tc>
+                  <a:txBody>
+                    <a:bodyPr/>
+                    <a:lstStyle/>
+                    <a:p>
+                      <a:pPr algn="ctr">
+                        <a:defRPr sz="1150" b="0">
+                          <a:solidFill>
+                            <a:srgbClr val="1A1A1A"/>
+                          </a:solidFill>
+                        </a:defRPr>
+                      </a:pPr>
+                      <a:r>
+                        <a:rPr sz="1150" b="0">
+                          <a:solidFill>
+                            <a:srgbClr val="1A1A1A"/>
+                          </a:solidFill>
+                        </a:rPr>
+                        <a:t>Verified — and our ME gap (0.179) is larger</a:t>
+                      </a:r>
+                    </a:p>
+                    <a:p>
+                      <a:pPr algn="ctr">
+                        <a:defRPr sz="1150" b="0">
+                          <a:solidFill>
+                            <a:srgbClr val="1A1A1A"/>
+                          </a:solidFill>
+                        </a:defRPr>
+                      </a:pPr>
+                      <a:r>
+                        <a:rPr sz="1150" b="0">
+                          <a:solidFill>
+                            <a:srgbClr val="1A1A1A"/>
+                          </a:solidFill>
+                        </a:rPr>
+                        <a:t>than our DR gap (0.098)</a:t>
+                      </a:r>
+                    </a:p>
+                  </a:txBody>
+                  <a:tcPr marL="73152" marR="73152" marT="27432" marB="27432">
+                    <a:solidFill>
+                      <a:srgbClr val="F2F4F7"/>
+                    </a:solidFill>
+                  </a:tcPr>
+                </a:tc>
+              </a:tr>
+              <a:tr h="509451">
+                <a:tc>
+                  <a:txBody>
+                    <a:bodyPr/>
+                    <a:lstStyle/>
+                    <a:p>
+                      <a:pPr algn="l">
+                        <a:defRPr sz="1150" b="0">
+                          <a:solidFill>
+                            <a:srgbClr val="1A1A1A"/>
+                          </a:solidFill>
+                        </a:defRPr>
+                      </a:pPr>
+                      <a:r>
+                        <a:rPr sz="1150" b="0">
+                          <a:solidFill>
+                            <a:srgbClr val="1A1A1A"/>
+                          </a:solidFill>
+                        </a:rPr>
+                        <a:t>RetSyn (J Biomed Inform 2025) — synthetic data for tabletop → portable.</a:t>
+                      </a:r>
+                    </a:p>
+                    <a:p>
+                      <a:pPr algn="l">
+                        <a:defRPr sz="1150" b="0">
+                          <a:solidFill>
+                            <a:srgbClr val="1A1A1A"/>
+                          </a:solidFill>
+                        </a:defRPr>
+                      </a:pPr>
+                      <a:r>
+                        <a:rPr sz="1150" b="0">
+                          <a:solidFill>
+                            <a:srgbClr val="1A1A1A"/>
+                          </a:solidFill>
+                        </a:rPr>
+                        <a:t>Same senior author as both datasets.</a:t>
+                      </a:r>
+                    </a:p>
+                  </a:txBody>
+                  <a:tcPr marL="73152" marR="73152" marT="27432" marB="27432">
+                    <a:solidFill>
+                      <a:srgbClr val="FFFFFF"/>
+                    </a:solidFill>
+                  </a:tcPr>
+                </a:tc>
+                <a:tc>
+                  <a:txBody>
+                    <a:bodyPr/>
+                    <a:lstStyle/>
+                    <a:p>
+                      <a:pPr algn="ctr">
+                        <a:defRPr sz="1150" b="0">
+                          <a:solidFill>
+                            <a:srgbClr val="1A1A1A"/>
+                          </a:solidFill>
+                        </a:defRPr>
+                      </a:pPr>
+                      <a:r>
+                        <a:rPr sz="1150" b="0">
+                          <a:solidFill>
+                            <a:srgbClr val="1A1A1A"/>
+                          </a:solidFill>
+                        </a:rPr>
+                        <a:t>Published and real. This is the competitor.</a:t>
+                      </a:r>
+                    </a:p>
+                  </a:txBody>
+                  <a:tcPr marL="73152" marR="73152" marT="27432" marB="27432">
+                    <a:solidFill>
+                      <a:srgbClr val="FFFFFF"/>
+                    </a:solidFill>
+                  </a:tcPr>
+                </a:tc>
+              </a:tr>
+              <a:tr h="509454">
+                <a:tc>
+                  <a:txBody>
+                    <a:bodyPr/>
+                    <a:lstStyle/>
+                    <a:p>
+                      <a:pPr algn="l">
+                        <a:defRPr sz="1150" b="0">
+                          <a:solidFill>
+                            <a:srgbClr val="1A1A1A"/>
+                          </a:solidFill>
+                        </a:defRPr>
+                      </a:pPr>
+                      <a:r>
+                        <a:rPr sz="1150" b="0">
+                          <a:solidFill>
+                            <a:srgbClr val="1A1A1A"/>
+                          </a:solidFill>
+                        </a:rPr>
+                        <a:t>One GitHub project is doing a descriptive version of BRSET → mBRSET</a:t>
+                      </a:r>
+                    </a:p>
+                  </a:txBody>
+                  <a:tcPr marL="73152" marR="73152" marT="27432" marB="27432">
+                    <a:solidFill>
+                      <a:srgbClr val="F2F4F7"/>
+                    </a:solidFill>
+                  </a:tcPr>
+                </a:tc>
+                <a:tc>
+                  <a:txBody>
+                    <a:bodyPr/>
+                    <a:lstStyle/>
+                    <a:p>
+                      <a:pPr algn="ctr">
+                        <a:defRPr sz="1150" b="0">
+                          <a:solidFill>
+                            <a:srgbClr val="1A1A1A"/>
+                          </a:solidFill>
+                        </a:defRPr>
+                      </a:pPr>
+                      <a:r>
+                        <a:rPr sz="1150" b="0">
+                          <a:solidFill>
+                            <a:srgbClr val="1A1A1A"/>
+                          </a:solidFill>
+                        </a:rPr>
+                        <a:t>Real, but a single commit — code skeleton,</a:t>
+                      </a:r>
+                    </a:p>
+                    <a:p>
+                      <a:pPr algn="ctr">
+                        <a:defRPr sz="1150" b="0">
+                          <a:solidFill>
+                            <a:srgbClr val="1A1A1A"/>
+                          </a:solidFill>
+                        </a:defRPr>
+                      </a:pPr>
+                      <a:r>
+                        <a:rPr sz="1150" b="0">
+                          <a:solidFill>
+                            <a:srgbClr val="1A1A1A"/>
+                          </a:solidFill>
+                        </a:rPr>
+                        <a:t>no data, no results published yet</a:t>
+                      </a:r>
+                    </a:p>
+                  </a:txBody>
+                  <a:tcPr marL="73152" marR="73152" marT="27432" marB="27432">
+                    <a:solidFill>
+                      <a:srgbClr val="F2F4F7"/>
+                    </a:solidFill>
+                  </a:tcPr>
+                </a:tc>
+              </a:tr>
+            </a:tbl>
+          </a:graphicData>
+        </a:graphic>
+      </p:graphicFrame>
       <p:sp>
         <p:nvSpPr>
-          <p:cNvPr id="3" name="TextBox 2"/>
+          <p:cNvPr id="4" name="TextBox 3"/>
           <p:cNvSpPr txBox="1"/>
           <p:nvPr/>
         </p:nvSpPr>
         <p:spPr>
           <a:xfrm>
-            <a:off x="685800" y="1828800"/>
-            <a:ext cx="10881360" cy="2651760"/>
+            <a:off x="685800" y="5440680"/>
+            <a:ext cx="10881360" cy="1234439"/>
           </a:xfrm>
           <a:prstGeom prst="rect">
             <a:avLst/>
@@ -3805,14 +4708,14 @@
               <a:spcAft>
                 <a:spcPts val="1000"/>
               </a:spcAft>
-              <a:defRPr sz="1600">
+              <a:defRPr sz="1300">
                 <a:solidFill>
                   <a:srgbClr val="1A1A1A"/>
                 </a:solidFill>
               </a:defRPr>
             </a:pPr>
             <a:r>
-              <a:t>• No published BRSET → mBRSET transfer study exists.</a:t>
+              <a:t>• How we differ from RetSyn: they generate synthetic images; we diagnose what actually breaks, and separate image quality from camera identity. They do not address macular edema or the cutoff problem.</a:t>
             </a:r>
           </a:p>
           <a:p>
@@ -3820,14 +4723,14 @@
               <a:spcAft>
                 <a:spcPts val="1000"/>
               </a:spcAft>
-              <a:defRPr sz="1600">
+              <a:defRPr sz="1300">
                 <a:solidFill>
                   <a:srgbClr val="1A1A1A"/>
                 </a:solidFill>
               </a:defRPr>
             </a:pPr>
             <a:r>
-              <a:t>• The dataset creators' own March 2026 release lists “domain adaptation across imaging devices” as an application — and reports no such experiment.</a:t>
+              <a:t>• How we differ from the GitHub project: they use frozen features and a simple classifier; we fine-tune the whole model and cover both findings.</a:t>
             </a:r>
           </a:p>
           <a:p>
@@ -3835,112 +4738,14 @@
               <a:spcAft>
                 <a:spcPts val="1000"/>
               </a:spcAft>
-              <a:defRPr sz="1600">
+              <a:defRPr sz="1300">
                 <a:solidFill>
                   <a:srgbClr val="1A1A1A"/>
                 </a:solidFill>
               </a:defRPr>
             </a:pPr>
             <a:r>
-              <a:t>• No work uses BRSET's typed degradation labels (focus / illumination / field / artifact) for transfer.</a:t>
-            </a:r>
-          </a:p>
-          <a:p>
-            <a:pPr>
-              <a:spcAft>
-                <a:spcPts val="1000"/>
-              </a:spcAft>
-              <a:defRPr sz="1600">
-                <a:solidFill>
-                  <a:srgbClr val="1A1A1A"/>
-                </a:solidFill>
-              </a:defRPr>
-            </a:pPr>
-            <a:r>
-              <a:t>• No work reports cross-device macular edema degradation — our ME gap (0.179) exceeds our DR gap (0.098).</a:t>
-            </a:r>
-          </a:p>
-          <a:p>
-            <a:pPr>
-              <a:spcAft>
-                <a:spcPts val="1000"/>
-              </a:spcAft>
-              <a:defRPr sz="1600">
-                <a:solidFill>
-                  <a:srgbClr val="1A1A1A"/>
-                </a:solidFill>
-              </a:defRPr>
-            </a:pPr>
-            <a:r>
-              <a:t>• Closest prior work: RetSyn (J Biomed Inform 2025, same senior author) — synthetic data for tabletop → portable. It does not diagnose what breaks, separate quality from device, or address ME or thresholds.</a:t>
-            </a:r>
-          </a:p>
-        </p:txBody>
-      </p:sp>
-      <p:sp>
-        <p:nvSpPr>
-          <p:cNvPr id="4" name="TextBox 3"/>
-          <p:cNvSpPr txBox="1"/>
-          <p:nvPr/>
-        </p:nvSpPr>
-        <p:spPr>
-          <a:xfrm>
-            <a:off x="685800" y="4572000"/>
-            <a:ext cx="10881360" cy="2011680"/>
-          </a:xfrm>
-          <a:prstGeom prst="rect">
-            <a:avLst/>
-          </a:prstGeom>
-          <a:noFill/>
-        </p:spPr>
-        <p:txBody>
-          <a:bodyPr wrap="square">
-            <a:spAutoFit/>
-          </a:bodyPr>
-          <a:lstStyle/>
-          <a:p>
-            <a:pPr>
-              <a:spcAft>
-                <a:spcPts val="600"/>
-              </a:spcAft>
-              <a:defRPr sz="1600">
-                <a:solidFill>
-                  <a:srgbClr val="1A1A1A"/>
-                </a:solidFill>
-              </a:defRPr>
-            </a:pPr>
-            <a:r>
-              <a:t>• Our shift is unusually clean, and that is the asset:</a:t>
-            </a:r>
-          </a:p>
-          <a:p>
-            <a:pPr lvl="1">
-              <a:spcAft>
-                <a:spcPts val="600"/>
-              </a:spcAft>
-              <a:defRPr sz="1400">
-                <a:solidFill>
-                  <a:srgbClr val="5A5A5A"/>
-                </a:solidFill>
-              </a:defRPr>
-            </a:pPr>
-            <a:r>
-              <a:t>– BRSET → mBRSET holds country, ethnicity, dilation, 45° field of view and grading protocol constant.</a:t>
-            </a:r>
-          </a:p>
-          <a:p>
-            <a:pPr lvl="1">
-              <a:spcAft>
-                <a:spcPts val="600"/>
-              </a:spcAft>
-              <a:defRPr sz="1400">
-                <a:solidFill>
-                  <a:srgbClr val="5A5A5A"/>
-                </a:solidFill>
-              </a:defRPr>
-            </a:pPr>
-            <a:r>
-              <a:t>– Only the camera changes. A comparable study crossing country and protocol collapsed to AUC 0.54; ours holds 0.91.</a:t>
+              <a:t>• Our shift is unusually clean: country, ethnicity, dilation, 45° field of view and grading protocol are all held constant, so only the camera changes. A study that also crossed country and protocol collapsed to AUC 0.54; ours holds 0.91.</a:t>
             </a:r>
           </a:p>
         </p:txBody>
@@ -4055,6 +4860,11 @@
                         </a:defRPr>
                       </a:pPr>
                       <a:r>
+                        <a:rPr sz="1200" b="1">
+                          <a:solidFill>
+                            <a:srgbClr val="FFFFFF"/>
+                          </a:solidFill>
+                        </a:rPr>
                         <a:t>Contribution</a:t>
                       </a:r>
                     </a:p>
@@ -4078,6 +4888,11 @@
                         </a:defRPr>
                       </a:pPr>
                       <a:r>
+                        <a:rPr sz="1200" b="1">
+                          <a:solidFill>
+                            <a:srgbClr val="FFFFFF"/>
+                          </a:solidFill>
+                        </a:rPr>
                         <a:t>Why it is new</a:t>
                       </a:r>
                     </a:p>
@@ -4096,13 +4911,18 @@
                     <a:lstStyle/>
                     <a:p>
                       <a:pPr algn="l">
-                        <a:defRPr sz="1200">
-                          <a:solidFill>
-                            <a:srgbClr val="1A1A1A"/>
-                          </a:solidFill>
-                        </a:defRPr>
-                      </a:pPr>
-                      <a:r>
+                        <a:defRPr sz="1200" b="0">
+                          <a:solidFill>
+                            <a:srgbClr val="1A1A1A"/>
+                          </a:solidFill>
+                        </a:defRPr>
+                      </a:pPr>
+                      <a:r>
+                        <a:rPr sz="1200" b="0">
+                          <a:solidFill>
+                            <a:srgbClr val="1A1A1A"/>
+                          </a:solidFill>
+                        </a:rPr>
                         <a:t>1</a:t>
                       </a:r>
                     </a:p>
@@ -4119,18 +4939,35 @@
                     <a:lstStyle/>
                     <a:p>
                       <a:pPr algn="ctr">
-                        <a:defRPr sz="1200">
-                          <a:solidFill>
-                            <a:srgbClr val="1A1A1A"/>
-                          </a:solidFill>
-                        </a:defRPr>
-                      </a:pPr>
-                      <a:r>
+                        <a:defRPr sz="1200" b="0">
+                          <a:solidFill>
+                            <a:srgbClr val="1A1A1A"/>
+                          </a:solidFill>
+                        </a:defRPr>
+                      </a:pPr>
+                      <a:r>
+                        <a:rPr sz="1200" b="0">
+                          <a:solidFill>
+                            <a:srgbClr val="1A1A1A"/>
+                          </a:solidFill>
+                        </a:rPr>
                         <a:t>Decomposing a cross-device gap into</a:t>
                       </a:r>
                     </a:p>
                     <a:p>
-                      <a:r>
+                      <a:pPr algn="ctr">
+                        <a:defRPr sz="1200" b="0">
+                          <a:solidFill>
+                            <a:srgbClr val="1A1A1A"/>
+                          </a:solidFill>
+                        </a:defRPr>
+                      </a:pPr>
+                      <a:r>
+                        <a:rPr sz="1200" b="0">
+                          <a:solidFill>
+                            <a:srgbClr val="1A1A1A"/>
+                          </a:solidFill>
+                        </a:rPr>
                         <a:t>prevalence, calibration and ranking components</a:t>
                       </a:r>
                     </a:p>
@@ -4147,23 +4984,52 @@
                     <a:lstStyle/>
                     <a:p>
                       <a:pPr algn="ctr">
-                        <a:defRPr sz="1200">
-                          <a:solidFill>
-                            <a:srgbClr val="1A1A1A"/>
-                          </a:solidFill>
-                        </a:defRPr>
-                      </a:pPr>
-                      <a:r>
+                        <a:defRPr sz="1200" b="0">
+                          <a:solidFill>
+                            <a:srgbClr val="1A1A1A"/>
+                          </a:solidFill>
+                        </a:defRPr>
+                      </a:pPr>
+                      <a:r>
+                        <a:rPr sz="1200" b="0">
+                          <a:solidFill>
+                            <a:srgbClr val="1A1A1A"/>
+                          </a:solidFill>
+                        </a:rPr>
                         <a:t>Cross-domain F1 collapses are routinely blamed on the model.</a:t>
                       </a:r>
                     </a:p>
                     <a:p>
-                      <a:r>
+                      <a:pPr algn="ctr">
+                        <a:defRPr sz="1200" b="0">
+                          <a:solidFill>
+                            <a:srgbClr val="1A1A1A"/>
+                          </a:solidFill>
+                        </a:defRPr>
+                      </a:pPr>
+                      <a:r>
+                        <a:rPr sz="1200" b="0">
+                          <a:solidFill>
+                            <a:srgbClr val="1A1A1A"/>
+                          </a:solidFill>
+                        </a:rPr>
                         <a:t>We show the split is computable in closed form — and that in our</a:t>
                       </a:r>
                     </a:p>
                     <a:p>
-                      <a:r>
+                      <a:pPr algn="ctr">
+                        <a:defRPr sz="1200" b="0">
+                          <a:solidFill>
+                            <a:srgbClr val="1A1A1A"/>
+                          </a:solidFill>
+                        </a:defRPr>
+                      </a:pPr>
+                      <a:r>
+                        <a:rPr sz="1200" b="0">
+                          <a:solidFill>
+                            <a:srgbClr val="1A1A1A"/>
+                          </a:solidFill>
+                        </a:rPr>
                         <a:t>case the ranking component is all that remains.</a:t>
                       </a:r>
                     </a:p>
@@ -4182,13 +5048,18 @@
                     <a:lstStyle/>
                     <a:p>
                       <a:pPr algn="l">
-                        <a:defRPr sz="1200">
-                          <a:solidFill>
-                            <a:srgbClr val="1A1A1A"/>
-                          </a:solidFill>
-                        </a:defRPr>
-                      </a:pPr>
-                      <a:r>
+                        <a:defRPr sz="1200" b="0">
+                          <a:solidFill>
+                            <a:srgbClr val="1A1A1A"/>
+                          </a:solidFill>
+                        </a:defRPr>
+                      </a:pPr>
+                      <a:r>
+                        <a:rPr sz="1200" b="0">
+                          <a:solidFill>
+                            <a:srgbClr val="1A1A1A"/>
+                          </a:solidFill>
+                        </a:rPr>
                         <a:t>2</a:t>
                       </a:r>
                     </a:p>
@@ -4205,18 +5076,35 @@
                     <a:lstStyle/>
                     <a:p>
                       <a:pPr algn="ctr">
-                        <a:defRPr sz="1200">
-                          <a:solidFill>
-                            <a:srgbClr val="1A1A1A"/>
-                          </a:solidFill>
-                        </a:defRPr>
-                      </a:pPr>
-                      <a:r>
+                        <a:defRPr sz="1200" b="0">
+                          <a:solidFill>
+                            <a:srgbClr val="1A1A1A"/>
+                          </a:solidFill>
+                        </a:defRPr>
+                      </a:pPr>
+                      <a:r>
+                        <a:rPr sz="1200" b="0">
+                          <a:solidFill>
+                            <a:srgbClr val="1A1A1A"/>
+                          </a:solidFill>
+                        </a:rPr>
                         <a:t>Multi-view test-time aggregation for</a:t>
                       </a:r>
                     </a:p>
                     <a:p>
-                      <a:r>
+                      <a:pPr algn="ctr">
+                        <a:defRPr sz="1200" b="0">
+                          <a:solidFill>
+                            <a:srgbClr val="1A1A1A"/>
+                          </a:solidFill>
+                        </a:defRPr>
+                      </a:pPr>
+                      <a:r>
+                        <a:rPr sz="1200" b="0">
+                          <a:solidFill>
+                            <a:srgbClr val="1A1A1A"/>
+                          </a:solidFill>
+                        </a:rPr>
                         <a:t>cross-device retinal screening</a:t>
                       </a:r>
                     </a:p>
@@ -4233,18 +5121,35 @@
                     <a:lstStyle/>
                     <a:p>
                       <a:pPr algn="ctr">
-                        <a:defRPr sz="1200">
-                          <a:solidFill>
-                            <a:srgbClr val="1A1A1A"/>
-                          </a:solidFill>
-                        </a:defRPr>
-                      </a:pPr>
-                      <a:r>
+                        <a:defRPr sz="1200" b="0">
+                          <a:solidFill>
+                            <a:srgbClr val="1A1A1A"/>
+                          </a:solidFill>
+                        </a:defRPr>
+                      </a:pPr>
+                      <a:r>
+                        <a:rPr sz="1200" b="0">
+                          <a:solidFill>
+                            <a:srgbClr val="1A1A1A"/>
+                          </a:solidFill>
+                        </a:rPr>
                         <a:t>Exploits mBRSET's ~4 images per patient, a free signal no</a:t>
                       </a:r>
                     </a:p>
                     <a:p>
-                      <a:r>
+                      <a:pPr algn="ctr">
+                        <a:defRPr sz="1200" b="0">
+                          <a:solidFill>
+                            <a:srgbClr val="1A1A1A"/>
+                          </a:solidFill>
+                        </a:defRPr>
+                      </a:pPr>
+                      <a:r>
+                        <a:rPr sz="1200" b="0">
+                          <a:solidFill>
+                            <a:srgbClr val="1A1A1A"/>
+                          </a:solidFill>
+                        </a:rPr>
                         <a:t>cross-device study has used.</a:t>
                       </a:r>
                     </a:p>
@@ -4263,13 +5168,18 @@
                     <a:lstStyle/>
                     <a:p>
                       <a:pPr algn="l">
-                        <a:defRPr sz="1200">
-                          <a:solidFill>
-                            <a:srgbClr val="1A1A1A"/>
-                          </a:solidFill>
-                        </a:defRPr>
-                      </a:pPr>
-                      <a:r>
+                        <a:defRPr sz="1200" b="0">
+                          <a:solidFill>
+                            <a:srgbClr val="1A1A1A"/>
+                          </a:solidFill>
+                        </a:defRPr>
+                      </a:pPr>
+                      <a:r>
+                        <a:rPr sz="1200" b="0">
+                          <a:solidFill>
+                            <a:srgbClr val="1A1A1A"/>
+                          </a:solidFill>
+                        </a:rPr>
                         <a:t>3</a:t>
                       </a:r>
                     </a:p>
@@ -4286,18 +5196,35 @@
                     <a:lstStyle/>
                     <a:p>
                       <a:pPr algn="ctr">
-                        <a:defRPr sz="1200">
-                          <a:solidFill>
-                            <a:srgbClr val="1A1A1A"/>
-                          </a:solidFill>
-                        </a:defRPr>
-                      </a:pPr>
-                      <a:r>
+                        <a:defRPr sz="1200" b="0">
+                          <a:solidFill>
+                            <a:srgbClr val="1A1A1A"/>
+                          </a:solidFill>
+                        </a:defRPr>
+                      </a:pPr>
+                      <a:r>
+                        <a:rPr sz="1200" b="0">
+                          <a:solidFill>
+                            <a:srgbClr val="1A1A1A"/>
+                          </a:solidFill>
+                        </a:rPr>
                         <a:t>Adapting the internal normalisation layer</a:t>
                       </a:r>
                     </a:p>
                     <a:p>
-                      <a:r>
+                      <a:pPr algn="ctr">
+                        <a:defRPr sz="1200" b="0">
+                          <a:solidFill>
+                            <a:srgbClr val="1A1A1A"/>
+                          </a:solidFill>
+                        </a:defRPr>
+                      </a:pPr>
+                      <a:r>
+                        <a:rPr sz="1200" b="0">
+                          <a:solidFill>
+                            <a:srgbClr val="1A1A1A"/>
+                          </a:solidFill>
+                        </a:rPr>
                         <a:t>that is unique to ConvNeXt V2</a:t>
                       </a:r>
                     </a:p>
@@ -4314,18 +5241,35 @@
                     <a:lstStyle/>
                     <a:p>
                       <a:pPr algn="ctr">
-                        <a:defRPr sz="1200">
-                          <a:solidFill>
-                            <a:srgbClr val="1A1A1A"/>
-                          </a:solidFill>
-                        </a:defRPr>
-                      </a:pPr>
-                      <a:r>
+                        <a:defRPr sz="1200" b="0">
+                          <a:solidFill>
+                            <a:srgbClr val="1A1A1A"/>
+                          </a:solidFill>
+                        </a:defRPr>
+                      </a:pPr>
+                      <a:r>
+                        <a:rPr sz="1200" b="0">
+                          <a:solidFill>
+                            <a:srgbClr val="1A1A1A"/>
+                          </a:solidFill>
+                        </a:rPr>
                         <a:t>The standard adaptation trick relies on a component this model</a:t>
                       </a:r>
                     </a:p>
                     <a:p>
-                      <a:r>
+                      <a:pPr algn="ctr">
+                        <a:defRPr sz="1200" b="0">
+                          <a:solidFill>
+                            <a:srgbClr val="1A1A1A"/>
+                          </a:solidFill>
+                        </a:defRPr>
+                      </a:pPr>
+                      <a:r>
+                        <a:rPr sz="1200" b="0">
+                          <a:solidFill>
+                            <a:srgbClr val="1A1A1A"/>
+                          </a:solidFill>
+                        </a:rPr>
                         <a:t>does not have. Nobody has adapted the one it does have.</a:t>
                       </a:r>
                     </a:p>
@@ -4465,6 +5409,11 @@
                         </a:defRPr>
                       </a:pPr>
                       <a:r>
+                        <a:rPr sz="1400" b="1">
+                          <a:solidFill>
+                            <a:srgbClr val="FFFFFF"/>
+                          </a:solidFill>
+                        </a:rPr>
                         <a:t>When</a:t>
                       </a:r>
                     </a:p>
@@ -4488,6 +5437,11 @@
                         </a:defRPr>
                       </a:pPr>
                       <a:r>
+                        <a:rPr sz="1400" b="1">
+                          <a:solidFill>
+                            <a:srgbClr val="FFFFFF"/>
+                          </a:solidFill>
+                        </a:rPr>
                         <a:t>Action</a:t>
                       </a:r>
                     </a:p>
@@ -4506,13 +5460,18 @@
                     <a:lstStyle/>
                     <a:p>
                       <a:pPr algn="l">
-                        <a:defRPr sz="1400">
-                          <a:solidFill>
-                            <a:srgbClr val="1A1A1A"/>
-                          </a:solidFill>
-                        </a:defRPr>
-                      </a:pPr>
-                      <a:r>
+                        <a:defRPr sz="1400" b="0">
+                          <a:solidFill>
+                            <a:srgbClr val="1A1A1A"/>
+                          </a:solidFill>
+                        </a:defRPr>
+                      </a:pPr>
+                      <a:r>
+                        <a:rPr sz="1400" b="0">
+                          <a:solidFill>
+                            <a:srgbClr val="1A1A1A"/>
+                          </a:solidFill>
+                        </a:rPr>
                         <a:t>This week</a:t>
                       </a:r>
                     </a:p>
@@ -4529,13 +5488,18 @@
                     <a:lstStyle/>
                     <a:p>
                       <a:pPr algn="ctr">
-                        <a:defRPr sz="1400">
-                          <a:solidFill>
-                            <a:srgbClr val="1A1A1A"/>
-                          </a:solidFill>
-                        </a:defRPr>
-                      </a:pPr>
-                      <a:r>
+                        <a:defRPr sz="1400" b="0">
+                          <a:solidFill>
+                            <a:srgbClr val="1A1A1A"/>
+                          </a:solidFill>
+                        </a:defRPr>
+                      </a:pPr>
+                      <a:r>
+                        <a:rPr sz="1400" b="0">
+                          <a:solidFill>
+                            <a:srgbClr val="1A1A1A"/>
+                          </a:solidFill>
+                        </a:rPr>
                         <a:t>Finish imbalance hyperparameter sweep (validation-selected); k-fold cross-validation to tighten confidence intervals on the baseline</a:t>
                       </a:r>
                     </a:p>
@@ -4554,13 +5518,18 @@
                     <a:lstStyle/>
                     <a:p>
                       <a:pPr algn="l">
-                        <a:defRPr sz="1400">
-                          <a:solidFill>
-                            <a:srgbClr val="1A1A1A"/>
-                          </a:solidFill>
-                        </a:defRPr>
-                      </a:pPr>
-                      <a:r>
+                        <a:defRPr sz="1400" b="0">
+                          <a:solidFill>
+                            <a:srgbClr val="1A1A1A"/>
+                          </a:solidFill>
+                        </a:defRPr>
+                      </a:pPr>
+                      <a:r>
+                        <a:rPr sz="1400" b="0">
+                          <a:solidFill>
+                            <a:srgbClr val="1A1A1A"/>
+                          </a:solidFill>
+                        </a:rPr>
                         <a:t>Next</a:t>
                       </a:r>
                     </a:p>
@@ -4577,13 +5546,18 @@
                     <a:lstStyle/>
                     <a:p>
                       <a:pPr algn="ctr">
-                        <a:defRPr sz="1400">
-                          <a:solidFill>
-                            <a:srgbClr val="1A1A1A"/>
-                          </a:solidFill>
-                        </a:defRPr>
-                      </a:pPr>
-                      <a:r>
+                        <a:defRPr sz="1400" b="0">
+                          <a:solidFill>
+                            <a:srgbClr val="1A1A1A"/>
+                          </a:solidFill>
+                        </a:defRPr>
+                      </a:pPr>
+                      <a:r>
+                        <a:rPr sz="1400" b="0">
+                          <a:solidFill>
+                            <a:srgbClr val="1A1A1A"/>
+                          </a:solidFill>
+                        </a:rPr>
                         <a:t>Implement label-free threshold placement — the honest baseline for all transfer results</a:t>
                       </a:r>
                     </a:p>
@@ -4602,13 +5576,18 @@
                     <a:lstStyle/>
                     <a:p>
                       <a:pPr algn="l">
-                        <a:defRPr sz="1400">
-                          <a:solidFill>
-                            <a:srgbClr val="1A1A1A"/>
-                          </a:solidFill>
-                        </a:defRPr>
-                      </a:pPr>
-                      <a:r>
+                        <a:defRPr sz="1400" b="0">
+                          <a:solidFill>
+                            <a:srgbClr val="1A1A1A"/>
+                          </a:solidFill>
+                        </a:defRPr>
+                      </a:pPr>
+                      <a:r>
+                        <a:rPr sz="1400" b="0">
+                          <a:solidFill>
+                            <a:srgbClr val="1A1A1A"/>
+                          </a:solidFill>
+                        </a:rPr>
                         <a:t>Then</a:t>
                       </a:r>
                     </a:p>
@@ -4625,13 +5604,18 @@
                     <a:lstStyle/>
                     <a:p>
                       <a:pPr algn="ctr">
-                        <a:defRPr sz="1400">
-                          <a:solidFill>
-                            <a:srgbClr val="1A1A1A"/>
-                          </a:solidFill>
-                        </a:defRPr>
-                      </a:pPr>
-                      <a:r>
+                        <a:defRPr sz="1400" b="0">
+                          <a:solidFill>
+                            <a:srgbClr val="1A1A1A"/>
+                          </a:solidFill>
+                        </a:defRPr>
+                      </a:pPr>
+                      <a:r>
+                        <a:rPr sz="1400" b="0">
+                          <a:solidFill>
+                            <a:srgbClr val="1A1A1A"/>
+                          </a:solidFill>
+                        </a:rPr>
                         <a:t>Multi-view aggregation, then degradation augmentation; measure AUC gain against the 0.95 / 0.985 target</a:t>
                       </a:r>
                     </a:p>
@@ -4650,13 +5634,18 @@
                     <a:lstStyle/>
                     <a:p>
                       <a:pPr algn="l">
-                        <a:defRPr sz="1400">
-                          <a:solidFill>
-                            <a:srgbClr val="1A1A1A"/>
-                          </a:solidFill>
-                        </a:defRPr>
-                      </a:pPr>
-                      <a:r>
+                        <a:defRPr sz="1400" b="0">
+                          <a:solidFill>
+                            <a:srgbClr val="1A1A1A"/>
+                          </a:solidFill>
+                        </a:defRPr>
+                      </a:pPr>
+                      <a:r>
+                        <a:rPr sz="1400" b="0">
+                          <a:solidFill>
+                            <a:srgbClr val="1A1A1A"/>
+                          </a:solidFill>
+                        </a:rPr>
                         <a:t>Open question</a:t>
                       </a:r>
                     </a:p>
@@ -4673,13 +5662,18 @@
                     <a:lstStyle/>
                     <a:p>
                       <a:pPr algn="ctr">
-                        <a:defRPr sz="1400">
-                          <a:solidFill>
-                            <a:srgbClr val="1A1A1A"/>
-                          </a:solidFill>
-                        </a:defRPr>
-                      </a:pPr>
-                      <a:r>
+                        <a:defRPr sz="1400" b="0">
+                          <a:solidFill>
+                            <a:srgbClr val="1A1A1A"/>
+                          </a:solidFill>
+                        </a:defRPr>
+                      </a:pPr>
+                      <a:r>
+                        <a:rPr sz="1400" b="0">
+                          <a:solidFill>
+                            <a:srgbClr val="1A1A1A"/>
+                          </a:solidFill>
+                        </a:rPr>
                         <a:t>Access to BRSET's per-image degradation-type metadata for the decomposition analysis</a:t>
                       </a:r>
                     </a:p>
@@ -4858,6 +5852,11 @@
                         </a:defRPr>
                       </a:pPr>
                       <a:r>
+                        <a:rPr sz="1500" b="1">
+                          <a:solidFill>
+                            <a:srgbClr val="FFFFFF"/>
+                          </a:solidFill>
+                        </a:rPr>
                         <a:t>Task</a:t>
                       </a:r>
                     </a:p>
@@ -4881,6 +5880,11 @@
                         </a:defRPr>
                       </a:pPr>
                       <a:r>
+                        <a:rPr sz="1500" b="1">
+                          <a:solidFill>
+                            <a:srgbClr val="FFFFFF"/>
+                          </a:solidFill>
+                        </a:rPr>
                         <a:t>Status</a:t>
                       </a:r>
                     </a:p>
@@ -4899,13 +5903,18 @@
                     <a:lstStyle/>
                     <a:p>
                       <a:pPr algn="l">
-                        <a:defRPr sz="1500">
-                          <a:solidFill>
-                            <a:srgbClr val="1A1A1A"/>
-                          </a:solidFill>
-                        </a:defRPr>
-                      </a:pPr>
-                      <a:r>
+                        <a:defRPr sz="1500" b="0">
+                          <a:solidFill>
+                            <a:srgbClr val="1A1A1A"/>
+                          </a:solidFill>
+                        </a:defRPr>
+                      </a:pPr>
+                      <a:r>
+                        <a:rPr sz="1500" b="0">
+                          <a:solidFill>
+                            <a:srgbClr val="1A1A1A"/>
+                          </a:solidFill>
+                        </a:rPr>
                         <a:t>Part 1</a:t>
                       </a:r>
                     </a:p>
@@ -4922,18 +5931,35 @@
                     <a:lstStyle/>
                     <a:p>
                       <a:pPr algn="ctr">
-                        <a:defRPr sz="1500">
-                          <a:solidFill>
-                            <a:srgbClr val="1A1A1A"/>
-                          </a:solidFill>
-                        </a:defRPr>
-                      </a:pPr>
-                      <a:r>
+                        <a:defRPr sz="1500" b="0">
+                          <a:solidFill>
+                            <a:srgbClr val="1A1A1A"/>
+                          </a:solidFill>
+                        </a:defRPr>
+                      </a:pPr>
+                      <a:r>
+                        <a:rPr sz="1500" b="0">
+                          <a:solidFill>
+                            <a:srgbClr val="1A1A1A"/>
+                          </a:solidFill>
+                        </a:rPr>
                         <a:t>A strong ConvNeXt V2 baseline on BRSET;</a:t>
                       </a:r>
                     </a:p>
                     <a:p>
-                      <a:r>
+                      <a:pPr algn="ctr">
+                        <a:defRPr sz="1500" b="0">
+                          <a:solidFill>
+                            <a:srgbClr val="1A1A1A"/>
+                          </a:solidFill>
+                        </a:defRPr>
+                      </a:pPr>
+                      <a:r>
+                        <a:rPr sz="1500" b="0">
+                          <a:solidFill>
+                            <a:srgbClr val="1A1A1A"/>
+                          </a:solidFill>
+                        </a:rPr>
                         <a:t>address the class imbalance holding F1 down</a:t>
                       </a:r>
                     </a:p>
@@ -4950,13 +5976,18 @@
                     <a:lstStyle/>
                     <a:p>
                       <a:pPr algn="ctr">
-                        <a:defRPr sz="1500">
-                          <a:solidFill>
-                            <a:srgbClr val="1A1A1A"/>
-                          </a:solidFill>
-                        </a:defRPr>
-                      </a:pPr>
-                      <a:r>
+                        <a:defRPr sz="1500" b="0">
+                          <a:solidFill>
+                            <a:srgbClr val="1A1A1A"/>
+                          </a:solidFill>
+                        </a:defRPr>
+                      </a:pPr>
+                      <a:r>
+                        <a:rPr sz="1500" b="0">
+                          <a:solidFill>
+                            <a:srgbClr val="1A1A1A"/>
+                          </a:solidFill>
+                        </a:rPr>
                         <a:t>Complete</a:t>
                       </a:r>
                     </a:p>
@@ -4975,13 +6006,18 @@
                     <a:lstStyle/>
                     <a:p>
                       <a:pPr algn="l">
-                        <a:defRPr sz="1500">
-                          <a:solidFill>
-                            <a:srgbClr val="1A1A1A"/>
-                          </a:solidFill>
-                        </a:defRPr>
-                      </a:pPr>
-                      <a:r>
+                        <a:defRPr sz="1500" b="0">
+                          <a:solidFill>
+                            <a:srgbClr val="1A1A1A"/>
+                          </a:solidFill>
+                        </a:defRPr>
+                      </a:pPr>
+                      <a:r>
+                        <a:rPr sz="1500" b="0">
+                          <a:solidFill>
+                            <a:srgbClr val="1A1A1A"/>
+                          </a:solidFill>
+                        </a:rPr>
                         <a:t>Part 2</a:t>
                       </a:r>
                     </a:p>
@@ -4998,18 +6034,35 @@
                     <a:lstStyle/>
                     <a:p>
                       <a:pPr algn="ctr">
-                        <a:defRPr sz="1500">
-                          <a:solidFill>
-                            <a:srgbClr val="1A1A1A"/>
-                          </a:solidFill>
-                        </a:defRPr>
-                      </a:pPr>
-                      <a:r>
+                        <a:defRPr sz="1500" b="0">
+                          <a:solidFill>
+                            <a:srgbClr val="1A1A1A"/>
+                          </a:solidFill>
+                        </a:defRPr>
+                      </a:pPr>
+                      <a:r>
+                        <a:rPr sz="1500" b="0">
+                          <a:solidFill>
+                            <a:srgbClr val="1A1A1A"/>
+                          </a:solidFill>
+                        </a:rPr>
                         <a:t>Improve BRSET → mBRSET transfer.</a:t>
                       </a:r>
                     </a:p>
                     <a:p>
-                      <a:r>
+                      <a:pPr algn="ctr">
+                        <a:defRPr sz="1500" b="0">
+                          <a:solidFill>
+                            <a:srgbClr val="1A1A1A"/>
+                          </a:solidFill>
+                        </a:defRPr>
+                      </a:pPr>
+                      <a:r>
+                        <a:rPr sz="1500" b="0">
+                          <a:solidFill>
+                            <a:srgbClr val="1A1A1A"/>
+                          </a:solidFill>
+                        </a:rPr>
                         <a:t>Find relevant literature, implement, and find novelty</a:t>
                       </a:r>
                     </a:p>
@@ -5026,18 +6079,35 @@
                     <a:lstStyle/>
                     <a:p>
                       <a:pPr algn="ctr">
-                        <a:defRPr sz="1500">
-                          <a:solidFill>
-                            <a:srgbClr val="1A1A1A"/>
-                          </a:solidFill>
-                        </a:defRPr>
-                      </a:pPr>
-                      <a:r>
+                        <a:defRPr sz="1500" b="0">
+                          <a:solidFill>
+                            <a:srgbClr val="1A1A1A"/>
+                          </a:solidFill>
+                        </a:defRPr>
+                      </a:pPr>
+                      <a:r>
+                        <a:rPr sz="1500" b="0">
+                          <a:solidFill>
+                            <a:srgbClr val="1A1A1A"/>
+                          </a:solidFill>
+                        </a:rPr>
                         <a:t>Diagnosed;</a:t>
                       </a:r>
                     </a:p>
                     <a:p>
-                      <a:r>
+                      <a:pPr algn="ctr">
+                        <a:defRPr sz="1500" b="0">
+                          <a:solidFill>
+                            <a:srgbClr val="1A1A1A"/>
+                          </a:solidFill>
+                        </a:defRPr>
+                      </a:pPr>
+                      <a:r>
+                        <a:rPr sz="1500" b="0">
+                          <a:solidFill>
+                            <a:srgbClr val="1A1A1A"/>
+                          </a:solidFill>
+                        </a:rPr>
                         <a:t>plan ready</a:t>
                       </a:r>
                     </a:p>
@@ -5191,6 +6261,11 @@
                         </a:defRPr>
                       </a:pPr>
                       <a:r>
+                        <a:rPr sz="1400" b="1">
+                          <a:solidFill>
+                            <a:srgbClr val="FFFFFF"/>
+                          </a:solidFill>
+                        </a:rPr>
                         <a:t>Metric</a:t>
                       </a:r>
                     </a:p>
@@ -5214,6 +6289,11 @@
                         </a:defRPr>
                       </a:pPr>
                       <a:r>
+                        <a:rPr sz="1400" b="1">
+                          <a:solidFill>
+                            <a:srgbClr val="FFFFFF"/>
+                          </a:solidFill>
+                        </a:rPr>
                         <a:t>Paper (Nakayama 2024)</a:t>
                       </a:r>
                     </a:p>
@@ -5237,6 +6317,11 @@
                         </a:defRPr>
                       </a:pPr>
                       <a:r>
+                        <a:rPr sz="1400" b="1">
+                          <a:solidFill>
+                            <a:srgbClr val="FFFFFF"/>
+                          </a:solidFill>
+                        </a:rPr>
                         <a:t>Our model</a:t>
                       </a:r>
                     </a:p>
@@ -5260,6 +6345,11 @@
                         </a:defRPr>
                       </a:pPr>
                       <a:r>
+                        <a:rPr sz="1400" b="1">
+                          <a:solidFill>
+                            <a:srgbClr val="FFFFFF"/>
+                          </a:solidFill>
+                        </a:rPr>
                         <a:t>Verdict</a:t>
                       </a:r>
                     </a:p>
@@ -5285,6 +6375,11 @@
                         </a:defRPr>
                       </a:pPr>
                       <a:r>
+                        <a:rPr sz="1400" b="1">
+                          <a:solidFill>
+                            <a:srgbClr val="1A1A1A"/>
+                          </a:solidFill>
+                        </a:rPr>
                         <a:t>Diabetic retinopathy — AUC</a:t>
                       </a:r>
                     </a:p>
@@ -5308,6 +6403,11 @@
                         </a:defRPr>
                       </a:pPr>
                       <a:r>
+                        <a:rPr sz="1400" b="1">
+                          <a:solidFill>
+                            <a:srgbClr val="1A1A1A"/>
+                          </a:solidFill>
+                        </a:rPr>
                         <a:t>0.97</a:t>
                       </a:r>
                     </a:p>
@@ -5331,6 +6431,11 @@
                         </a:defRPr>
                       </a:pPr>
                       <a:r>
+                        <a:rPr sz="1400" b="1">
+                          <a:solidFill>
+                            <a:srgbClr val="1A1A1A"/>
+                          </a:solidFill>
+                        </a:rPr>
                         <a:t>0.992</a:t>
                       </a:r>
                     </a:p>
@@ -5354,6 +6459,11 @@
                         </a:defRPr>
                       </a:pPr>
                       <a:r>
+                        <a:rPr sz="1400" b="1">
+                          <a:solidFill>
+                            <a:srgbClr val="1A1A1A"/>
+                          </a:solidFill>
+                        </a:rPr>
                         <a:t>Better than the paper</a:t>
                       </a:r>
                     </a:p>
@@ -5379,6 +6489,11 @@
                         </a:defRPr>
                       </a:pPr>
                       <a:r>
+                        <a:rPr sz="1400" b="1">
+                          <a:solidFill>
+                            <a:srgbClr val="1A1A1A"/>
+                          </a:solidFill>
+                        </a:rPr>
                         <a:t>Diabetic retinopathy — F1</a:t>
                       </a:r>
                     </a:p>
@@ -5402,6 +6517,11 @@
                         </a:defRPr>
                       </a:pPr>
                       <a:r>
+                        <a:rPr sz="1400" b="1">
+                          <a:solidFill>
+                            <a:srgbClr val="1A1A1A"/>
+                          </a:solidFill>
+                        </a:rPr>
                         <a:t>0.89</a:t>
                       </a:r>
                     </a:p>
@@ -5425,6 +6545,11 @@
                         </a:defRPr>
                       </a:pPr>
                       <a:r>
+                        <a:rPr sz="1400" b="1">
+                          <a:solidFill>
+                            <a:srgbClr val="1A1A1A"/>
+                          </a:solidFill>
+                        </a:rPr>
                         <a:t>0.869</a:t>
                       </a:r>
                     </a:p>
@@ -5448,6 +6573,11 @@
                         </a:defRPr>
                       </a:pPr>
                       <a:r>
+                        <a:rPr sz="1400" b="1">
+                          <a:solidFill>
+                            <a:srgbClr val="1A1A1A"/>
+                          </a:solidFill>
+                        </a:rPr>
                         <a:t>The same, within measurement error</a:t>
                       </a:r>
                     </a:p>
@@ -5466,13 +6596,18 @@
                     <a:lstStyle/>
                     <a:p>
                       <a:pPr algn="l">
-                        <a:defRPr sz="1400">
-                          <a:solidFill>
-                            <a:srgbClr val="1A1A1A"/>
-                          </a:solidFill>
-                        </a:defRPr>
-                      </a:pPr>
-                      <a:r>
+                        <a:defRPr sz="1400" b="0">
+                          <a:solidFill>
+                            <a:srgbClr val="1A1A1A"/>
+                          </a:solidFill>
+                        </a:defRPr>
+                      </a:pPr>
+                      <a:r>
+                        <a:rPr sz="1400" b="0">
+                          <a:solidFill>
+                            <a:srgbClr val="1A1A1A"/>
+                          </a:solidFill>
+                        </a:rPr>
                         <a:t>Macular edema — AUC</a:t>
                       </a:r>
                     </a:p>
@@ -5489,13 +6624,18 @@
                     <a:lstStyle/>
                     <a:p>
                       <a:pPr algn="ctr">
-                        <a:defRPr sz="1400">
-                          <a:solidFill>
-                            <a:srgbClr val="1A1A1A"/>
-                          </a:solidFill>
-                        </a:defRPr>
-                      </a:pPr>
-                      <a:r>
+                        <a:defRPr sz="1400" b="0">
+                          <a:solidFill>
+                            <a:srgbClr val="1A1A1A"/>
+                          </a:solidFill>
+                        </a:defRPr>
+                      </a:pPr>
+                      <a:r>
+                        <a:rPr sz="1400" b="0">
+                          <a:solidFill>
+                            <a:srgbClr val="1A1A1A"/>
+                          </a:solidFill>
+                        </a:rPr>
                         <a:t>not reported</a:t>
                       </a:r>
                     </a:p>
@@ -5512,13 +6652,18 @@
                     <a:lstStyle/>
                     <a:p>
                       <a:pPr algn="ctr">
-                        <a:defRPr sz="1400">
-                          <a:solidFill>
-                            <a:srgbClr val="1A1A1A"/>
-                          </a:solidFill>
-                        </a:defRPr>
-                      </a:pPr>
-                      <a:r>
+                        <a:defRPr sz="1400" b="0">
+                          <a:solidFill>
+                            <a:srgbClr val="1A1A1A"/>
+                          </a:solidFill>
+                        </a:defRPr>
+                      </a:pPr>
+                      <a:r>
+                        <a:rPr sz="1400" b="0">
+                          <a:solidFill>
+                            <a:srgbClr val="1A1A1A"/>
+                          </a:solidFill>
+                        </a:rPr>
                         <a:t>0.989</a:t>
                       </a:r>
                     </a:p>
@@ -5535,13 +6680,18 @@
                     <a:lstStyle/>
                     <a:p>
                       <a:pPr algn="ctr">
-                        <a:defRPr sz="1400">
-                          <a:solidFill>
-                            <a:srgbClr val="1A1A1A"/>
-                          </a:solidFill>
-                        </a:defRPr>
-                      </a:pPr>
-                      <a:r>
+                        <a:defRPr sz="1400" b="0">
+                          <a:solidFill>
+                            <a:srgbClr val="1A1A1A"/>
+                          </a:solidFill>
+                        </a:defRPr>
+                      </a:pPr>
+                      <a:r>
+                        <a:rPr sz="1400" b="0">
+                          <a:solidFill>
+                            <a:srgbClr val="1A1A1A"/>
+                          </a:solidFill>
+                        </a:rPr>
                         <a:t>No published benchmark to compare to</a:t>
                       </a:r>
                     </a:p>
@@ -5560,13 +6710,18 @@
                     <a:lstStyle/>
                     <a:p>
                       <a:pPr algn="l">
-                        <a:defRPr sz="1400">
-                          <a:solidFill>
-                            <a:srgbClr val="1A1A1A"/>
-                          </a:solidFill>
-                        </a:defRPr>
-                      </a:pPr>
-                      <a:r>
+                        <a:defRPr sz="1400" b="0">
+                          <a:solidFill>
+                            <a:srgbClr val="1A1A1A"/>
+                          </a:solidFill>
+                        </a:defRPr>
+                      </a:pPr>
+                      <a:r>
+                        <a:rPr sz="1400" b="0">
+                          <a:solidFill>
+                            <a:srgbClr val="1A1A1A"/>
+                          </a:solidFill>
+                        </a:rPr>
                         <a:t>Macular edema — F1</a:t>
                       </a:r>
                     </a:p>
@@ -5583,13 +6738,18 @@
                     <a:lstStyle/>
                     <a:p>
                       <a:pPr algn="ctr">
-                        <a:defRPr sz="1400">
-                          <a:solidFill>
-                            <a:srgbClr val="1A1A1A"/>
-                          </a:solidFill>
-                        </a:defRPr>
-                      </a:pPr>
-                      <a:r>
+                        <a:defRPr sz="1400" b="0">
+                          <a:solidFill>
+                            <a:srgbClr val="1A1A1A"/>
+                          </a:solidFill>
+                        </a:defRPr>
+                      </a:pPr>
+                      <a:r>
+                        <a:rPr sz="1400" b="0">
+                          <a:solidFill>
+                            <a:srgbClr val="1A1A1A"/>
+                          </a:solidFill>
+                        </a:rPr>
                         <a:t>not reported</a:t>
                       </a:r>
                     </a:p>
@@ -5606,13 +6766,18 @@
                     <a:lstStyle/>
                     <a:p>
                       <a:pPr algn="ctr">
-                        <a:defRPr sz="1400">
-                          <a:solidFill>
-                            <a:srgbClr val="1A1A1A"/>
-                          </a:solidFill>
-                        </a:defRPr>
-                      </a:pPr>
-                      <a:r>
+                        <a:defRPr sz="1400" b="0">
+                          <a:solidFill>
+                            <a:srgbClr val="1A1A1A"/>
+                          </a:solidFill>
+                        </a:defRPr>
+                      </a:pPr>
+                      <a:r>
+                        <a:rPr sz="1400" b="0">
+                          <a:solidFill>
+                            <a:srgbClr val="1A1A1A"/>
+                          </a:solidFill>
+                        </a:rPr>
                         <a:t>0.748</a:t>
                       </a:r>
                     </a:p>
@@ -5629,13 +6794,18 @@
                     <a:lstStyle/>
                     <a:p>
                       <a:pPr algn="ctr">
-                        <a:defRPr sz="1400">
-                          <a:solidFill>
-                            <a:srgbClr val="1A1A1A"/>
-                          </a:solidFill>
-                        </a:defRPr>
-                      </a:pPr>
-                      <a:r>
+                        <a:defRPr sz="1400" b="0">
+                          <a:solidFill>
+                            <a:srgbClr val="1A1A1A"/>
+                          </a:solidFill>
+                        </a:defRPr>
+                      </a:pPr>
+                      <a:r>
+                        <a:rPr sz="1400" b="0">
+                          <a:solidFill>
+                            <a:srgbClr val="1A1A1A"/>
+                          </a:solidFill>
+                        </a:rPr>
                         <a:t>No published benchmark to compare to</a:t>
                       </a:r>
                     </a:p>
@@ -5872,6 +7042,11 @@
                         </a:defRPr>
                       </a:pPr>
                       <a:r>
+                        <a:rPr sz="1500" b="1">
+                          <a:solidFill>
+                            <a:srgbClr val="FFFFFF"/>
+                          </a:solidFill>
+                        </a:rPr>
                         <a:t>Split</a:t>
                       </a:r>
                     </a:p>
@@ -5895,6 +7070,11 @@
                         </a:defRPr>
                       </a:pPr>
                       <a:r>
+                        <a:rPr sz="1500" b="1">
+                          <a:solidFill>
+                            <a:srgbClr val="FFFFFF"/>
+                          </a:solidFill>
+                        </a:rPr>
                         <a:t>Images</a:t>
                       </a:r>
                     </a:p>
@@ -5918,6 +7098,11 @@
                         </a:defRPr>
                       </a:pPr>
                       <a:r>
+                        <a:rPr sz="1500" b="1">
+                          <a:solidFill>
+                            <a:srgbClr val="FFFFFF"/>
+                          </a:solidFill>
+                        </a:rPr>
                         <a:t>With diabetic retinopathy</a:t>
                       </a:r>
                     </a:p>
@@ -5941,6 +7126,11 @@
                         </a:defRPr>
                       </a:pPr>
                       <a:r>
+                        <a:rPr sz="1500" b="1">
+                          <a:solidFill>
+                            <a:srgbClr val="FFFFFF"/>
+                          </a:solidFill>
+                        </a:rPr>
                         <a:t>With macular edema</a:t>
                       </a:r>
                     </a:p>
@@ -5959,13 +7149,18 @@
                     <a:lstStyle/>
                     <a:p>
                       <a:pPr algn="l">
-                        <a:defRPr sz="1500">
-                          <a:solidFill>
-                            <a:srgbClr val="1A1A1A"/>
-                          </a:solidFill>
-                        </a:defRPr>
-                      </a:pPr>
-                      <a:r>
+                        <a:defRPr sz="1500" b="0">
+                          <a:solidFill>
+                            <a:srgbClr val="1A1A1A"/>
+                          </a:solidFill>
+                        </a:defRPr>
+                      </a:pPr>
+                      <a:r>
+                        <a:rPr sz="1500" b="0">
+                          <a:solidFill>
+                            <a:srgbClr val="1A1A1A"/>
+                          </a:solidFill>
+                        </a:rPr>
                         <a:t>Train</a:t>
                       </a:r>
                     </a:p>
@@ -5982,13 +7177,18 @@
                     <a:lstStyle/>
                     <a:p>
                       <a:pPr algn="ctr">
-                        <a:defRPr sz="1500">
-                          <a:solidFill>
-                            <a:srgbClr val="1A1A1A"/>
-                          </a:solidFill>
-                        </a:defRPr>
-                      </a:pPr>
-                      <a:r>
+                        <a:defRPr sz="1500" b="0">
+                          <a:solidFill>
+                            <a:srgbClr val="1A1A1A"/>
+                          </a:solidFill>
+                        </a:defRPr>
+                      </a:pPr>
+                      <a:r>
+                        <a:rPr sz="1500" b="0">
+                          <a:solidFill>
+                            <a:srgbClr val="1A1A1A"/>
+                          </a:solidFill>
+                        </a:rPr>
                         <a:t>11,372</a:t>
                       </a:r>
                     </a:p>
@@ -6005,13 +7205,18 @@
                     <a:lstStyle/>
                     <a:p>
                       <a:pPr algn="ctr">
-                        <a:defRPr sz="1500">
-                          <a:solidFill>
-                            <a:srgbClr val="1A1A1A"/>
-                          </a:solidFill>
-                        </a:defRPr>
-                      </a:pPr>
-                      <a:r>
+                        <a:defRPr sz="1500" b="0">
+                          <a:solidFill>
+                            <a:srgbClr val="1A1A1A"/>
+                          </a:solidFill>
+                        </a:defRPr>
+                      </a:pPr>
+                      <a:r>
+                        <a:rPr sz="1500" b="0">
+                          <a:solidFill>
+                            <a:srgbClr val="1A1A1A"/>
+                          </a:solidFill>
+                        </a:rPr>
                         <a:t>748  (6.6%)</a:t>
                       </a:r>
                     </a:p>
@@ -6028,13 +7233,18 @@
                     <a:lstStyle/>
                     <a:p>
                       <a:pPr algn="ctr">
-                        <a:defRPr sz="1500">
-                          <a:solidFill>
-                            <a:srgbClr val="1A1A1A"/>
-                          </a:solidFill>
-                        </a:defRPr>
-                      </a:pPr>
-                      <a:r>
+                        <a:defRPr sz="1500" b="0">
+                          <a:solidFill>
+                            <a:srgbClr val="1A1A1A"/>
+                          </a:solidFill>
+                        </a:defRPr>
+                      </a:pPr>
+                      <a:r>
+                        <a:rPr sz="1500" b="0">
+                          <a:solidFill>
+                            <a:srgbClr val="1A1A1A"/>
+                          </a:solidFill>
+                        </a:rPr>
                         <a:t>274  (2.4%)</a:t>
                       </a:r>
                     </a:p>
@@ -6053,13 +7263,18 @@
                     <a:lstStyle/>
                     <a:p>
                       <a:pPr algn="l">
-                        <a:defRPr sz="1500">
-                          <a:solidFill>
-                            <a:srgbClr val="1A1A1A"/>
-                          </a:solidFill>
-                        </a:defRPr>
-                      </a:pPr>
-                      <a:r>
+                        <a:defRPr sz="1500" b="0">
+                          <a:solidFill>
+                            <a:srgbClr val="1A1A1A"/>
+                          </a:solidFill>
+                        </a:defRPr>
+                      </a:pPr>
+                      <a:r>
+                        <a:rPr sz="1500" b="0">
+                          <a:solidFill>
+                            <a:srgbClr val="1A1A1A"/>
+                          </a:solidFill>
+                        </a:rPr>
                         <a:t>Validation</a:t>
                       </a:r>
                     </a:p>
@@ -6076,13 +7291,18 @@
                     <a:lstStyle/>
                     <a:p>
                       <a:pPr algn="ctr">
-                        <a:defRPr sz="1500">
-                          <a:solidFill>
-                            <a:srgbClr val="1A1A1A"/>
-                          </a:solidFill>
-                        </a:defRPr>
-                      </a:pPr>
-                      <a:r>
+                        <a:defRPr sz="1500" b="0">
+                          <a:solidFill>
+                            <a:srgbClr val="1A1A1A"/>
+                          </a:solidFill>
+                        </a:defRPr>
+                      </a:pPr>
+                      <a:r>
+                        <a:rPr sz="1500" b="0">
+                          <a:solidFill>
+                            <a:srgbClr val="1A1A1A"/>
+                          </a:solidFill>
+                        </a:rPr>
                         <a:t>2,451</a:t>
                       </a:r>
                     </a:p>
@@ -6099,13 +7319,18 @@
                     <a:lstStyle/>
                     <a:p>
                       <a:pPr algn="ctr">
-                        <a:defRPr sz="1500">
-                          <a:solidFill>
-                            <a:srgbClr val="1A1A1A"/>
-                          </a:solidFill>
-                        </a:defRPr>
-                      </a:pPr>
-                      <a:r>
+                        <a:defRPr sz="1500" b="0">
+                          <a:solidFill>
+                            <a:srgbClr val="1A1A1A"/>
+                          </a:solidFill>
+                        </a:defRPr>
+                      </a:pPr>
+                      <a:r>
+                        <a:rPr sz="1500" b="0">
+                          <a:solidFill>
+                            <a:srgbClr val="1A1A1A"/>
+                          </a:solidFill>
+                        </a:rPr>
                         <a:t>159  (6.5%)</a:t>
                       </a:r>
                     </a:p>
@@ -6122,13 +7347,18 @@
                     <a:lstStyle/>
                     <a:p>
                       <a:pPr algn="ctr">
-                        <a:defRPr sz="1500">
-                          <a:solidFill>
-                            <a:srgbClr val="1A1A1A"/>
-                          </a:solidFill>
-                        </a:defRPr>
-                      </a:pPr>
-                      <a:r>
+                        <a:defRPr sz="1500" b="0">
+                          <a:solidFill>
+                            <a:srgbClr val="1A1A1A"/>
+                          </a:solidFill>
+                        </a:defRPr>
+                      </a:pPr>
+                      <a:r>
+                        <a:rPr sz="1500" b="0">
+                          <a:solidFill>
+                            <a:srgbClr val="1A1A1A"/>
+                          </a:solidFill>
+                        </a:rPr>
                         <a:t>65  (2.7%)</a:t>
                       </a:r>
                     </a:p>
@@ -6147,13 +7377,18 @@
                     <a:lstStyle/>
                     <a:p>
                       <a:pPr algn="l">
-                        <a:defRPr sz="1500">
-                          <a:solidFill>
-                            <a:srgbClr val="1A1A1A"/>
-                          </a:solidFill>
-                        </a:defRPr>
-                      </a:pPr>
-                      <a:r>
+                        <a:defRPr sz="1500" b="0">
+                          <a:solidFill>
+                            <a:srgbClr val="1A1A1A"/>
+                          </a:solidFill>
+                        </a:defRPr>
+                      </a:pPr>
+                      <a:r>
+                        <a:rPr sz="1500" b="0">
+                          <a:solidFill>
+                            <a:srgbClr val="1A1A1A"/>
+                          </a:solidFill>
+                        </a:rPr>
                         <a:t>Test</a:t>
                       </a:r>
                     </a:p>
@@ -6170,13 +7405,18 @@
                     <a:lstStyle/>
                     <a:p>
                       <a:pPr algn="ctr">
-                        <a:defRPr sz="1500">
-                          <a:solidFill>
-                            <a:srgbClr val="1A1A1A"/>
-                          </a:solidFill>
-                        </a:defRPr>
-                      </a:pPr>
-                      <a:r>
+                        <a:defRPr sz="1500" b="0">
+                          <a:solidFill>
+                            <a:srgbClr val="1A1A1A"/>
+                          </a:solidFill>
+                        </a:defRPr>
+                      </a:pPr>
+                      <a:r>
+                        <a:rPr sz="1500" b="0">
+                          <a:solidFill>
+                            <a:srgbClr val="1A1A1A"/>
+                          </a:solidFill>
+                        </a:rPr>
                         <a:t>2,435</a:t>
                       </a:r>
                     </a:p>
@@ -6193,13 +7433,18 @@
                     <a:lstStyle/>
                     <a:p>
                       <a:pPr algn="ctr">
-                        <a:defRPr sz="1500">
-                          <a:solidFill>
-                            <a:srgbClr val="1A1A1A"/>
-                          </a:solidFill>
-                        </a:defRPr>
-                      </a:pPr>
-                      <a:r>
+                        <a:defRPr sz="1500" b="0">
+                          <a:solidFill>
+                            <a:srgbClr val="1A1A1A"/>
+                          </a:solidFill>
+                        </a:defRPr>
+                      </a:pPr>
+                      <a:r>
+                        <a:rPr sz="1500" b="0">
+                          <a:solidFill>
+                            <a:srgbClr val="1A1A1A"/>
+                          </a:solidFill>
+                        </a:rPr>
                         <a:t>162  (6.7%)</a:t>
                       </a:r>
                     </a:p>
@@ -6216,13 +7461,18 @@
                     <a:lstStyle/>
                     <a:p>
                       <a:pPr algn="ctr">
-                        <a:defRPr sz="1500">
-                          <a:solidFill>
-                            <a:srgbClr val="1A1A1A"/>
-                          </a:solidFill>
-                        </a:defRPr>
-                      </a:pPr>
-                      <a:r>
+                        <a:defRPr sz="1500" b="0">
+                          <a:solidFill>
+                            <a:srgbClr val="1A1A1A"/>
+                          </a:solidFill>
+                        </a:defRPr>
+                      </a:pPr>
+                      <a:r>
+                        <a:rPr sz="1500" b="0">
+                          <a:solidFill>
+                            <a:srgbClr val="1A1A1A"/>
+                          </a:solidFill>
+                        </a:rPr>
                         <a:t>61  (2.5%)</a:t>
                       </a:r>
                     </a:p>
@@ -6542,6 +7792,11 @@
                         </a:defRPr>
                       </a:pPr>
                       <a:r>
+                        <a:rPr sz="1300" b="1">
+                          <a:solidFill>
+                            <a:srgbClr val="FFFFFF"/>
+                          </a:solidFill>
+                        </a:rPr>
                         <a:t>Loss function tested</a:t>
                       </a:r>
                     </a:p>
@@ -6565,6 +7820,11 @@
                         </a:defRPr>
                       </a:pPr>
                       <a:r>
+                        <a:rPr sz="1300" b="1">
+                          <a:solidFill>
+                            <a:srgbClr val="FFFFFF"/>
+                          </a:solidFill>
+                        </a:rPr>
                         <a:t>DR F1</a:t>
                       </a:r>
                     </a:p>
@@ -6588,6 +7848,11 @@
                         </a:defRPr>
                       </a:pPr>
                       <a:r>
+                        <a:rPr sz="1300" b="1">
+                          <a:solidFill>
+                            <a:srgbClr val="FFFFFF"/>
+                          </a:solidFill>
+                        </a:rPr>
                         <a:t>ME F1</a:t>
                       </a:r>
                     </a:p>
@@ -6611,6 +7876,11 @@
                         </a:defRPr>
                       </a:pPr>
                       <a:r>
+                        <a:rPr sz="1300" b="1">
+                          <a:solidFill>
+                            <a:srgbClr val="FFFFFF"/>
+                          </a:solidFill>
+                        </a:rPr>
                         <a:t>Outcome</a:t>
                       </a:r>
                     </a:p>
@@ -6629,13 +7899,18 @@
                     <a:lstStyle/>
                     <a:p>
                       <a:pPr algn="l">
-                        <a:defRPr sz="1300">
-                          <a:solidFill>
-                            <a:srgbClr val="1A1A1A"/>
-                          </a:solidFill>
-                        </a:defRPr>
-                      </a:pPr>
-                      <a:r>
+                        <a:defRPr sz="1300" b="0">
+                          <a:solidFill>
+                            <a:srgbClr val="1A1A1A"/>
+                          </a:solidFill>
+                        </a:defRPr>
+                      </a:pPr>
+                      <a:r>
+                        <a:rPr sz="1300" b="0">
+                          <a:solidFill>
+                            <a:srgbClr val="1A1A1A"/>
+                          </a:solidFill>
+                        </a:rPr>
                         <a:t>Focal loss — one dial for all images</a:t>
                       </a:r>
                     </a:p>
@@ -6652,13 +7927,18 @@
                     <a:lstStyle/>
                     <a:p>
                       <a:pPr algn="ctr">
-                        <a:defRPr sz="1300">
-                          <a:solidFill>
-                            <a:srgbClr val="1A1A1A"/>
-                          </a:solidFill>
-                        </a:defRPr>
-                      </a:pPr>
-                      <a:r>
+                        <a:defRPr sz="1300" b="0">
+                          <a:solidFill>
+                            <a:srgbClr val="1A1A1A"/>
+                          </a:solidFill>
+                        </a:defRPr>
+                      </a:pPr>
+                      <a:r>
+                        <a:rPr sz="1300" b="0">
+                          <a:solidFill>
+                            <a:srgbClr val="1A1A1A"/>
+                          </a:solidFill>
+                        </a:rPr>
                         <a:t>0.869</a:t>
                       </a:r>
                     </a:p>
@@ -6675,13 +7955,18 @@
                     <a:lstStyle/>
                     <a:p>
                       <a:pPr algn="ctr">
-                        <a:defRPr sz="1300">
-                          <a:solidFill>
-                            <a:srgbClr val="1A1A1A"/>
-                          </a:solidFill>
-                        </a:defRPr>
-                      </a:pPr>
-                      <a:r>
+                        <a:defRPr sz="1300" b="0">
+                          <a:solidFill>
+                            <a:srgbClr val="1A1A1A"/>
+                          </a:solidFill>
+                        </a:defRPr>
+                      </a:pPr>
+                      <a:r>
+                        <a:rPr sz="1300" b="0">
+                          <a:solidFill>
+                            <a:srgbClr val="1A1A1A"/>
+                          </a:solidFill>
+                        </a:rPr>
                         <a:t>0.748</a:t>
                       </a:r>
                     </a:p>
@@ -6698,13 +7983,18 @@
                     <a:lstStyle/>
                     <a:p>
                       <a:pPr algn="ctr">
-                        <a:defRPr sz="1300">
-                          <a:solidFill>
-                            <a:srgbClr val="1A1A1A"/>
-                          </a:solidFill>
-                        </a:defRPr>
-                      </a:pPr>
-                      <a:r>
+                        <a:defRPr sz="1300" b="0">
+                          <a:solidFill>
+                            <a:srgbClr val="1A1A1A"/>
+                          </a:solidFill>
+                        </a:defRPr>
+                      </a:pPr>
+                      <a:r>
+                        <a:rPr sz="1300" b="0">
+                          <a:solidFill>
+                            <a:srgbClr val="1A1A1A"/>
+                          </a:solidFill>
+                        </a:rPr>
                         <a:t>Kept</a:t>
                       </a:r>
                     </a:p>
@@ -6723,18 +8013,35 @@
                     <a:lstStyle/>
                     <a:p>
                       <a:pPr algn="l">
-                        <a:defRPr sz="1300">
-                          <a:solidFill>
-                            <a:srgbClr val="1A1A1A"/>
-                          </a:solidFill>
-                        </a:defRPr>
-                      </a:pPr>
-                      <a:r>
+                        <a:defRPr sz="1300" b="0">
+                          <a:solidFill>
+                            <a:srgbClr val="1A1A1A"/>
+                          </a:solidFill>
+                        </a:defRPr>
+                      </a:pPr>
+                      <a:r>
+                        <a:rPr sz="1300" b="0">
+                          <a:solidFill>
+                            <a:srgbClr val="1A1A1A"/>
+                          </a:solidFill>
+                        </a:rPr>
                         <a:t>Asymmetric Loss — separate dials for</a:t>
                       </a:r>
                     </a:p>
                     <a:p>
-                      <a:r>
+                      <a:pPr algn="l">
+                        <a:defRPr sz="1300" b="0">
+                          <a:solidFill>
+                            <a:srgbClr val="1A1A1A"/>
+                          </a:solidFill>
+                        </a:defRPr>
+                      </a:pPr>
+                      <a:r>
+                        <a:rPr sz="1300" b="0">
+                          <a:solidFill>
+                            <a:srgbClr val="1A1A1A"/>
+                          </a:solidFill>
+                        </a:rPr>
                         <a:t>healthy and for diseased images</a:t>
                       </a:r>
                     </a:p>
@@ -6751,13 +8058,18 @@
                     <a:lstStyle/>
                     <a:p>
                       <a:pPr algn="ctr">
-                        <a:defRPr sz="1300">
-                          <a:solidFill>
-                            <a:srgbClr val="1A1A1A"/>
-                          </a:solidFill>
-                        </a:defRPr>
-                      </a:pPr>
-                      <a:r>
+                        <a:defRPr sz="1300" b="0">
+                          <a:solidFill>
+                            <a:srgbClr val="1A1A1A"/>
+                          </a:solidFill>
+                        </a:defRPr>
+                      </a:pPr>
+                      <a:r>
+                        <a:rPr sz="1300" b="0">
+                          <a:solidFill>
+                            <a:srgbClr val="1A1A1A"/>
+                          </a:solidFill>
+                        </a:rPr>
                         <a:t>0.834</a:t>
                       </a:r>
                     </a:p>
@@ -6774,13 +8086,18 @@
                     <a:lstStyle/>
                     <a:p>
                       <a:pPr algn="ctr">
-                        <a:defRPr sz="1300">
-                          <a:solidFill>
-                            <a:srgbClr val="1A1A1A"/>
-                          </a:solidFill>
-                        </a:defRPr>
-                      </a:pPr>
-                      <a:r>
+                        <a:defRPr sz="1300" b="0">
+                          <a:solidFill>
+                            <a:srgbClr val="1A1A1A"/>
+                          </a:solidFill>
+                        </a:defRPr>
+                      </a:pPr>
+                      <a:r>
+                        <a:rPr sz="1300" b="0">
+                          <a:solidFill>
+                            <a:srgbClr val="1A1A1A"/>
+                          </a:solidFill>
+                        </a:rPr>
                         <a:t>0.758</a:t>
                       </a:r>
                     </a:p>
@@ -6797,13 +8114,18 @@
                     <a:lstStyle/>
                     <a:p>
                       <a:pPr algn="ctr">
-                        <a:defRPr sz="1300">
-                          <a:solidFill>
-                            <a:srgbClr val="1A1A1A"/>
-                          </a:solidFill>
-                        </a:defRPr>
-                      </a:pPr>
-                      <a:r>
+                        <a:defRPr sz="1300" b="0">
+                          <a:solidFill>
+                            <a:srgbClr val="1A1A1A"/>
+                          </a:solidFill>
+                        </a:defRPr>
+                      </a:pPr>
+                      <a:r>
+                        <a:rPr sz="1300" b="0">
+                          <a:solidFill>
+                            <a:srgbClr val="1A1A1A"/>
+                          </a:solidFill>
+                        </a:rPr>
                         <a:t>Clearly worse on DR — not used</a:t>
                       </a:r>
                     </a:p>
@@ -6957,6 +8279,11 @@
                         </a:defRPr>
                       </a:pPr>
                       <a:r>
+                        <a:rPr sz="1250" b="1">
+                          <a:solidFill>
+                            <a:srgbClr val="FFFFFF"/>
+                          </a:solidFill>
+                        </a:rPr>
                         <a:t>Step</a:t>
                       </a:r>
                     </a:p>
@@ -6980,6 +8307,11 @@
                         </a:defRPr>
                       </a:pPr>
                       <a:r>
+                        <a:rPr sz="1250" b="1">
+                          <a:solidFill>
+                            <a:srgbClr val="FFFFFF"/>
+                          </a:solidFill>
+                        </a:rPr>
                         <a:t>What it does</a:t>
                       </a:r>
                     </a:p>
@@ -7003,6 +8335,11 @@
                         </a:defRPr>
                       </a:pPr>
                       <a:r>
+                        <a:rPr sz="1250" b="1">
+                          <a:solidFill>
+                            <a:srgbClr val="FFFFFF"/>
+                          </a:solidFill>
+                        </a:rPr>
                         <a:t>Why it would matter</a:t>
                       </a:r>
                     </a:p>
@@ -7026,6 +8363,11 @@
                         </a:defRPr>
                       </a:pPr>
                       <a:r>
+                        <a:rPr sz="1250" b="1">
+                          <a:solidFill>
+                            <a:srgbClr val="FFFFFF"/>
+                          </a:solidFill>
+                        </a:rPr>
                         <a:t>Cost</a:t>
                       </a:r>
                     </a:p>
@@ -7044,18 +8386,35 @@
                     <a:lstStyle/>
                     <a:p>
                       <a:pPr algn="l">
-                        <a:defRPr sz="1250">
-                          <a:solidFill>
-                            <a:srgbClr val="1A1A1A"/>
-                          </a:solidFill>
-                        </a:defRPr>
-                      </a:pPr>
-                      <a:r>
+                        <a:defRPr sz="1250" b="0">
+                          <a:solidFill>
+                            <a:srgbClr val="1A1A1A"/>
+                          </a:solidFill>
+                        </a:defRPr>
+                      </a:pPr>
+                      <a:r>
+                        <a:rPr sz="1250" b="0">
+                          <a:solidFill>
+                            <a:srgbClr val="1A1A1A"/>
+                          </a:solidFill>
+                        </a:rPr>
                         <a:t>Hyperparameter</a:t>
                       </a:r>
                     </a:p>
                     <a:p>
-                      <a:r>
+                      <a:pPr algn="l">
+                        <a:defRPr sz="1250" b="0">
+                          <a:solidFill>
+                            <a:srgbClr val="1A1A1A"/>
+                          </a:solidFill>
+                        </a:defRPr>
+                      </a:pPr>
+                      <a:r>
+                        <a:rPr sz="1250" b="0">
+                          <a:solidFill>
+                            <a:srgbClr val="1A1A1A"/>
+                          </a:solidFill>
+                        </a:rPr>
                         <a:t>sweep</a:t>
                       </a:r>
                     </a:p>
@@ -7072,23 +8431,52 @@
                     <a:lstStyle/>
                     <a:p>
                       <a:pPr algn="ctr">
-                        <a:defRPr sz="1250">
-                          <a:solidFill>
-                            <a:srgbClr val="1A1A1A"/>
-                          </a:solidFill>
-                        </a:defRPr>
-                      </a:pPr>
-                      <a:r>
+                        <a:defRPr sz="1250" b="0">
+                          <a:solidFill>
+                            <a:srgbClr val="1A1A1A"/>
+                          </a:solidFill>
+                        </a:defRPr>
+                      </a:pPr>
+                      <a:r>
+                        <a:rPr sz="1250" b="0">
+                          <a:solidFill>
+                            <a:srgbClr val="1A1A1A"/>
+                          </a:solidFill>
+                        </a:rPr>
                         <a:t>Tries six settings of the imbalance</a:t>
                       </a:r>
                     </a:p>
                     <a:p>
-                      <a:r>
+                      <a:pPr algn="ctr">
+                        <a:defRPr sz="1250" b="0">
+                          <a:solidFill>
+                            <a:srgbClr val="1A1A1A"/>
+                          </a:solidFill>
+                        </a:defRPr>
+                      </a:pPr>
+                      <a:r>
+                        <a:rPr sz="1250" b="0">
+                          <a:solidFill>
+                            <a:srgbClr val="1A1A1A"/>
+                          </a:solidFill>
+                        </a:rPr>
                         <a:t>controls, instead of the one value we</a:t>
                       </a:r>
                     </a:p>
                     <a:p>
-                      <a:r>
+                      <a:pPr algn="ctr">
+                        <a:defRPr sz="1250" b="0">
+                          <a:solidFill>
+                            <a:srgbClr val="1A1A1A"/>
+                          </a:solidFill>
+                        </a:defRPr>
+                      </a:pPr>
+                      <a:r>
+                        <a:rPr sz="1250" b="0">
+                          <a:solidFill>
+                            <a:srgbClr val="1A1A1A"/>
+                          </a:solidFill>
+                        </a:rPr>
                         <a:t>chose by hand</a:t>
                       </a:r>
                     </a:p>
@@ -7105,23 +8493,52 @@
                     <a:lstStyle/>
                     <a:p>
                       <a:pPr algn="ctr">
-                        <a:defRPr sz="1250">
-                          <a:solidFill>
-                            <a:srgbClr val="1A1A1A"/>
-                          </a:solidFill>
-                        </a:defRPr>
-                      </a:pPr>
-                      <a:r>
+                        <a:defRPr sz="1250" b="0">
+                          <a:solidFill>
+                            <a:srgbClr val="1A1A1A"/>
+                          </a:solidFill>
+                        </a:defRPr>
+                      </a:pPr>
+                      <a:r>
+                        <a:rPr sz="1250" b="0">
+                          <a:solidFill>
+                            <a:srgbClr val="1A1A1A"/>
+                          </a:solidFill>
+                        </a:rPr>
                         <a:t>Lets us say we searched the settings</a:t>
                       </a:r>
                     </a:p>
                     <a:p>
-                      <a:r>
+                      <a:pPr algn="ctr">
+                        <a:defRPr sz="1250" b="0">
+                          <a:solidFill>
+                            <a:srgbClr val="1A1A1A"/>
+                          </a:solidFill>
+                        </a:defRPr>
+                      </a:pPr>
+                      <a:r>
+                        <a:rPr sz="1250" b="0">
+                          <a:solidFill>
+                            <a:srgbClr val="1A1A1A"/>
+                          </a:solidFill>
+                        </a:rPr>
                         <a:t>properly, rather than used the first</a:t>
                       </a:r>
                     </a:p>
                     <a:p>
-                      <a:r>
+                      <a:pPr algn="ctr">
+                        <a:defRPr sz="1250" b="0">
+                          <a:solidFill>
+                            <a:srgbClr val="1A1A1A"/>
+                          </a:solidFill>
+                        </a:defRPr>
+                      </a:pPr>
+                      <a:r>
+                        <a:rPr sz="1250" b="0">
+                          <a:solidFill>
+                            <a:srgbClr val="1A1A1A"/>
+                          </a:solidFill>
+                        </a:rPr>
                         <a:t>value we tried</a:t>
                       </a:r>
                     </a:p>
@@ -7138,13 +8555,18 @@
                     <a:lstStyle/>
                     <a:p>
                       <a:pPr algn="ctr">
-                        <a:defRPr sz="1250">
-                          <a:solidFill>
-                            <a:srgbClr val="1A1A1A"/>
-                          </a:solidFill>
-                        </a:defRPr>
-                      </a:pPr>
-                      <a:r>
+                        <a:defRPr sz="1250" b="0">
+                          <a:solidFill>
+                            <a:srgbClr val="1A1A1A"/>
+                          </a:solidFill>
+                        </a:defRPr>
+                      </a:pPr>
+                      <a:r>
+                        <a:rPr sz="1250" b="0">
+                          <a:solidFill>
+                            <a:srgbClr val="1A1A1A"/>
+                          </a:solidFill>
+                        </a:rPr>
                         <a:t>~7 h</a:t>
                       </a:r>
                     </a:p>
@@ -7163,18 +8585,35 @@
                     <a:lstStyle/>
                     <a:p>
                       <a:pPr algn="l">
-                        <a:defRPr sz="1250">
-                          <a:solidFill>
-                            <a:srgbClr val="1A1A1A"/>
-                          </a:solidFill>
-                        </a:defRPr>
-                      </a:pPr>
-                      <a:r>
+                        <a:defRPr sz="1250" b="0">
+                          <a:solidFill>
+                            <a:srgbClr val="1A1A1A"/>
+                          </a:solidFill>
+                        </a:defRPr>
+                      </a:pPr>
+                      <a:r>
+                        <a:rPr sz="1250" b="0">
+                          <a:solidFill>
+                            <a:srgbClr val="1A1A1A"/>
+                          </a:solidFill>
+                        </a:rPr>
                         <a:t>5-fold</a:t>
                       </a:r>
                     </a:p>
                     <a:p>
-                      <a:r>
+                      <a:pPr algn="l">
+                        <a:defRPr sz="1250" b="0">
+                          <a:solidFill>
+                            <a:srgbClr val="1A1A1A"/>
+                          </a:solidFill>
+                        </a:defRPr>
+                      </a:pPr>
+                      <a:r>
+                        <a:rPr sz="1250" b="0">
+                          <a:solidFill>
+                            <a:srgbClr val="1A1A1A"/>
+                          </a:solidFill>
+                        </a:rPr>
                         <a:t>cross-validation</a:t>
                       </a:r>
                     </a:p>
@@ -7191,23 +8630,52 @@
                     <a:lstStyle/>
                     <a:p>
                       <a:pPr algn="ctr">
-                        <a:defRPr sz="1250">
-                          <a:solidFill>
-                            <a:srgbClr val="1A1A1A"/>
-                          </a:solidFill>
-                        </a:defRPr>
-                      </a:pPr>
-                      <a:r>
+                        <a:defRPr sz="1250" b="0">
+                          <a:solidFill>
+                            <a:srgbClr val="1A1A1A"/>
+                          </a:solidFill>
+                        </a:defRPr>
+                      </a:pPr>
+                      <a:r>
+                        <a:rPr sz="1250" b="0">
+                          <a:solidFill>
+                            <a:srgbClr val="1A1A1A"/>
+                          </a:solidFill>
+                        </a:rPr>
                         <a:t>Re-runs the model five times so every</a:t>
                       </a:r>
                     </a:p>
                     <a:p>
-                      <a:r>
+                      <a:pPr algn="ctr">
+                        <a:defRPr sz="1250" b="0">
+                          <a:solidFill>
+                            <a:srgbClr val="1A1A1A"/>
+                          </a:solidFill>
+                        </a:defRPr>
+                      </a:pPr>
+                      <a:r>
+                        <a:rPr sz="1250" b="0">
+                          <a:solidFill>
+                            <a:srgbClr val="1A1A1A"/>
+                          </a:solidFill>
+                        </a:rPr>
                         <a:t>image gets tested, instead of testing</a:t>
                       </a:r>
                     </a:p>
                     <a:p>
-                      <a:r>
+                      <a:pPr algn="ctr">
+                        <a:defRPr sz="1250" b="0">
+                          <a:solidFill>
+                            <a:srgbClr val="1A1A1A"/>
+                          </a:solidFill>
+                        </a:defRPr>
+                      </a:pPr>
+                      <a:r>
+                        <a:rPr sz="1250" b="0">
+                          <a:solidFill>
+                            <a:srgbClr val="1A1A1A"/>
+                          </a:solidFill>
+                        </a:rPr>
                         <a:t>on a single 15% slice</a:t>
                       </a:r>
                     </a:p>
@@ -7224,23 +8692,52 @@
                     <a:lstStyle/>
                     <a:p>
                       <a:pPr algn="ctr">
-                        <a:defRPr sz="1250">
-                          <a:solidFill>
-                            <a:srgbClr val="1A1A1A"/>
-                          </a:solidFill>
-                        </a:defRPr>
-                      </a:pPr>
-                      <a:r>
+                        <a:defRPr sz="1250" b="0">
+                          <a:solidFill>
+                            <a:srgbClr val="1A1A1A"/>
+                          </a:solidFill>
+                        </a:defRPr>
+                      </a:pPr>
+                      <a:r>
+                        <a:rPr sz="1250" b="0">
+                          <a:solidFill>
+                            <a:srgbClr val="1A1A1A"/>
+                          </a:solidFill>
+                        </a:rPr>
                         <a:t>Halves the measurement error. That is</a:t>
                       </a:r>
                     </a:p>
                     <a:p>
-                      <a:r>
+                      <a:pPr algn="ctr">
+                        <a:defRPr sz="1250" b="0">
+                          <a:solidFill>
+                            <a:srgbClr val="1A1A1A"/>
+                          </a:solidFill>
+                        </a:defRPr>
+                      </a:pPr>
+                      <a:r>
+                        <a:rPr sz="1250" b="0">
+                          <a:solidFill>
+                            <a:srgbClr val="1A1A1A"/>
+                          </a:solidFill>
+                        </a:rPr>
                         <a:t>what would make a 0.02 change in F1</a:t>
                       </a:r>
                     </a:p>
                     <a:p>
-                      <a:r>
+                      <a:pPr algn="ctr">
+                        <a:defRPr sz="1250" b="0">
+                          <a:solidFill>
+                            <a:srgbClr val="1A1A1A"/>
+                          </a:solidFill>
+                        </a:defRPr>
+                      </a:pPr>
+                      <a:r>
+                        <a:rPr sz="1250" b="0">
+                          <a:solidFill>
+                            <a:srgbClr val="1A1A1A"/>
+                          </a:solidFill>
+                        </a:rPr>
                         <a:t>provable rather than nominal</a:t>
                       </a:r>
                     </a:p>
@@ -7257,13 +8754,18 @@
                     <a:lstStyle/>
                     <a:p>
                       <a:pPr algn="ctr">
-                        <a:defRPr sz="1250">
-                          <a:solidFill>
-                            <a:srgbClr val="1A1A1A"/>
-                          </a:solidFill>
-                        </a:defRPr>
-                      </a:pPr>
-                      <a:r>
+                        <a:defRPr sz="1250" b="0">
+                          <a:solidFill>
+                            <a:srgbClr val="1A1A1A"/>
+                          </a:solidFill>
+                        </a:defRPr>
+                      </a:pPr>
+                      <a:r>
+                        <a:rPr sz="1250" b="0">
+                          <a:solidFill>
+                            <a:srgbClr val="1A1A1A"/>
+                          </a:solidFill>
+                        </a:rPr>
                         <a:t>~7 h</a:t>
                       </a:r>
                     </a:p>
@@ -7485,6 +8987,11 @@
                         </a:defRPr>
                       </a:pPr>
                       <a:r>
+                        <a:rPr sz="1400" b="1">
+                          <a:solidFill>
+                            <a:srgbClr val="FFFFFF"/>
+                          </a:solidFill>
+                        </a:rPr>
                         <a:t>Trained → Tested</a:t>
                       </a:r>
                     </a:p>
@@ -7508,6 +9015,11 @@
                         </a:defRPr>
                       </a:pPr>
                       <a:r>
+                        <a:rPr sz="1400" b="1">
+                          <a:solidFill>
+                            <a:srgbClr val="FFFFFF"/>
+                          </a:solidFill>
+                        </a:rPr>
                         <a:t>AUC (DR / ME)</a:t>
                       </a:r>
                     </a:p>
@@ -7531,6 +9043,11 @@
                         </a:defRPr>
                       </a:pPr>
                       <a:r>
+                        <a:rPr sz="1400" b="1">
+                          <a:solidFill>
+                            <a:srgbClr val="FFFFFF"/>
+                          </a:solidFill>
+                        </a:rPr>
                         <a:t>F1 (DR / ME)</a:t>
                       </a:r>
                     </a:p>
@@ -7554,6 +9071,11 @@
                         </a:defRPr>
                       </a:pPr>
                       <a:r>
+                        <a:rPr sz="1400" b="1">
+                          <a:solidFill>
+                            <a:srgbClr val="FFFFFF"/>
+                          </a:solidFill>
+                        </a:rPr>
                         <a:t>Recall (DR / ME)</a:t>
                       </a:r>
                     </a:p>
@@ -7572,13 +9094,18 @@
                     <a:lstStyle/>
                     <a:p>
                       <a:pPr algn="l">
-                        <a:defRPr sz="1400">
-                          <a:solidFill>
-                            <a:srgbClr val="1A1A1A"/>
-                          </a:solidFill>
-                        </a:defRPr>
-                      </a:pPr>
-                      <a:r>
+                        <a:defRPr sz="1400" b="0">
+                          <a:solidFill>
+                            <a:srgbClr val="1A1A1A"/>
+                          </a:solidFill>
+                        </a:defRPr>
+                      </a:pPr>
+                      <a:r>
+                        <a:rPr sz="1400" b="0">
+                          <a:solidFill>
+                            <a:srgbClr val="1A1A1A"/>
+                          </a:solidFill>
+                        </a:rPr>
                         <a:t>BRSET → BRSET (in-domain)</a:t>
                       </a:r>
                     </a:p>
@@ -7595,13 +9122,18 @@
                     <a:lstStyle/>
                     <a:p>
                       <a:pPr algn="ctr">
-                        <a:defRPr sz="1400">
-                          <a:solidFill>
-                            <a:srgbClr val="1A1A1A"/>
-                          </a:solidFill>
-                        </a:defRPr>
-                      </a:pPr>
-                      <a:r>
+                        <a:defRPr sz="1400" b="0">
+                          <a:solidFill>
+                            <a:srgbClr val="1A1A1A"/>
+                          </a:solidFill>
+                        </a:defRPr>
+                      </a:pPr>
+                      <a:r>
+                        <a:rPr sz="1400" b="0">
+                          <a:solidFill>
+                            <a:srgbClr val="1A1A1A"/>
+                          </a:solidFill>
+                        </a:rPr>
                         <a:t>0.988 / 0.994</a:t>
                       </a:r>
                     </a:p>
@@ -7618,13 +9150,18 @@
                     <a:lstStyle/>
                     <a:p>
                       <a:pPr algn="ctr">
-                        <a:defRPr sz="1400">
-                          <a:solidFill>
-                            <a:srgbClr val="1A1A1A"/>
-                          </a:solidFill>
-                        </a:defRPr>
-                      </a:pPr>
-                      <a:r>
+                        <a:defRPr sz="1400" b="0">
+                          <a:solidFill>
+                            <a:srgbClr val="1A1A1A"/>
+                          </a:solidFill>
+                        </a:defRPr>
+                      </a:pPr>
+                      <a:r>
+                        <a:rPr sz="1400" b="0">
+                          <a:solidFill>
+                            <a:srgbClr val="1A1A1A"/>
+                          </a:solidFill>
+                        </a:rPr>
                         <a:t>0.869 / 0.790</a:t>
                       </a:r>
                     </a:p>
@@ -7641,13 +9178,18 @@
                     <a:lstStyle/>
                     <a:p>
                       <a:pPr algn="ctr">
-                        <a:defRPr sz="1400">
-                          <a:solidFill>
-                            <a:srgbClr val="1A1A1A"/>
-                          </a:solidFill>
-                        </a:defRPr>
-                      </a:pPr>
-                      <a:r>
+                        <a:defRPr sz="1400" b="0">
+                          <a:solidFill>
+                            <a:srgbClr val="1A1A1A"/>
+                          </a:solidFill>
+                        </a:defRPr>
+                      </a:pPr>
+                      <a:r>
+                        <a:rPr sz="1400" b="0">
+                          <a:solidFill>
+                            <a:srgbClr val="1A1A1A"/>
+                          </a:solidFill>
+                        </a:rPr>
                         <a:t>0.877 / 0.770</a:t>
                       </a:r>
                     </a:p>
@@ -7666,13 +9208,18 @@
                     <a:lstStyle/>
                     <a:p>
                       <a:pPr algn="l">
-                        <a:defRPr sz="1400">
-                          <a:solidFill>
-                            <a:srgbClr val="1A1A1A"/>
-                          </a:solidFill>
-                        </a:defRPr>
-                      </a:pPr>
-                      <a:r>
+                        <a:defRPr sz="1400" b="0">
+                          <a:solidFill>
+                            <a:srgbClr val="1A1A1A"/>
+                          </a:solidFill>
+                        </a:defRPr>
+                      </a:pPr>
+                      <a:r>
+                        <a:rPr sz="1400" b="0">
+                          <a:solidFill>
+                            <a:srgbClr val="1A1A1A"/>
+                          </a:solidFill>
+                        </a:rPr>
                         <a:t>mBRSET → mBRSET (in-domain)</a:t>
                       </a:r>
                     </a:p>
@@ -7689,13 +9236,18 @@
                     <a:lstStyle/>
                     <a:p>
                       <a:pPr algn="ctr">
-                        <a:defRPr sz="1400">
-                          <a:solidFill>
-                            <a:srgbClr val="1A1A1A"/>
-                          </a:solidFill>
-                        </a:defRPr>
-                      </a:pPr>
-                      <a:r>
+                        <a:defRPr sz="1400" b="0">
+                          <a:solidFill>
+                            <a:srgbClr val="1A1A1A"/>
+                          </a:solidFill>
+                        </a:defRPr>
+                      </a:pPr>
+                      <a:r>
+                        <a:rPr sz="1400" b="0">
+                          <a:solidFill>
+                            <a:srgbClr val="1A1A1A"/>
+                          </a:solidFill>
+                        </a:rPr>
                         <a:t>0.939 / 0.988</a:t>
                       </a:r>
                     </a:p>
@@ -7712,13 +9264,18 @@
                     <a:lstStyle/>
                     <a:p>
                       <a:pPr algn="ctr">
-                        <a:defRPr sz="1400">
-                          <a:solidFill>
-                            <a:srgbClr val="1A1A1A"/>
-                          </a:solidFill>
-                        </a:defRPr>
-                      </a:pPr>
-                      <a:r>
+                        <a:defRPr sz="1400" b="0">
+                          <a:solidFill>
+                            <a:srgbClr val="1A1A1A"/>
+                          </a:solidFill>
+                        </a:defRPr>
+                      </a:pPr>
+                      <a:r>
+                        <a:rPr sz="1400" b="0">
+                          <a:solidFill>
+                            <a:srgbClr val="1A1A1A"/>
+                          </a:solidFill>
+                        </a:rPr>
                         <a:t>0.815 / 0.807</a:t>
                       </a:r>
                     </a:p>
@@ -7735,13 +9292,18 @@
                     <a:lstStyle/>
                     <a:p>
                       <a:pPr algn="ctr">
-                        <a:defRPr sz="1400">
-                          <a:solidFill>
-                            <a:srgbClr val="1A1A1A"/>
-                          </a:solidFill>
-                        </a:defRPr>
-                      </a:pPr>
-                      <a:r>
+                        <a:defRPr sz="1400" b="0">
+                          <a:solidFill>
+                            <a:srgbClr val="1A1A1A"/>
+                          </a:solidFill>
+                        </a:defRPr>
+                      </a:pPr>
+                      <a:r>
+                        <a:rPr sz="1400" b="0">
+                          <a:solidFill>
+                            <a:srgbClr val="1A1A1A"/>
+                          </a:solidFill>
+                        </a:rPr>
                         <a:t>0.774 / 0.730</a:t>
                       </a:r>
                     </a:p>
@@ -7760,13 +9322,18 @@
                     <a:lstStyle/>
                     <a:p>
                       <a:pPr algn="l">
-                        <a:defRPr sz="1400">
-                          <a:solidFill>
-                            <a:srgbClr val="1A1A1A"/>
-                          </a:solidFill>
-                        </a:defRPr>
-                      </a:pPr>
-                      <a:r>
+                        <a:defRPr sz="1400" b="0">
+                          <a:solidFill>
+                            <a:srgbClr val="1A1A1A"/>
+                          </a:solidFill>
+                        </a:defRPr>
+                      </a:pPr>
+                      <a:r>
+                        <a:rPr sz="1400" b="0">
+                          <a:solidFill>
+                            <a:srgbClr val="1A1A1A"/>
+                          </a:solidFill>
+                        </a:rPr>
                         <a:t>BRSET → mBRSET, BRSET threshold</a:t>
                       </a:r>
                     </a:p>
@@ -7783,13 +9350,18 @@
                     <a:lstStyle/>
                     <a:p>
                       <a:pPr algn="ctr">
-                        <a:defRPr sz="1400">
-                          <a:solidFill>
-                            <a:srgbClr val="1A1A1A"/>
-                          </a:solidFill>
-                        </a:defRPr>
-                      </a:pPr>
-                      <a:r>
+                        <a:defRPr sz="1400" b="0">
+                          <a:solidFill>
+                            <a:srgbClr val="1A1A1A"/>
+                          </a:solidFill>
+                        </a:defRPr>
+                      </a:pPr>
+                      <a:r>
+                        <a:rPr sz="1400" b="0">
+                          <a:solidFill>
+                            <a:srgbClr val="1A1A1A"/>
+                          </a:solidFill>
+                        </a:rPr>
                         <a:t>0.909 / 0.933</a:t>
                       </a:r>
                     </a:p>
@@ -7806,13 +9378,18 @@
                     <a:lstStyle/>
                     <a:p>
                       <a:pPr algn="ctr">
-                        <a:defRPr sz="1400">
-                          <a:solidFill>
-                            <a:srgbClr val="1A1A1A"/>
-                          </a:solidFill>
-                        </a:defRPr>
-                      </a:pPr>
-                      <a:r>
+                        <a:defRPr sz="1400" b="0">
+                          <a:solidFill>
+                            <a:srgbClr val="1A1A1A"/>
+                          </a:solidFill>
+                        </a:defRPr>
+                      </a:pPr>
+                      <a:r>
+                        <a:rPr sz="1400" b="0">
+                          <a:solidFill>
+                            <a:srgbClr val="1A1A1A"/>
+                          </a:solidFill>
+                        </a:rPr>
                         <a:t>0.661 / 0.566</a:t>
                       </a:r>
                     </a:p>
@@ -7829,13 +9406,18 @@
                     <a:lstStyle/>
                     <a:p>
                       <a:pPr algn="ctr">
-                        <a:defRPr sz="1400">
-                          <a:solidFill>
-                            <a:srgbClr val="1A1A1A"/>
-                          </a:solidFill>
-                        </a:defRPr>
-                      </a:pPr>
-                      <a:r>
+                        <a:defRPr sz="1400" b="0">
+                          <a:solidFill>
+                            <a:srgbClr val="1A1A1A"/>
+                          </a:solidFill>
+                        </a:defRPr>
+                      </a:pPr>
+                      <a:r>
+                        <a:rPr sz="1400" b="0">
+                          <a:solidFill>
+                            <a:srgbClr val="1A1A1A"/>
+                          </a:solidFill>
+                        </a:rPr>
                         <a:t>0.503 / 0.444</a:t>
                       </a:r>
                     </a:p>
@@ -7861,6 +9443,11 @@
                         </a:defRPr>
                       </a:pPr>
                       <a:r>
+                        <a:rPr sz="1400" b="1">
+                          <a:solidFill>
+                            <a:srgbClr val="1A1A1A"/>
+                          </a:solidFill>
+                        </a:rPr>
                         <a:t>BRSET → mBRSET, threshold retuned</a:t>
                       </a:r>
                     </a:p>
@@ -7884,6 +9471,11 @@
                         </a:defRPr>
                       </a:pPr>
                       <a:r>
+                        <a:rPr sz="1400" b="1">
+                          <a:solidFill>
+                            <a:srgbClr val="1A1A1A"/>
+                          </a:solidFill>
+                        </a:rPr>
                         <a:t>0.909 / 0.933</a:t>
                       </a:r>
                     </a:p>
@@ -7907,6 +9499,11 @@
                         </a:defRPr>
                       </a:pPr>
                       <a:r>
+                        <a:rPr sz="1400" b="1">
+                          <a:solidFill>
+                            <a:srgbClr val="1A1A1A"/>
+                          </a:solidFill>
+                        </a:rPr>
                         <a:t>0.717 / 0.628</a:t>
                       </a:r>
                     </a:p>
@@ -7930,6 +9527,11 @@
                         </a:defRPr>
                       </a:pPr>
                       <a:r>
+                        <a:rPr sz="1400" b="1">
+                          <a:solidFill>
+                            <a:srgbClr val="1A1A1A"/>
+                          </a:solidFill>
+                        </a:rPr>
                         <a:t>0.780 / 0.603</a:t>
                       </a:r>
                     </a:p>
@@ -8155,6 +9757,11 @@
                         </a:defRPr>
                       </a:pPr>
                       <a:r>
+                        <a:rPr sz="1500" b="1">
+                          <a:solidFill>
+                            <a:srgbClr val="FFFFFF"/>
+                          </a:solidFill>
+                        </a:rPr>
                         <a:t>How many patients have the disease</a:t>
                       </a:r>
                     </a:p>
@@ -8178,6 +9785,11 @@
                         </a:defRPr>
                       </a:pPr>
                       <a:r>
+                        <a:rPr sz="1500" b="1">
+                          <a:solidFill>
+                            <a:srgbClr val="FFFFFF"/>
+                          </a:solidFill>
+                        </a:rPr>
                         <a:t>Best cutoff for that group</a:t>
                       </a:r>
                     </a:p>
@@ -8196,13 +9808,18 @@
                     <a:lstStyle/>
                     <a:p>
                       <a:pPr algn="l">
-                        <a:defRPr sz="1500">
-                          <a:solidFill>
-                            <a:srgbClr val="1A1A1A"/>
-                          </a:solidFill>
-                        </a:defRPr>
-                      </a:pPr>
-                      <a:r>
+                        <a:defRPr sz="1500" b="0">
+                          <a:solidFill>
+                            <a:srgbClr val="1A1A1A"/>
+                          </a:solidFill>
+                        </a:defRPr>
+                      </a:pPr>
+                      <a:r>
+                        <a:rPr sz="1500" b="0">
+                          <a:solidFill>
+                            <a:srgbClr val="1A1A1A"/>
+                          </a:solidFill>
+                        </a:rPr>
                         <a:t>BRSET — where we trained</a:t>
                       </a:r>
                     </a:p>
@@ -8219,13 +9836,18 @@
                     <a:lstStyle/>
                     <a:p>
                       <a:pPr algn="ctr">
-                        <a:defRPr sz="1500">
-                          <a:solidFill>
-                            <a:srgbClr val="1A1A1A"/>
-                          </a:solidFill>
-                        </a:defRPr>
-                      </a:pPr>
-                      <a:r>
+                        <a:defRPr sz="1500" b="0">
+                          <a:solidFill>
+                            <a:srgbClr val="1A1A1A"/>
+                          </a:solidFill>
+                        </a:defRPr>
+                      </a:pPr>
+                      <a:r>
+                        <a:rPr sz="1500" b="0">
+                          <a:solidFill>
+                            <a:srgbClr val="1A1A1A"/>
+                          </a:solidFill>
+                        </a:rPr>
                         <a:t>6.6% of eyes  (1 in 15)</a:t>
                       </a:r>
                     </a:p>
@@ -8242,13 +9864,18 @@
                     <a:lstStyle/>
                     <a:p>
                       <a:pPr algn="ctr">
-                        <a:defRPr sz="1500">
-                          <a:solidFill>
-                            <a:srgbClr val="1A1A1A"/>
-                          </a:solidFill>
-                        </a:defRPr>
-                      </a:pPr>
-                      <a:r>
+                        <a:defRPr sz="1500" b="0">
+                          <a:solidFill>
+                            <a:srgbClr val="1A1A1A"/>
+                          </a:solidFill>
+                        </a:defRPr>
+                      </a:pPr>
+                      <a:r>
+                        <a:rPr sz="1500" b="0">
+                          <a:solidFill>
+                            <a:srgbClr val="1A1A1A"/>
+                          </a:solidFill>
+                        </a:rPr>
                         <a:t>0.61   be strict</a:t>
                       </a:r>
                     </a:p>
@@ -8267,13 +9894,18 @@
                     <a:lstStyle/>
                     <a:p>
                       <a:pPr algn="l">
-                        <a:defRPr sz="1500">
-                          <a:solidFill>
-                            <a:srgbClr val="1A1A1A"/>
-                          </a:solidFill>
-                        </a:defRPr>
-                      </a:pPr>
-                      <a:r>
+                        <a:defRPr sz="1500" b="0">
+                          <a:solidFill>
+                            <a:srgbClr val="1A1A1A"/>
+                          </a:solidFill>
+                        </a:defRPr>
+                      </a:pPr>
+                      <a:r>
+                        <a:rPr sz="1500" b="0">
+                          <a:solidFill>
+                            <a:srgbClr val="1A1A1A"/>
+                          </a:solidFill>
+                        </a:rPr>
                         <a:t>mBRSET — where we tested</a:t>
                       </a:r>
                     </a:p>
@@ -8290,13 +9922,18 @@
                     <a:lstStyle/>
                     <a:p>
                       <a:pPr algn="ctr">
-                        <a:defRPr sz="1500">
-                          <a:solidFill>
-                            <a:srgbClr val="1A1A1A"/>
-                          </a:solidFill>
-                        </a:defRPr>
-                      </a:pPr>
-                      <a:r>
+                        <a:defRPr sz="1500" b="0">
+                          <a:solidFill>
+                            <a:srgbClr val="1A1A1A"/>
+                          </a:solidFill>
+                        </a:defRPr>
+                      </a:pPr>
+                      <a:r>
+                        <a:rPr sz="1500" b="0">
+                          <a:solidFill>
+                            <a:srgbClr val="1A1A1A"/>
+                          </a:solidFill>
+                        </a:rPr>
                         <a:t>23.3% of eyes  (1 in 4)</a:t>
                       </a:r>
                     </a:p>
@@ -8313,13 +9950,18 @@
                     <a:lstStyle/>
                     <a:p>
                       <a:pPr algn="ctr">
-                        <a:defRPr sz="1500">
-                          <a:solidFill>
-                            <a:srgbClr val="1A1A1A"/>
-                          </a:solidFill>
-                        </a:defRPr>
-                      </a:pPr>
-                      <a:r>
+                        <a:defRPr sz="1500" b="0">
+                          <a:solidFill>
+                            <a:srgbClr val="1A1A1A"/>
+                          </a:solidFill>
+                        </a:defRPr>
+                      </a:pPr>
+                      <a:r>
+                        <a:rPr sz="1500" b="0">
+                          <a:solidFill>
+                            <a:srgbClr val="1A1A1A"/>
+                          </a:solidFill>
+                        </a:rPr>
                         <a:t>0.19   be lenient</a:t>
                       </a:r>
                     </a:p>
@@ -8542,6 +10184,11 @@
                         </a:defRPr>
                       </a:pPr>
                       <a:r>
+                        <a:rPr sz="1500" b="1">
+                          <a:solidFill>
+                            <a:srgbClr val="FFFFFF"/>
+                          </a:solidFill>
+                        </a:rPr>
                         <a:t>BRSET → mBRSET</a:t>
                       </a:r>
                     </a:p>
@@ -8565,6 +10212,11 @@
                         </a:defRPr>
                       </a:pPr>
                       <a:r>
+                        <a:rPr sz="1500" b="1">
+                          <a:solidFill>
+                            <a:srgbClr val="FFFFFF"/>
+                          </a:solidFill>
+                        </a:rPr>
                         <a:t>AUC</a:t>
                       </a:r>
                     </a:p>
@@ -8588,6 +10240,11 @@
                         </a:defRPr>
                       </a:pPr>
                       <a:r>
+                        <a:rPr sz="1500" b="1">
+                          <a:solidFill>
+                            <a:srgbClr val="FFFFFF"/>
+                          </a:solidFill>
+                        </a:rPr>
                         <a:t>Target prevalence</a:t>
                       </a:r>
                     </a:p>
@@ -8611,6 +10268,11 @@
                         </a:defRPr>
                       </a:pPr>
                       <a:r>
+                        <a:rPr sz="1500" b="1">
+                          <a:solidFill>
+                            <a:srgbClr val="FFFFFF"/>
+                          </a:solidFill>
+                        </a:rPr>
                         <a:t>Max possible F1</a:t>
                       </a:r>
                     </a:p>
@@ -8634,6 +10296,11 @@
                         </a:defRPr>
                       </a:pPr>
                       <a:r>
+                        <a:rPr sz="1500" b="1">
+                          <a:solidFill>
+                            <a:srgbClr val="FFFFFF"/>
+                          </a:solidFill>
+                        </a:rPr>
                         <a:t>Our F1</a:t>
                       </a:r>
                     </a:p>
@@ -8659,6 +10326,11 @@
                         </a:defRPr>
                       </a:pPr>
                       <a:r>
+                        <a:rPr sz="1500" b="1">
+                          <a:solidFill>
+                            <a:srgbClr val="1A1A1A"/>
+                          </a:solidFill>
+                        </a:rPr>
                         <a:t>Diabetic retinopathy</a:t>
                       </a:r>
                     </a:p>
@@ -8682,6 +10354,11 @@
                         </a:defRPr>
                       </a:pPr>
                       <a:r>
+                        <a:rPr sz="1500" b="1">
+                          <a:solidFill>
+                            <a:srgbClr val="1A1A1A"/>
+                          </a:solidFill>
+                        </a:rPr>
                         <a:t>0.909</a:t>
                       </a:r>
                     </a:p>
@@ -8705,6 +10382,11 @@
                         </a:defRPr>
                       </a:pPr>
                       <a:r>
+                        <a:rPr sz="1500" b="1">
+                          <a:solidFill>
+                            <a:srgbClr val="1A1A1A"/>
+                          </a:solidFill>
+                        </a:rPr>
                         <a:t>21.7%</a:t>
                       </a:r>
                     </a:p>
@@ -8728,6 +10410,11 @@
                         </a:defRPr>
                       </a:pPr>
                       <a:r>
+                        <a:rPr sz="1500" b="1">
+                          <a:solidFill>
+                            <a:srgbClr val="1A1A1A"/>
+                          </a:solidFill>
+                        </a:rPr>
                         <a:t>0.697</a:t>
                       </a:r>
                     </a:p>
@@ -8751,6 +10438,11 @@
                         </a:defRPr>
                       </a:pPr>
                       <a:r>
+                        <a:rPr sz="1500" b="1">
+                          <a:solidFill>
+                            <a:srgbClr val="1A1A1A"/>
+                          </a:solidFill>
+                        </a:rPr>
                         <a:t>0.717</a:t>
                       </a:r>
                     </a:p>
@@ -8776,6 +10468,11 @@
                         </a:defRPr>
                       </a:pPr>
                       <a:r>
+                        <a:rPr sz="1500" b="1">
+                          <a:solidFill>
+                            <a:srgbClr val="1A1A1A"/>
+                          </a:solidFill>
+                        </a:rPr>
                         <a:t>Macular edema</a:t>
                       </a:r>
                     </a:p>
@@ -8799,6 +10496,11 @@
                         </a:defRPr>
                       </a:pPr>
                       <a:r>
+                        <a:rPr sz="1500" b="1">
+                          <a:solidFill>
+                            <a:srgbClr val="1A1A1A"/>
+                          </a:solidFill>
+                        </a:rPr>
                         <a:t>0.933</a:t>
                       </a:r>
                     </a:p>
@@ -8822,6 +10524,11 @@
                         </a:defRPr>
                       </a:pPr>
                       <a:r>
+                        <a:rPr sz="1500" b="1">
+                          <a:solidFill>
+                            <a:srgbClr val="1A1A1A"/>
+                          </a:solidFill>
+                        </a:rPr>
                         <a:t>8.6%</a:t>
                       </a:r>
                     </a:p>
@@ -8845,6 +10552,11 @@
                         </a:defRPr>
                       </a:pPr>
                       <a:r>
+                        <a:rPr sz="1500" b="1">
+                          <a:solidFill>
+                            <a:srgbClr val="1A1A1A"/>
+                          </a:solidFill>
+                        </a:rPr>
                         <a:t>0.623</a:t>
                       </a:r>
                     </a:p>
@@ -8868,6 +10580,11 @@
                         </a:defRPr>
                       </a:pPr>
                       <a:r>
+                        <a:rPr sz="1500" b="1">
+                          <a:solidFill>
+                            <a:srgbClr val="1A1A1A"/>
+                          </a:solidFill>
+                        </a:rPr>
                         <a:t>0.628</a:t>
                       </a:r>
                     </a:p>

--- a/presentation/BRSET_ConvNeXtV2_Progress.pptx
+++ b/presentation/BRSET_ConvNeXtV2_Progress.pptx
@@ -17,7 +17,6 @@
     <p:sldId id="265" r:id="rId16"/>
     <p:sldId id="266" r:id="rId17"/>
     <p:sldId id="267" r:id="rId18"/>
-    <p:sldId id="268" r:id="rId19"/>
   </p:sldIdLst>
   <p:sldSz cx="12191695" cy="6858000" type="screen4x3"/>
   <p:notesSz cx="6858000" cy="9144000"/>
@@ -4798,7 +4797,19 @@
               </a:defRPr>
             </a:pPr>
             <a:r>
-              <a:t>Proposed contributions</a:t>
+              <a:t>What would be new here</a:t>
+            </a:r>
+          </a:p>
+          <a:p>
+            <a:pPr>
+              <a:defRPr sz="1500">
+                <a:solidFill>
+                  <a:srgbClr val="5A5A5A"/>
+                </a:solidFill>
+              </a:defRPr>
+            </a:pPr>
+            <a:r>
+              <a:t>Three things nobody has done. The first is the strongest, and it holds whatever the methods turn out to do.</a:t>
             </a:r>
           </a:p>
         </p:txBody>
@@ -4812,8 +4823,8 @@
           <p:nvPr/>
         </p:nvGraphicFramePr>
         <p:xfrm>
-          <a:off x="685800" y="1783080"/>
-          <a:ext cx="10789918" cy="3566160"/>
+          <a:off x="685800" y="1737360"/>
+          <a:ext cx="10789919" cy="3840480"/>
         </p:xfrm>
         <a:graphic>
           <a:graphicData uri="http://schemas.openxmlformats.org/drawingml/2006/table">
@@ -4822,18 +4833,19 @@
                 <a:tableStyleId>{5C22544A-7EE6-4342-B048-85BDC9FD1C3A}</a:tableStyleId>
               </a:tblPr>
               <a:tblGrid>
-                <a:gridCol w="465082"/>
-                <a:gridCol w="4092728"/>
-                <a:gridCol w="6232108"/>
+                <a:gridCol w="337185"/>
+                <a:gridCol w="3757204"/>
+                <a:gridCol w="5394960"/>
+                <a:gridCol w="1300570"/>
               </a:tblGrid>
-              <a:tr h="891540">
+              <a:tr h="960120">
                 <a:tc>
                   <a:txBody>
                     <a:bodyPr/>
                     <a:lstStyle/>
                     <a:p>
                       <a:pPr algn="l">
-                        <a:defRPr sz="1200" b="1">
+                        <a:defRPr sz="1150" b="1">
                           <a:solidFill>
                             <a:srgbClr val="FFFFFF"/>
                           </a:solidFill>
@@ -4853,19 +4865,19 @@
                     <a:lstStyle/>
                     <a:p>
                       <a:pPr algn="ctr">
-                        <a:defRPr sz="1200" b="1">
+                        <a:defRPr sz="1150" b="1">
                           <a:solidFill>
                             <a:srgbClr val="FFFFFF"/>
                           </a:solidFill>
                         </a:defRPr>
                       </a:pPr>
                       <a:r>
-                        <a:rPr sz="1200" b="1">
+                        <a:rPr sz="1150" b="1">
                           <a:solidFill>
                             <a:srgbClr val="FFFFFF"/>
                           </a:solidFill>
                         </a:rPr>
-                        <a:t>Contribution</a:t>
+                        <a:t>What we would contribute</a:t>
                       </a:r>
                     </a:p>
                   </a:txBody>
@@ -4881,19 +4893,19 @@
                     <a:lstStyle/>
                     <a:p>
                       <a:pPr algn="ctr">
-                        <a:defRPr sz="1200" b="1">
+                        <a:defRPr sz="1150" b="1">
                           <a:solidFill>
                             <a:srgbClr val="FFFFFF"/>
                           </a:solidFill>
                         </a:defRPr>
                       </a:pPr>
                       <a:r>
-                        <a:rPr sz="1200" b="1">
+                        <a:rPr sz="1150" b="1">
                           <a:solidFill>
                             <a:srgbClr val="FFFFFF"/>
                           </a:solidFill>
                         </a:rPr>
-                        <a:t>Why it is new</a:t>
+                        <a:t>Why nobody has done it</a:t>
                       </a:r>
                     </a:p>
                   </a:txBody>
@@ -4903,22 +4915,50 @@
                     </a:solidFill>
                   </a:tcPr>
                 </a:tc>
+                <a:tc>
+                  <a:txBody>
+                    <a:bodyPr/>
+                    <a:lstStyle/>
+                    <a:p>
+                      <a:pPr algn="ctr">
+                        <a:defRPr sz="1150" b="1">
+                          <a:solidFill>
+                            <a:srgbClr val="FFFFFF"/>
+                          </a:solidFill>
+                        </a:defRPr>
+                      </a:pPr>
+                      <a:r>
+                        <a:rPr sz="1150" b="1">
+                          <a:solidFill>
+                            <a:srgbClr val="FFFFFF"/>
+                          </a:solidFill>
+                        </a:rPr>
+                        <a:t>Status</a:t>
+                      </a:r>
+                    </a:p>
+                  </a:txBody>
+                  <a:tcPr marL="73152" marR="73152" marT="27432" marB="27432">
+                    <a:solidFill>
+                      <a:srgbClr val="1F4E79"/>
+                    </a:solidFill>
+                  </a:tcPr>
+                </a:tc>
               </a:tr>
-              <a:tr h="891540">
+              <a:tr h="960120">
                 <a:tc>
                   <a:txBody>
                     <a:bodyPr/>
                     <a:lstStyle/>
                     <a:p>
                       <a:pPr algn="l">
-                        <a:defRPr sz="1200" b="0">
-                          <a:solidFill>
-                            <a:srgbClr val="1A1A1A"/>
-                          </a:solidFill>
-                        </a:defRPr>
-                      </a:pPr>
-                      <a:r>
-                        <a:rPr sz="1200" b="0">
+                        <a:defRPr sz="1150" b="0">
+                          <a:solidFill>
+                            <a:srgbClr val="1A1A1A"/>
+                          </a:solidFill>
+                        </a:defRPr>
+                      </a:pPr>
+                      <a:r>
+                        <a:rPr sz="1150" b="0">
                           <a:solidFill>
                             <a:srgbClr val="1A1A1A"/>
                           </a:solidFill>
@@ -4939,36 +4979,87 @@
                     <a:lstStyle/>
                     <a:p>
                       <a:pPr algn="ctr">
-                        <a:defRPr sz="1200" b="0">
-                          <a:solidFill>
-                            <a:srgbClr val="1A1A1A"/>
-                          </a:solidFill>
-                        </a:defRPr>
-                      </a:pPr>
-                      <a:r>
-                        <a:rPr sz="1200" b="0">
-                          <a:solidFill>
-                            <a:srgbClr val="1A1A1A"/>
-                          </a:solidFill>
-                        </a:rPr>
-                        <a:t>Decomposing a cross-device gap into</a:t>
-                      </a:r>
-                    </a:p>
-                    <a:p>
-                      <a:pPr algn="ctr">
-                        <a:defRPr sz="1200" b="0">
-                          <a:solidFill>
-                            <a:srgbClr val="1A1A1A"/>
-                          </a:solidFill>
-                        </a:defRPr>
-                      </a:pPr>
-                      <a:r>
-                        <a:rPr sz="1200" b="0">
-                          <a:solidFill>
-                            <a:srgbClr val="1A1A1A"/>
-                          </a:solidFill>
-                        </a:rPr>
-                        <a:t>prevalence, calibration and ranking components</a:t>
+                        <a:defRPr sz="1150" b="0">
+                          <a:solidFill>
+                            <a:srgbClr val="1A1A1A"/>
+                          </a:solidFill>
+                        </a:defRPr>
+                      </a:pPr>
+                      <a:r>
+                        <a:rPr sz="1150" b="0">
+                          <a:solidFill>
+                            <a:srgbClr val="1A1A1A"/>
+                          </a:solidFill>
+                        </a:rPr>
+                        <a:t>Show what a cross-device drop is</a:t>
+                      </a:r>
+                    </a:p>
+                    <a:p>
+                      <a:pPr algn="ctr">
+                        <a:defRPr sz="1150" b="0">
+                          <a:solidFill>
+                            <a:srgbClr val="1A1A1A"/>
+                          </a:solidFill>
+                        </a:defRPr>
+                      </a:pPr>
+                      <a:r>
+                        <a:rPr sz="1150" b="0">
+                          <a:solidFill>
+                            <a:srgbClr val="1A1A1A"/>
+                          </a:solidFill>
+                        </a:rPr>
+                        <a:t>actually made of: how much comes</a:t>
+                      </a:r>
+                    </a:p>
+                    <a:p>
+                      <a:pPr algn="ctr">
+                        <a:defRPr sz="1150" b="0">
+                          <a:solidFill>
+                            <a:srgbClr val="1A1A1A"/>
+                          </a:solidFill>
+                        </a:defRPr>
+                      </a:pPr>
+                      <a:r>
+                        <a:rPr sz="1150" b="0">
+                          <a:solidFill>
+                            <a:srgbClr val="1A1A1A"/>
+                          </a:solidFill>
+                        </a:rPr>
+                        <a:t>from the sicker population, how much</a:t>
+                      </a:r>
+                    </a:p>
+                    <a:p>
+                      <a:pPr algn="ctr">
+                        <a:defRPr sz="1150" b="0">
+                          <a:solidFill>
+                            <a:srgbClr val="1A1A1A"/>
+                          </a:solidFill>
+                        </a:defRPr>
+                      </a:pPr>
+                      <a:r>
+                        <a:rPr sz="1150" b="0">
+                          <a:solidFill>
+                            <a:srgbClr val="1A1A1A"/>
+                          </a:solidFill>
+                        </a:rPr>
+                        <a:t>from a badly-set cutoff, and how much</a:t>
+                      </a:r>
+                    </a:p>
+                    <a:p>
+                      <a:pPr algn="ctr">
+                        <a:defRPr sz="1150" b="0">
+                          <a:solidFill>
+                            <a:srgbClr val="1A1A1A"/>
+                          </a:solidFill>
+                        </a:defRPr>
+                      </a:pPr>
+                      <a:r>
+                        <a:rPr sz="1150" b="0">
+                          <a:solidFill>
+                            <a:srgbClr val="1A1A1A"/>
+                          </a:solidFill>
+                        </a:rPr>
+                        <a:t>from the model genuinely doing worse</a:t>
                       </a:r>
                     </a:p>
                   </a:txBody>
@@ -4984,53 +5075,70 @@
                     <a:lstStyle/>
                     <a:p>
                       <a:pPr algn="ctr">
-                        <a:defRPr sz="1200" b="0">
-                          <a:solidFill>
-                            <a:srgbClr val="1A1A1A"/>
-                          </a:solidFill>
-                        </a:defRPr>
-                      </a:pPr>
-                      <a:r>
-                        <a:rPr sz="1200" b="0">
-                          <a:solidFill>
-                            <a:srgbClr val="1A1A1A"/>
-                          </a:solidFill>
-                        </a:rPr>
-                        <a:t>Cross-domain F1 collapses are routinely blamed on the model.</a:t>
-                      </a:r>
-                    </a:p>
-                    <a:p>
-                      <a:pPr algn="ctr">
-                        <a:defRPr sz="1200" b="0">
-                          <a:solidFill>
-                            <a:srgbClr val="1A1A1A"/>
-                          </a:solidFill>
-                        </a:defRPr>
-                      </a:pPr>
-                      <a:r>
-                        <a:rPr sz="1200" b="0">
-                          <a:solidFill>
-                            <a:srgbClr val="1A1A1A"/>
-                          </a:solidFill>
-                        </a:rPr>
-                        <a:t>We show the split is computable in closed form — and that in our</a:t>
-                      </a:r>
-                    </a:p>
-                    <a:p>
-                      <a:pPr algn="ctr">
-                        <a:defRPr sz="1200" b="0">
-                          <a:solidFill>
-                            <a:srgbClr val="1A1A1A"/>
-                          </a:solidFill>
-                        </a:defRPr>
-                      </a:pPr>
-                      <a:r>
-                        <a:rPr sz="1200" b="0">
-                          <a:solidFill>
-                            <a:srgbClr val="1A1A1A"/>
-                          </a:solidFill>
-                        </a:rPr>
-                        <a:t>case the ranking component is all that remains.</a:t>
+                        <a:defRPr sz="1150" b="0">
+                          <a:solidFill>
+                            <a:srgbClr val="1A1A1A"/>
+                          </a:solidFill>
+                        </a:defRPr>
+                      </a:pPr>
+                      <a:r>
+                        <a:rPr sz="1150" b="0">
+                          <a:solidFill>
+                            <a:srgbClr val="1A1A1A"/>
+                          </a:solidFill>
+                        </a:rPr>
+                        <a:t>Papers report one number for the drop and</a:t>
+                      </a:r>
+                    </a:p>
+                    <a:p>
+                      <a:pPr algn="ctr">
+                        <a:defRPr sz="1150" b="0">
+                          <a:solidFill>
+                            <a:srgbClr val="1A1A1A"/>
+                          </a:solidFill>
+                        </a:defRPr>
+                      </a:pPr>
+                      <a:r>
+                        <a:rPr sz="1150" b="0">
+                          <a:solidFill>
+                            <a:srgbClr val="1A1A1A"/>
+                          </a:solidFill>
+                        </a:rPr>
+                        <a:t>blame the model. We show the three causes</a:t>
+                      </a:r>
+                    </a:p>
+                    <a:p>
+                      <a:pPr algn="ctr">
+                        <a:defRPr sz="1150" b="0">
+                          <a:solidFill>
+                            <a:srgbClr val="1A1A1A"/>
+                          </a:solidFill>
+                        </a:defRPr>
+                      </a:pPr>
+                      <a:r>
+                        <a:rPr sz="1150" b="0">
+                          <a:solidFill>
+                            <a:srgbClr val="1A1A1A"/>
+                          </a:solidFill>
+                        </a:rPr>
+                        <a:t>can be separated with arithmetic — and that</a:t>
+                      </a:r>
+                    </a:p>
+                    <a:p>
+                      <a:pPr algn="ctr">
+                        <a:defRPr sz="1150" b="0">
+                          <a:solidFill>
+                            <a:srgbClr val="1A1A1A"/>
+                          </a:solidFill>
+                        </a:defRPr>
+                      </a:pPr>
+                      <a:r>
+                        <a:rPr sz="1150" b="0">
+                          <a:solidFill>
+                            <a:srgbClr val="1A1A1A"/>
+                          </a:solidFill>
+                        </a:rPr>
+                        <a:t>in our case only the last one is left.</a:t>
                       </a:r>
                     </a:p>
                   </a:txBody>
@@ -5040,22 +5148,50 @@
                     </a:solidFill>
                   </a:tcPr>
                 </a:tc>
+                <a:tc>
+                  <a:txBody>
+                    <a:bodyPr/>
+                    <a:lstStyle/>
+                    <a:p>
+                      <a:pPr algn="ctr">
+                        <a:defRPr sz="1150" b="0">
+                          <a:solidFill>
+                            <a:srgbClr val="1A1A1A"/>
+                          </a:solidFill>
+                        </a:defRPr>
+                      </a:pPr>
+                      <a:r>
+                        <a:rPr sz="1150" b="0">
+                          <a:solidFill>
+                            <a:srgbClr val="1A1A1A"/>
+                          </a:solidFill>
+                        </a:rPr>
+                        <a:t>Core</a:t>
+                      </a:r>
+                    </a:p>
+                  </a:txBody>
+                  <a:tcPr marL="73152" marR="73152" marT="27432" marB="27432">
+                    <a:solidFill>
+                      <a:srgbClr val="FFFFFF"/>
+                    </a:solidFill>
+                  </a:tcPr>
+                </a:tc>
               </a:tr>
-              <a:tr h="891540">
+              <a:tr h="960120">
                 <a:tc>
                   <a:txBody>
                     <a:bodyPr/>
                     <a:lstStyle/>
                     <a:p>
                       <a:pPr algn="l">
-                        <a:defRPr sz="1200" b="0">
-                          <a:solidFill>
-                            <a:srgbClr val="1A1A1A"/>
-                          </a:solidFill>
-                        </a:defRPr>
-                      </a:pPr>
-                      <a:r>
-                        <a:rPr sz="1200" b="0">
+                        <a:defRPr sz="1150" b="0">
+                          <a:solidFill>
+                            <a:srgbClr val="1A1A1A"/>
+                          </a:solidFill>
+                        </a:defRPr>
+                      </a:pPr>
+                      <a:r>
+                        <a:rPr sz="1150" b="0">
                           <a:solidFill>
                             <a:srgbClr val="1A1A1A"/>
                           </a:solidFill>
@@ -5076,36 +5212,53 @@
                     <a:lstStyle/>
                     <a:p>
                       <a:pPr algn="ctr">
-                        <a:defRPr sz="1200" b="0">
-                          <a:solidFill>
-                            <a:srgbClr val="1A1A1A"/>
-                          </a:solidFill>
-                        </a:defRPr>
-                      </a:pPr>
-                      <a:r>
-                        <a:rPr sz="1200" b="0">
-                          <a:solidFill>
-                            <a:srgbClr val="1A1A1A"/>
-                          </a:solidFill>
-                        </a:rPr>
-                        <a:t>Multi-view test-time aggregation for</a:t>
-                      </a:r>
-                    </a:p>
-                    <a:p>
-                      <a:pPr algn="ctr">
-                        <a:defRPr sz="1200" b="0">
-                          <a:solidFill>
-                            <a:srgbClr val="1A1A1A"/>
-                          </a:solidFill>
-                        </a:defRPr>
-                      </a:pPr>
-                      <a:r>
-                        <a:rPr sz="1200" b="0">
-                          <a:solidFill>
-                            <a:srgbClr val="1A1A1A"/>
-                          </a:solidFill>
-                        </a:rPr>
-                        <a:t>cross-device retinal screening</a:t>
+                        <a:defRPr sz="1150" b="0">
+                          <a:solidFill>
+                            <a:srgbClr val="1A1A1A"/>
+                          </a:solidFill>
+                        </a:defRPr>
+                      </a:pPr>
+                      <a:r>
+                        <a:rPr sz="1150" b="0">
+                          <a:solidFill>
+                            <a:srgbClr val="1A1A1A"/>
+                          </a:solidFill>
+                        </a:rPr>
+                        <a:t>Judge a patient using all four of their</a:t>
+                      </a:r>
+                    </a:p>
+                    <a:p>
+                      <a:pPr algn="ctr">
+                        <a:defRPr sz="1150" b="0">
+                          <a:solidFill>
+                            <a:srgbClr val="1A1A1A"/>
+                          </a:solidFill>
+                        </a:defRPr>
+                      </a:pPr>
+                      <a:r>
+                        <a:rPr sz="1150" b="0">
+                          <a:solidFill>
+                            <a:srgbClr val="1A1A1A"/>
+                          </a:solidFill>
+                        </a:rPr>
+                        <a:t>images together, instead of one</a:t>
+                      </a:r>
+                    </a:p>
+                    <a:p>
+                      <a:pPr algn="ctr">
+                        <a:defRPr sz="1150" b="0">
+                          <a:solidFill>
+                            <a:srgbClr val="1A1A1A"/>
+                          </a:solidFill>
+                        </a:defRPr>
+                      </a:pPr>
+                      <a:r>
+                        <a:rPr sz="1150" b="0">
+                          <a:solidFill>
+                            <a:srgbClr val="1A1A1A"/>
+                          </a:solidFill>
+                        </a:rPr>
+                        <a:t>image at a time</a:t>
                       </a:r>
                     </a:p>
                   </a:txBody>
@@ -5121,36 +5274,36 @@
                     <a:lstStyle/>
                     <a:p>
                       <a:pPr algn="ctr">
-                        <a:defRPr sz="1200" b="0">
-                          <a:solidFill>
-                            <a:srgbClr val="1A1A1A"/>
-                          </a:solidFill>
-                        </a:defRPr>
-                      </a:pPr>
-                      <a:r>
-                        <a:rPr sz="1200" b="0">
-                          <a:solidFill>
-                            <a:srgbClr val="1A1A1A"/>
-                          </a:solidFill>
-                        </a:rPr>
-                        <a:t>Exploits mBRSET's ~4 images per patient, a free signal no</a:t>
-                      </a:r>
-                    </a:p>
-                    <a:p>
-                      <a:pPr algn="ctr">
-                        <a:defRPr sz="1200" b="0">
-                          <a:solidFill>
-                            <a:srgbClr val="1A1A1A"/>
-                          </a:solidFill>
-                        </a:defRPr>
-                      </a:pPr>
-                      <a:r>
-                        <a:rPr sz="1200" b="0">
-                          <a:solidFill>
-                            <a:srgbClr val="1A1A1A"/>
-                          </a:solidFill>
-                        </a:rPr>
-                        <a:t>cross-device study has used.</a:t>
+                        <a:defRPr sz="1150" b="0">
+                          <a:solidFill>
+                            <a:srgbClr val="1A1A1A"/>
+                          </a:solidFill>
+                        </a:defRPr>
+                      </a:pPr>
+                      <a:r>
+                        <a:rPr sz="1150" b="0">
+                          <a:solidFill>
+                            <a:srgbClr val="1A1A1A"/>
+                          </a:solidFill>
+                        </a:rPr>
+                        <a:t>A free signal sitting unused in the data.</a:t>
+                      </a:r>
+                    </a:p>
+                    <a:p>
+                      <a:pPr algn="ctr">
+                        <a:defRPr sz="1150" b="0">
+                          <a:solidFill>
+                            <a:srgbClr val="1A1A1A"/>
+                          </a:solidFill>
+                        </a:defRPr>
+                      </a:pPr>
+                      <a:r>
+                        <a:rPr sz="1150" b="0">
+                          <a:solidFill>
+                            <a:srgbClr val="1A1A1A"/>
+                          </a:solidFill>
+                        </a:rPr>
+                        <a:t>No cross-device retinal study has used it.</a:t>
                       </a:r>
                     </a:p>
                   </a:txBody>
@@ -5160,22 +5313,50 @@
                     </a:solidFill>
                   </a:tcPr>
                 </a:tc>
+                <a:tc>
+                  <a:txBody>
+                    <a:bodyPr/>
+                    <a:lstStyle/>
+                    <a:p>
+                      <a:pPr algn="ctr">
+                        <a:defRPr sz="1150" b="0">
+                          <a:solidFill>
+                            <a:srgbClr val="1A1A1A"/>
+                          </a:solidFill>
+                        </a:defRPr>
+                      </a:pPr>
+                      <a:r>
+                        <a:rPr sz="1150" b="0">
+                          <a:solidFill>
+                            <a:srgbClr val="1A1A1A"/>
+                          </a:solidFill>
+                        </a:rPr>
+                        <a:t>Core</a:t>
+                      </a:r>
+                    </a:p>
+                  </a:txBody>
+                  <a:tcPr marL="73152" marR="73152" marT="27432" marB="27432">
+                    <a:solidFill>
+                      <a:srgbClr val="F2F4F7"/>
+                    </a:solidFill>
+                  </a:tcPr>
+                </a:tc>
               </a:tr>
-              <a:tr h="891540">
+              <a:tr h="960120">
                 <a:tc>
                   <a:txBody>
                     <a:bodyPr/>
                     <a:lstStyle/>
                     <a:p>
                       <a:pPr algn="l">
-                        <a:defRPr sz="1200" b="0">
-                          <a:solidFill>
-                            <a:srgbClr val="1A1A1A"/>
-                          </a:solidFill>
-                        </a:defRPr>
-                      </a:pPr>
-                      <a:r>
-                        <a:rPr sz="1200" b="0">
+                        <a:defRPr sz="1150" b="0">
+                          <a:solidFill>
+                            <a:srgbClr val="1A1A1A"/>
+                          </a:solidFill>
+                        </a:defRPr>
+                      </a:pPr>
+                      <a:r>
+                        <a:rPr sz="1150" b="0">
                           <a:solidFill>
                             <a:srgbClr val="1A1A1A"/>
                           </a:solidFill>
@@ -5196,36 +5377,36 @@
                     <a:lstStyle/>
                     <a:p>
                       <a:pPr algn="ctr">
-                        <a:defRPr sz="1200" b="0">
-                          <a:solidFill>
-                            <a:srgbClr val="1A1A1A"/>
-                          </a:solidFill>
-                        </a:defRPr>
-                      </a:pPr>
-                      <a:r>
-                        <a:rPr sz="1200" b="0">
-                          <a:solidFill>
-                            <a:srgbClr val="1A1A1A"/>
-                          </a:solidFill>
-                        </a:rPr>
-                        <a:t>Adapting the internal normalisation layer</a:t>
-                      </a:r>
-                    </a:p>
-                    <a:p>
-                      <a:pPr algn="ctr">
-                        <a:defRPr sz="1200" b="0">
-                          <a:solidFill>
-                            <a:srgbClr val="1A1A1A"/>
-                          </a:solidFill>
-                        </a:defRPr>
-                      </a:pPr>
-                      <a:r>
-                        <a:rPr sz="1200" b="0">
-                          <a:solidFill>
-                            <a:srgbClr val="1A1A1A"/>
-                          </a:solidFill>
-                        </a:rPr>
-                        <a:t>that is unique to ConvNeXt V2</a:t>
+                        <a:defRPr sz="1150" b="0">
+                          <a:solidFill>
+                            <a:srgbClr val="1A1A1A"/>
+                          </a:solidFill>
+                        </a:defRPr>
+                      </a:pPr>
+                      <a:r>
+                        <a:rPr sz="1150" b="0">
+                          <a:solidFill>
+                            <a:srgbClr val="1A1A1A"/>
+                          </a:solidFill>
+                        </a:rPr>
+                        <a:t>Adapt the part of ConvNeXt V2 that the</a:t>
+                      </a:r>
+                    </a:p>
+                    <a:p>
+                      <a:pPr algn="ctr">
+                        <a:defRPr sz="1150" b="0">
+                          <a:solidFill>
+                            <a:srgbClr val="1A1A1A"/>
+                          </a:solidFill>
+                        </a:defRPr>
+                      </a:pPr>
+                      <a:r>
+                        <a:rPr sz="1150" b="0">
+                          <a:solidFill>
+                            <a:srgbClr val="1A1A1A"/>
+                          </a:solidFill>
+                        </a:rPr>
+                        <a:t>standard method cannot reach</a:t>
                       </a:r>
                     </a:p>
                   </a:txBody>
@@ -5241,36 +5422,98 @@
                     <a:lstStyle/>
                     <a:p>
                       <a:pPr algn="ctr">
-                        <a:defRPr sz="1200" b="0">
-                          <a:solidFill>
-                            <a:srgbClr val="1A1A1A"/>
-                          </a:solidFill>
-                        </a:defRPr>
-                      </a:pPr>
-                      <a:r>
-                        <a:rPr sz="1200" b="0">
-                          <a:solidFill>
-                            <a:srgbClr val="1A1A1A"/>
-                          </a:solidFill>
-                        </a:rPr>
-                        <a:t>The standard adaptation trick relies on a component this model</a:t>
-                      </a:r>
-                    </a:p>
-                    <a:p>
-                      <a:pPr algn="ctr">
-                        <a:defRPr sz="1200" b="0">
-                          <a:solidFill>
-                            <a:srgbClr val="1A1A1A"/>
-                          </a:solidFill>
-                        </a:defRPr>
-                      </a:pPr>
-                      <a:r>
-                        <a:rPr sz="1200" b="0">
-                          <a:solidFill>
-                            <a:srgbClr val="1A1A1A"/>
-                          </a:solidFill>
-                        </a:rPr>
-                        <a:t>does not have. Nobody has adapted the one it does have.</a:t>
+                        <a:defRPr sz="1150" b="0">
+                          <a:solidFill>
+                            <a:srgbClr val="1A1A1A"/>
+                          </a:solidFill>
+                        </a:defRPr>
+                      </a:pPr>
+                      <a:r>
+                        <a:rPr sz="1150" b="0">
+                          <a:solidFill>
+                            <a:srgbClr val="1A1A1A"/>
+                          </a:solidFill>
+                        </a:rPr>
+                        <a:t>The usual adaptation trick needs a component</a:t>
+                      </a:r>
+                    </a:p>
+                    <a:p>
+                      <a:pPr algn="ctr">
+                        <a:defRPr sz="1150" b="0">
+                          <a:solidFill>
+                            <a:srgbClr val="1A1A1A"/>
+                          </a:solidFill>
+                        </a:defRPr>
+                      </a:pPr>
+                      <a:r>
+                        <a:rPr sz="1150" b="0">
+                          <a:solidFill>
+                            <a:srgbClr val="1A1A1A"/>
+                          </a:solidFill>
+                        </a:rPr>
+                        <a:t>this model does not have. Nobody has adapted</a:t>
+                      </a:r>
+                    </a:p>
+                    <a:p>
+                      <a:pPr algn="ctr">
+                        <a:defRPr sz="1150" b="0">
+                          <a:solidFill>
+                            <a:srgbClr val="1A1A1A"/>
+                          </a:solidFill>
+                        </a:defRPr>
+                      </a:pPr>
+                      <a:r>
+                        <a:rPr sz="1150" b="0">
+                          <a:solidFill>
+                            <a:srgbClr val="1A1A1A"/>
+                          </a:solidFill>
+                        </a:rPr>
+                        <a:t>the one it does have.</a:t>
+                      </a:r>
+                    </a:p>
+                  </a:txBody>
+                  <a:tcPr marL="73152" marR="73152" marT="27432" marB="27432">
+                    <a:solidFill>
+                      <a:srgbClr val="FFFFFF"/>
+                    </a:solidFill>
+                  </a:tcPr>
+                </a:tc>
+                <a:tc>
+                  <a:txBody>
+                    <a:bodyPr/>
+                    <a:lstStyle/>
+                    <a:p>
+                      <a:pPr algn="ctr">
+                        <a:defRPr sz="1150" b="0">
+                          <a:solidFill>
+                            <a:srgbClr val="1A1A1A"/>
+                          </a:solidFill>
+                        </a:defRPr>
+                      </a:pPr>
+                      <a:r>
+                        <a:rPr sz="1150" b="0">
+                          <a:solidFill>
+                            <a:srgbClr val="1A1A1A"/>
+                          </a:solidFill>
+                        </a:rPr>
+                        <a:t>Exploratory —</a:t>
+                      </a:r>
+                    </a:p>
+                    <a:p>
+                      <a:pPr algn="ctr">
+                        <a:defRPr sz="1150" b="0">
+                          <a:solidFill>
+                            <a:srgbClr val="1A1A1A"/>
+                          </a:solidFill>
+                        </a:defRPr>
+                      </a:pPr>
+                      <a:r>
+                        <a:rPr sz="1150" b="0">
+                          <a:solidFill>
+                            <a:srgbClr val="1A1A1A"/>
+                          </a:solidFill>
+                        </a:rPr>
+                        <a:t>may not work</a:t>
                       </a:r>
                     </a:p>
                   </a:txBody>
@@ -5293,7 +5536,7 @@
         </p:nvSpPr>
         <p:spPr>
           <a:xfrm>
-            <a:off x="685800" y="5577840"/>
+            <a:off x="685800" y="5806440"/>
             <a:ext cx="10881360" cy="685800"/>
           </a:xfrm>
           <a:prstGeom prst="rect">
@@ -5315,429 +5558,7 @@
               </a:defRPr>
             </a:pPr>
             <a:r>
-              <a:t>Contribution 1 stands even if every method underperforms — the negative result is itself the finding.</a:t>
-            </a:r>
-          </a:p>
-        </p:txBody>
-      </p:sp>
-    </p:spTree>
-  </p:cSld>
-  <p:clrMapOvr>
-    <a:masterClrMapping/>
-  </p:clrMapOvr>
-</p:sld>
-</file>
-
-<file path=ppt/slides/slide13.xml><?xml version="1.0" encoding="utf-8"?>
-<p:sld xmlns:a="http://schemas.openxmlformats.org/drawingml/2006/main" xmlns:p="http://schemas.openxmlformats.org/presentationml/2006/main" xmlns:r="http://schemas.openxmlformats.org/officeDocument/2006/relationships">
-  <p:cSld>
-    <p:spTree>
-      <p:nvGrpSpPr>
-        <p:cNvPr id="1" name=""/>
-        <p:cNvGrpSpPr/>
-        <p:nvPr/>
-      </p:nvGrpSpPr>
-      <p:grpSpPr/>
-      <p:sp>
-        <p:nvSpPr>
-          <p:cNvPr id="2" name="TextBox 1"/>
-          <p:cNvSpPr txBox="1"/>
-          <p:nvPr/>
-        </p:nvSpPr>
-        <p:spPr>
-          <a:xfrm>
-            <a:off x="640080" y="411480"/>
-            <a:ext cx="10972800" cy="777240"/>
-          </a:xfrm>
-          <a:prstGeom prst="rect">
-            <a:avLst/>
-          </a:prstGeom>
-          <a:noFill/>
-        </p:spPr>
-        <p:txBody>
-          <a:bodyPr wrap="square">
-            <a:spAutoFit/>
-          </a:bodyPr>
-          <a:lstStyle/>
-          <a:p>
-            <a:pPr>
-              <a:defRPr sz="3000" b="1">
-                <a:solidFill>
-                  <a:srgbClr val="1F4E79"/>
-                </a:solidFill>
-              </a:defRPr>
-            </a:pPr>
-            <a:r>
-              <a:t>Next steps</a:t>
-            </a:r>
-          </a:p>
-        </p:txBody>
-      </p:sp>
-      <p:graphicFrame>
-        <p:nvGraphicFramePr>
-          <p:cNvPr id="3" name="Table 2"/>
-          <p:cNvGraphicFramePr>
-            <a:graphicFrameLocks noGrp="1"/>
-          </p:cNvGraphicFramePr>
-          <p:nvPr/>
-        </p:nvGraphicFramePr>
-        <p:xfrm>
-          <a:off x="685800" y="1920240"/>
-          <a:ext cx="10789919" cy="2560320"/>
-        </p:xfrm>
-        <a:graphic>
-          <a:graphicData uri="http://schemas.openxmlformats.org/drawingml/2006/table">
-            <a:tbl>
-              <a:tblPr firstRow="1" bandRow="1">
-                <a:tableStyleId>{5C22544A-7EE6-4342-B048-85BDC9FD1C3A}</a:tableStyleId>
-              </a:tblPr>
-              <a:tblGrid>
-                <a:gridCol w="1674297"/>
-                <a:gridCol w="9115622"/>
-              </a:tblGrid>
-              <a:tr h="512064">
-                <a:tc>
-                  <a:txBody>
-                    <a:bodyPr/>
-                    <a:lstStyle/>
-                    <a:p>
-                      <a:pPr algn="l">
-                        <a:defRPr sz="1400" b="1">
-                          <a:solidFill>
-                            <a:srgbClr val="FFFFFF"/>
-                          </a:solidFill>
-                        </a:defRPr>
-                      </a:pPr>
-                      <a:r>
-                        <a:rPr sz="1400" b="1">
-                          <a:solidFill>
-                            <a:srgbClr val="FFFFFF"/>
-                          </a:solidFill>
-                        </a:rPr>
-                        <a:t>When</a:t>
-                      </a:r>
-                    </a:p>
-                  </a:txBody>
-                  <a:tcPr marL="73152" marR="73152" marT="27432" marB="27432">
-                    <a:solidFill>
-                      <a:srgbClr val="1F4E79"/>
-                    </a:solidFill>
-                  </a:tcPr>
-                </a:tc>
-                <a:tc>
-                  <a:txBody>
-                    <a:bodyPr/>
-                    <a:lstStyle/>
-                    <a:p>
-                      <a:pPr algn="ctr">
-                        <a:defRPr sz="1400" b="1">
-                          <a:solidFill>
-                            <a:srgbClr val="FFFFFF"/>
-                          </a:solidFill>
-                        </a:defRPr>
-                      </a:pPr>
-                      <a:r>
-                        <a:rPr sz="1400" b="1">
-                          <a:solidFill>
-                            <a:srgbClr val="FFFFFF"/>
-                          </a:solidFill>
-                        </a:rPr>
-                        <a:t>Action</a:t>
-                      </a:r>
-                    </a:p>
-                  </a:txBody>
-                  <a:tcPr marL="73152" marR="73152" marT="27432" marB="27432">
-                    <a:solidFill>
-                      <a:srgbClr val="1F4E79"/>
-                    </a:solidFill>
-                  </a:tcPr>
-                </a:tc>
-              </a:tr>
-              <a:tr h="512064">
-                <a:tc>
-                  <a:txBody>
-                    <a:bodyPr/>
-                    <a:lstStyle/>
-                    <a:p>
-                      <a:pPr algn="l">
-                        <a:defRPr sz="1400" b="0">
-                          <a:solidFill>
-                            <a:srgbClr val="1A1A1A"/>
-                          </a:solidFill>
-                        </a:defRPr>
-                      </a:pPr>
-                      <a:r>
-                        <a:rPr sz="1400" b="0">
-                          <a:solidFill>
-                            <a:srgbClr val="1A1A1A"/>
-                          </a:solidFill>
-                        </a:rPr>
-                        <a:t>This week</a:t>
-                      </a:r>
-                    </a:p>
-                  </a:txBody>
-                  <a:tcPr marL="73152" marR="73152" marT="27432" marB="27432">
-                    <a:solidFill>
-                      <a:srgbClr val="FFFFFF"/>
-                    </a:solidFill>
-                  </a:tcPr>
-                </a:tc>
-                <a:tc>
-                  <a:txBody>
-                    <a:bodyPr/>
-                    <a:lstStyle/>
-                    <a:p>
-                      <a:pPr algn="ctr">
-                        <a:defRPr sz="1400" b="0">
-                          <a:solidFill>
-                            <a:srgbClr val="1A1A1A"/>
-                          </a:solidFill>
-                        </a:defRPr>
-                      </a:pPr>
-                      <a:r>
-                        <a:rPr sz="1400" b="0">
-                          <a:solidFill>
-                            <a:srgbClr val="1A1A1A"/>
-                          </a:solidFill>
-                        </a:rPr>
-                        <a:t>Finish imbalance hyperparameter sweep (validation-selected); k-fold cross-validation to tighten confidence intervals on the baseline</a:t>
-                      </a:r>
-                    </a:p>
-                  </a:txBody>
-                  <a:tcPr marL="73152" marR="73152" marT="27432" marB="27432">
-                    <a:solidFill>
-                      <a:srgbClr val="FFFFFF"/>
-                    </a:solidFill>
-                  </a:tcPr>
-                </a:tc>
-              </a:tr>
-              <a:tr h="512064">
-                <a:tc>
-                  <a:txBody>
-                    <a:bodyPr/>
-                    <a:lstStyle/>
-                    <a:p>
-                      <a:pPr algn="l">
-                        <a:defRPr sz="1400" b="0">
-                          <a:solidFill>
-                            <a:srgbClr val="1A1A1A"/>
-                          </a:solidFill>
-                        </a:defRPr>
-                      </a:pPr>
-                      <a:r>
-                        <a:rPr sz="1400" b="0">
-                          <a:solidFill>
-                            <a:srgbClr val="1A1A1A"/>
-                          </a:solidFill>
-                        </a:rPr>
-                        <a:t>Next</a:t>
-                      </a:r>
-                    </a:p>
-                  </a:txBody>
-                  <a:tcPr marL="73152" marR="73152" marT="27432" marB="27432">
-                    <a:solidFill>
-                      <a:srgbClr val="F2F4F7"/>
-                    </a:solidFill>
-                  </a:tcPr>
-                </a:tc>
-                <a:tc>
-                  <a:txBody>
-                    <a:bodyPr/>
-                    <a:lstStyle/>
-                    <a:p>
-                      <a:pPr algn="ctr">
-                        <a:defRPr sz="1400" b="0">
-                          <a:solidFill>
-                            <a:srgbClr val="1A1A1A"/>
-                          </a:solidFill>
-                        </a:defRPr>
-                      </a:pPr>
-                      <a:r>
-                        <a:rPr sz="1400" b="0">
-                          <a:solidFill>
-                            <a:srgbClr val="1A1A1A"/>
-                          </a:solidFill>
-                        </a:rPr>
-                        <a:t>Implement label-free threshold placement — the honest baseline for all transfer results</a:t>
-                      </a:r>
-                    </a:p>
-                  </a:txBody>
-                  <a:tcPr marL="73152" marR="73152" marT="27432" marB="27432">
-                    <a:solidFill>
-                      <a:srgbClr val="F2F4F7"/>
-                    </a:solidFill>
-                  </a:tcPr>
-                </a:tc>
-              </a:tr>
-              <a:tr h="512064">
-                <a:tc>
-                  <a:txBody>
-                    <a:bodyPr/>
-                    <a:lstStyle/>
-                    <a:p>
-                      <a:pPr algn="l">
-                        <a:defRPr sz="1400" b="0">
-                          <a:solidFill>
-                            <a:srgbClr val="1A1A1A"/>
-                          </a:solidFill>
-                        </a:defRPr>
-                      </a:pPr>
-                      <a:r>
-                        <a:rPr sz="1400" b="0">
-                          <a:solidFill>
-                            <a:srgbClr val="1A1A1A"/>
-                          </a:solidFill>
-                        </a:rPr>
-                        <a:t>Then</a:t>
-                      </a:r>
-                    </a:p>
-                  </a:txBody>
-                  <a:tcPr marL="73152" marR="73152" marT="27432" marB="27432">
-                    <a:solidFill>
-                      <a:srgbClr val="FFFFFF"/>
-                    </a:solidFill>
-                  </a:tcPr>
-                </a:tc>
-                <a:tc>
-                  <a:txBody>
-                    <a:bodyPr/>
-                    <a:lstStyle/>
-                    <a:p>
-                      <a:pPr algn="ctr">
-                        <a:defRPr sz="1400" b="0">
-                          <a:solidFill>
-                            <a:srgbClr val="1A1A1A"/>
-                          </a:solidFill>
-                        </a:defRPr>
-                      </a:pPr>
-                      <a:r>
-                        <a:rPr sz="1400" b="0">
-                          <a:solidFill>
-                            <a:srgbClr val="1A1A1A"/>
-                          </a:solidFill>
-                        </a:rPr>
-                        <a:t>Multi-view aggregation, then degradation augmentation; measure AUC gain against the 0.95 / 0.985 target</a:t>
-                      </a:r>
-                    </a:p>
-                  </a:txBody>
-                  <a:tcPr marL="73152" marR="73152" marT="27432" marB="27432">
-                    <a:solidFill>
-                      <a:srgbClr val="FFFFFF"/>
-                    </a:solidFill>
-                  </a:tcPr>
-                </a:tc>
-              </a:tr>
-              <a:tr h="512064">
-                <a:tc>
-                  <a:txBody>
-                    <a:bodyPr/>
-                    <a:lstStyle/>
-                    <a:p>
-                      <a:pPr algn="l">
-                        <a:defRPr sz="1400" b="0">
-                          <a:solidFill>
-                            <a:srgbClr val="1A1A1A"/>
-                          </a:solidFill>
-                        </a:defRPr>
-                      </a:pPr>
-                      <a:r>
-                        <a:rPr sz="1400" b="0">
-                          <a:solidFill>
-                            <a:srgbClr val="1A1A1A"/>
-                          </a:solidFill>
-                        </a:rPr>
-                        <a:t>Open question</a:t>
-                      </a:r>
-                    </a:p>
-                  </a:txBody>
-                  <a:tcPr marL="73152" marR="73152" marT="27432" marB="27432">
-                    <a:solidFill>
-                      <a:srgbClr val="F2F4F7"/>
-                    </a:solidFill>
-                  </a:tcPr>
-                </a:tc>
-                <a:tc>
-                  <a:txBody>
-                    <a:bodyPr/>
-                    <a:lstStyle/>
-                    <a:p>
-                      <a:pPr algn="ctr">
-                        <a:defRPr sz="1400" b="0">
-                          <a:solidFill>
-                            <a:srgbClr val="1A1A1A"/>
-                          </a:solidFill>
-                        </a:defRPr>
-                      </a:pPr>
-                      <a:r>
-                        <a:rPr sz="1400" b="0">
-                          <a:solidFill>
-                            <a:srgbClr val="1A1A1A"/>
-                          </a:solidFill>
-                        </a:rPr>
-                        <a:t>Access to BRSET's per-image degradation-type metadata for the decomposition analysis</a:t>
-                      </a:r>
-                    </a:p>
-                  </a:txBody>
-                  <a:tcPr marL="73152" marR="73152" marT="27432" marB="27432">
-                    <a:solidFill>
-                      <a:srgbClr val="F2F4F7"/>
-                    </a:solidFill>
-                  </a:tcPr>
-                </a:tc>
-              </a:tr>
-            </a:tbl>
-          </a:graphicData>
-        </a:graphic>
-      </p:graphicFrame>
-      <p:sp>
-        <p:nvSpPr>
-          <p:cNvPr id="4" name="TextBox 3"/>
-          <p:cNvSpPr txBox="1"/>
-          <p:nvPr/>
-        </p:nvSpPr>
-        <p:spPr>
-          <a:xfrm>
-            <a:off x="685800" y="4754880"/>
-            <a:ext cx="10881360" cy="1828800"/>
-          </a:xfrm>
-          <a:prstGeom prst="rect">
-            <a:avLst/>
-          </a:prstGeom>
-          <a:noFill/>
-        </p:spPr>
-        <p:txBody>
-          <a:bodyPr wrap="square">
-            <a:spAutoFit/>
-          </a:bodyPr>
-          <a:lstStyle/>
-          <a:p>
-            <a:pPr>
-              <a:spcAft>
-                <a:spcPts val="1000"/>
-              </a:spcAft>
-              <a:defRPr sz="1700">
-                <a:solidFill>
-                  <a:srgbClr val="1A1A1A"/>
-                </a:solidFill>
-              </a:defRPr>
-            </a:pPr>
-            <a:r>
-              <a:t>• Baseline: complete and defensible — beats the paper on AUC, matches on F1.</a:t>
-            </a:r>
-          </a:p>
-          <a:p>
-            <a:pPr>
-              <a:spcAft>
-                <a:spcPts val="1000"/>
-              </a:spcAft>
-              <a:defRPr sz="1700">
-                <a:solidFill>
-                  <a:srgbClr val="1A1A1A"/>
-                </a:solidFill>
-              </a:defRPr>
-            </a:pPr>
-            <a:r>
-              <a:t>• Transfer: diagnosed, literature reviewed, three methods ranked, novelty verified as open.</a:t>
+              <a:t>Contribution 1 holds even if both methods underperform — showing what the gap is made of is itself the result.</a:t>
             </a:r>
           </a:p>
         </p:txBody>

--- a/presentation/BRSET_ConvNeXtV2_Progress.pptx
+++ b/presentation/BRSET_ConvNeXtV2_Progress.pptx
@@ -3238,8 +3238,8 @@
           <p:nvPr/>
         </p:nvGraphicFramePr>
         <p:xfrm>
-          <a:off x="685800" y="1737360"/>
-          <a:ext cx="10789918" cy="3931920"/>
+          <a:off x="685800" y="1691640"/>
+          <a:ext cx="10789918" cy="4160520"/>
         </p:xfrm>
         <a:graphic>
           <a:graphicData uri="http://schemas.openxmlformats.org/drawingml/2006/table">
@@ -3254,7 +3254,7 @@
                 <a:gridCol w="744132"/>
                 <a:gridCol w="1302231"/>
               </a:tblGrid>
-              <a:tr h="982980">
+              <a:tr h="1040130">
                 <a:tc>
                   <a:txBody>
                     <a:bodyPr/>
@@ -3396,7 +3396,7 @@
                   </a:tcPr>
                 </a:tc>
               </a:tr>
-              <a:tr h="982980">
+              <a:tr h="1040130">
                 <a:tc>
                   <a:txBody>
                     <a:bodyPr/>
@@ -3539,7 +3539,41 @@
                             <a:srgbClr val="1A1A1A"/>
                           </a:solidFill>
                         </a:rPr>
-                        <a:t>Published gains on retinal data: +0.085 to +0.121 AUC. We need +0.04.</a:t>
+                        <a:t>RetiGen (Chen et al., arXiv 2403.15647) does this on fundus images and</a:t>
+                      </a:r>
+                    </a:p>
+                    <a:p>
+                      <a:pPr algn="ctr">
+                        <a:defRPr sz="1150" b="0">
+                          <a:solidFill>
+                            <a:srgbClr val="1A1A1A"/>
+                          </a:solidFill>
+                        </a:defRPr>
+                      </a:pPr>
+                      <a:r>
+                        <a:rPr sz="1150" b="0">
+                          <a:solidFill>
+                            <a:srgbClr val="1A1A1A"/>
+                          </a:solidFill>
+                        </a:rPr>
+                        <a:t>reports +0.002 to +0.086 AUC across seven baselines, median ≈ +0.044.</a:t>
+                      </a:r>
+                    </a:p>
+                    <a:p>
+                      <a:pPr algn="ctr">
+                        <a:defRPr sz="1150" b="0">
+                          <a:solidFill>
+                            <a:srgbClr val="1A1A1A"/>
+                          </a:solidFill>
+                        </a:defRPr>
+                      </a:pPr>
+                      <a:r>
+                        <a:rPr sz="1150" b="0">
+                          <a:solidFill>
+                            <a:srgbClr val="1A1A1A"/>
+                          </a:solidFill>
+                        </a:rPr>
+                        <a:t>We need +0.04 — achievable, but not guaranteed.</a:t>
                       </a:r>
                     </a:p>
                   </a:txBody>
@@ -3606,7 +3640,7 @@
                   </a:tcPr>
                 </a:tc>
               </a:tr>
-              <a:tr h="982980">
+              <a:tr h="1040130">
                 <a:tc>
                   <a:txBody>
                     <a:bodyPr/>
@@ -3816,7 +3850,7 @@
                   </a:tcPr>
                 </a:tc>
               </a:tr>
-              <a:tr h="982980">
+              <a:tr h="1040130">
                 <a:tc>
                   <a:txBody>
                     <a:bodyPr/>
@@ -4055,7 +4089,7 @@
         </p:nvSpPr>
         <p:spPr>
           <a:xfrm>
-            <a:off x="685800" y="5897880"/>
+            <a:off x="685800" y="6035040"/>
             <a:ext cx="10881360" cy="685800"/>
           </a:xfrm>
           <a:prstGeom prst="rect">

--- a/presentation/BRSET_ConvNeXtV2_Progress.pptx
+++ b/presentation/BRSET_ConvNeXtV2_Progress.pptx
@@ -4164,7 +4164,7 @@
               </a:defRPr>
             </a:pPr>
             <a:r>
-              <a:t>Novelty — what we found, and how certain we are</a:t>
+              <a:t>Novelty — what is open, and who else is nearby</a:t>
             </a:r>
           </a:p>
           <a:p>
@@ -4176,7 +4176,7 @@
               </a:defRPr>
             </a:pPr>
             <a:r>
-              <a:t>Search covered all 33 papers citing either dataset, plus GitHub, arXiv and preprint servers.</a:t>
+              <a:t>Checked every paper citing either dataset (33 in total), plus GitHub, arXiv and preprint servers.</a:t>
             </a:r>
           </a:p>
         </p:txBody>
@@ -4190,8 +4190,8 @@
           <p:nvPr/>
         </p:nvGraphicFramePr>
         <p:xfrm>
-          <a:off x="685800" y="1783080"/>
-          <a:ext cx="10789919" cy="3566160"/>
+          <a:off x="685800" y="1920240"/>
+          <a:ext cx="10424160" cy="2286000"/>
         </p:xfrm>
         <a:graphic>
           <a:graphicData uri="http://schemas.openxmlformats.org/drawingml/2006/table">
@@ -4200,29 +4200,29 @@
                 <a:tableStyleId>{5C22544A-7EE6-4342-B048-85BDC9FD1C3A}</a:tableStyleId>
               </a:tblPr>
               <a:tblGrid>
-                <a:gridCol w="6418142"/>
-                <a:gridCol w="4371777"/>
+                <a:gridCol w="6254496"/>
+                <a:gridCol w="4169664"/>
               </a:tblGrid>
-              <a:tr h="509451">
+              <a:tr h="457200">
                 <a:tc>
                   <a:txBody>
                     <a:bodyPr/>
                     <a:lstStyle/>
                     <a:p>
                       <a:pPr algn="l">
-                        <a:defRPr sz="1150" b="1">
+                        <a:defRPr sz="1300" b="1">
                           <a:solidFill>
                             <a:srgbClr val="FFFFFF"/>
                           </a:solidFill>
                         </a:defRPr>
                       </a:pPr>
                       <a:r>
-                        <a:rPr sz="1150" b="1">
+                        <a:rPr sz="1300" b="1">
                           <a:solidFill>
                             <a:srgbClr val="FFFFFF"/>
                           </a:solidFill>
                         </a:rPr>
-                        <a:t>Finding</a:t>
+                        <a:t>What we found</a:t>
                       </a:r>
                     </a:p>
                   </a:txBody>
@@ -4238,14 +4238,14 @@
                     <a:lstStyle/>
                     <a:p>
                       <a:pPr algn="ctr">
-                        <a:defRPr sz="1150" b="1">
+                        <a:defRPr sz="1300" b="1">
                           <a:solidFill>
                             <a:srgbClr val="FFFFFF"/>
                           </a:solidFill>
                         </a:defRPr>
                       </a:pPr>
                       <a:r>
-                        <a:rPr sz="1150" b="1">
+                        <a:rPr sz="1300" b="1">
                           <a:solidFill>
                             <a:srgbClr val="FFFFFF"/>
                           </a:solidFill>
@@ -4261,26 +4261,26 @@
                   </a:tcPr>
                 </a:tc>
               </a:tr>
-              <a:tr h="509451">
+              <a:tr h="457200">
                 <a:tc>
                   <a:txBody>
                     <a:bodyPr/>
                     <a:lstStyle/>
                     <a:p>
                       <a:pPr algn="l">
-                        <a:defRPr sz="1150" b="0">
-                          <a:solidFill>
-                            <a:srgbClr val="1A1A1A"/>
-                          </a:solidFill>
-                        </a:defRPr>
-                      </a:pPr>
-                      <a:r>
-                        <a:rPr sz="1150" b="0">
-                          <a:solidFill>
-                            <a:srgbClr val="1A1A1A"/>
-                          </a:solidFill>
-                        </a:rPr>
-                        <a:t>No published BRSET → mBRSET transfer study found</a:t>
+                        <a:defRPr sz="1300" b="0">
+                          <a:solidFill>
+                            <a:srgbClr val="1A1A1A"/>
+                          </a:solidFill>
+                        </a:defRPr>
+                      </a:pPr>
+                      <a:r>
+                        <a:rPr sz="1300" b="0">
+                          <a:solidFill>
+                            <a:srgbClr val="1A1A1A"/>
+                          </a:solidFill>
+                        </a:rPr>
+                        <a:t>No published BRSET → mBRSET transfer study</a:t>
                       </a:r>
                     </a:p>
                   </a:txBody>
@@ -4296,36 +4296,36 @@
                     <a:lstStyle/>
                     <a:p>
                       <a:pPr algn="ctr">
-                        <a:defRPr sz="1150" b="0">
-                          <a:solidFill>
-                            <a:srgbClr val="1A1A1A"/>
-                          </a:solidFill>
-                        </a:defRPr>
-                      </a:pPr>
-                      <a:r>
-                        <a:rPr sz="1150" b="0">
-                          <a:solidFill>
-                            <a:srgbClr val="1A1A1A"/>
-                          </a:solidFill>
-                        </a:rPr>
-                        <a:t>Exhaustive citation search — but not finding one</a:t>
-                      </a:r>
-                    </a:p>
-                    <a:p>
-                      <a:pPr algn="ctr">
-                        <a:defRPr sz="1150" b="0">
-                          <a:solidFill>
-                            <a:srgbClr val="1A1A1A"/>
-                          </a:solidFill>
-                        </a:defRPr>
-                      </a:pPr>
-                      <a:r>
-                        <a:rPr sz="1150" b="0">
-                          <a:solidFill>
-                            <a:srgbClr val="1A1A1A"/>
-                          </a:solidFill>
-                        </a:rPr>
-                        <a:t>is not the same as proving none exists</a:t>
+                        <a:defRPr sz="1300" b="0">
+                          <a:solidFill>
+                            <a:srgbClr val="1A1A1A"/>
+                          </a:solidFill>
+                        </a:defRPr>
+                      </a:pPr>
+                      <a:r>
+                        <a:rPr sz="1300" b="0">
+                          <a:solidFill>
+                            <a:srgbClr val="1A1A1A"/>
+                          </a:solidFill>
+                        </a:rPr>
+                        <a:t>Searched exhaustively and found none —</a:t>
+                      </a:r>
+                    </a:p>
+                    <a:p>
+                      <a:pPr algn="ctr">
+                        <a:defRPr sz="1300" b="0">
+                          <a:solidFill>
+                            <a:srgbClr val="1A1A1A"/>
+                          </a:solidFill>
+                        </a:defRPr>
+                      </a:pPr>
+                      <a:r>
+                        <a:rPr sz="1300" b="0">
+                          <a:solidFill>
+                            <a:srgbClr val="1A1A1A"/>
+                          </a:solidFill>
+                        </a:rPr>
+                        <a:t>though that is not proof none exists</a:t>
                       </a:r>
                     </a:p>
                   </a:txBody>
@@ -4336,43 +4336,43 @@
                   </a:tcPr>
                 </a:tc>
               </a:tr>
-              <a:tr h="509451">
+              <a:tr h="457200">
                 <a:tc>
                   <a:txBody>
                     <a:bodyPr/>
                     <a:lstStyle/>
                     <a:p>
                       <a:pPr algn="l">
-                        <a:defRPr sz="1150" b="0">
-                          <a:solidFill>
-                            <a:srgbClr val="1A1A1A"/>
-                          </a:solidFill>
-                        </a:defRPr>
-                      </a:pPr>
-                      <a:r>
-                        <a:rPr sz="1150" b="0">
-                          <a:solidFill>
-                            <a:srgbClr val="1A1A1A"/>
-                          </a:solidFill>
-                        </a:rPr>
-                        <a:t>The dataset creators list "domain adaptation across imaging devices"</a:t>
+                        <a:defRPr sz="1300" b="0">
+                          <a:solidFill>
+                            <a:srgbClr val="1A1A1A"/>
+                          </a:solidFill>
+                        </a:defRPr>
+                      </a:pPr>
+                      <a:r>
+                        <a:rPr sz="1300" b="0">
+                          <a:solidFill>
+                            <a:srgbClr val="1A1A1A"/>
+                          </a:solidFill>
+                        </a:rPr>
+                        <a:t>The dataset creators name device adaptation as an</a:t>
                       </a:r>
                     </a:p>
                     <a:p>
                       <a:pPr algn="l">
-                        <a:defRPr sz="1150" b="0">
-                          <a:solidFill>
-                            <a:srgbClr val="1A1A1A"/>
-                          </a:solidFill>
-                        </a:defRPr>
-                      </a:pPr>
-                      <a:r>
-                        <a:rPr sz="1150" b="0">
-                          <a:solidFill>
-                            <a:srgbClr val="1A1A1A"/>
-                          </a:solidFill>
-                        </a:rPr>
-                        <a:t>as an application, and report no such experiment</a:t>
+                        <a:defRPr sz="1300" b="0">
+                          <a:solidFill>
+                            <a:srgbClr val="1A1A1A"/>
+                          </a:solidFill>
+                        </a:defRPr>
+                      </a:pPr>
+                      <a:r>
+                        <a:rPr sz="1300" b="0">
+                          <a:solidFill>
+                            <a:srgbClr val="1A1A1A"/>
+                          </a:solidFill>
+                        </a:rPr>
+                        <a:t>application but have not done it</a:t>
                       </a:r>
                     </a:p>
                   </a:txBody>
@@ -4388,19 +4388,19 @@
                     <a:lstStyle/>
                     <a:p>
                       <a:pPr algn="ctr">
-                        <a:defRPr sz="1150" b="0">
-                          <a:solidFill>
-                            <a:srgbClr val="1A1A1A"/>
-                          </a:solidFill>
-                        </a:defRPr>
-                      </a:pPr>
-                      <a:r>
-                        <a:rPr sz="1150" b="0">
-                          <a:solidFill>
-                            <a:srgbClr val="1A1A1A"/>
-                          </a:solidFill>
-                        </a:rPr>
-                        <a:t>Verified — stated on their March 2026 release</a:t>
+                        <a:defRPr sz="1300" b="0">
+                          <a:solidFill>
+                            <a:srgbClr val="1A1A1A"/>
+                          </a:solidFill>
+                        </a:defRPr>
+                      </a:pPr>
+                      <a:r>
+                        <a:rPr sz="1300" b="0">
+                          <a:solidFill>
+                            <a:srgbClr val="1A1A1A"/>
+                          </a:solidFill>
+                        </a:rPr>
+                        <a:t>Verified on their March 2026 release</a:t>
                       </a:r>
                     </a:p>
                   </a:txBody>
@@ -4411,101 +4411,84 @@
                   </a:tcPr>
                 </a:tc>
               </a:tr>
-              <a:tr h="509451">
+              <a:tr h="457200">
                 <a:tc>
                   <a:txBody>
                     <a:bodyPr/>
                     <a:lstStyle/>
                     <a:p>
                       <a:pPr algn="l">
-                        <a:defRPr sz="1150" b="0">
-                          <a:solidFill>
-                            <a:srgbClr val="1A1A1A"/>
-                          </a:solidFill>
-                        </a:defRPr>
-                      </a:pPr>
-                      <a:r>
-                        <a:rPr sz="1150" b="0">
-                          <a:solidFill>
-                            <a:srgbClr val="1A1A1A"/>
-                          </a:solidFill>
-                        </a:rPr>
-                        <a:t>No work uses BRSET's per-image degradation labels</a:t>
-                      </a:r>
-                    </a:p>
+                        <a:defRPr sz="1300" b="0">
+                          <a:solidFill>
+                            <a:srgbClr val="1A1A1A"/>
+                          </a:solidFill>
+                        </a:defRPr>
+                      </a:pPr>
+                      <a:r>
+                        <a:rPr sz="1300" b="0">
+                          <a:solidFill>
+                            <a:srgbClr val="1A1A1A"/>
+                          </a:solidFill>
+                        </a:rPr>
+                        <a:t>Nobody uses BRSET's per-image quality labels for transfer</a:t>
+                      </a:r>
+                    </a:p>
+                  </a:txBody>
+                  <a:tcPr marL="73152" marR="73152" marT="27432" marB="27432">
+                    <a:solidFill>
+                      <a:srgbClr val="FFFFFF"/>
+                    </a:solidFill>
+                  </a:tcPr>
+                </a:tc>
+                <a:tc>
+                  <a:txBody>
+                    <a:bodyPr/>
+                    <a:lstStyle/>
+                    <a:p>
+                      <a:pPr algn="ctr">
+                        <a:defRPr sz="1300" b="0">
+                          <a:solidFill>
+                            <a:srgbClr val="1A1A1A"/>
+                          </a:solidFill>
+                        </a:defRPr>
+                      </a:pPr>
+                      <a:r>
+                        <a:rPr sz="1300" b="0">
+                          <a:solidFill>
+                            <a:srgbClr val="1A1A1A"/>
+                          </a:solidFill>
+                        </a:rPr>
+                        <a:t>Verified — the labels exist and sit unused</a:t>
+                      </a:r>
+                    </a:p>
+                  </a:txBody>
+                  <a:tcPr marL="73152" marR="73152" marT="27432" marB="27432">
+                    <a:solidFill>
+                      <a:srgbClr val="FFFFFF"/>
+                    </a:solidFill>
+                  </a:tcPr>
+                </a:tc>
+              </a:tr>
+              <a:tr h="457200">
+                <a:tc>
+                  <a:txBody>
+                    <a:bodyPr/>
+                    <a:lstStyle/>
                     <a:p>
                       <a:pPr algn="l">
-                        <a:defRPr sz="1150" b="0">
-                          <a:solidFill>
-                            <a:srgbClr val="1A1A1A"/>
-                          </a:solidFill>
-                        </a:defRPr>
-                      </a:pPr>
-                      <a:r>
-                        <a:rPr sz="1150" b="0">
-                          <a:solidFill>
-                            <a:srgbClr val="1A1A1A"/>
-                          </a:solidFill>
-                        </a:rPr>
-                        <a:t>(focus / illumination / field / artifact) for transfer</a:t>
-                      </a:r>
-                    </a:p>
-                  </a:txBody>
-                  <a:tcPr marL="73152" marR="73152" marT="27432" marB="27432">
-                    <a:solidFill>
-                      <a:srgbClr val="FFFFFF"/>
-                    </a:solidFill>
-                  </a:tcPr>
-                </a:tc>
-                <a:tc>
-                  <a:txBody>
-                    <a:bodyPr/>
-                    <a:lstStyle/>
-                    <a:p>
-                      <a:pPr algn="ctr">
-                        <a:defRPr sz="1150" b="0">
-                          <a:solidFill>
-                            <a:srgbClr val="1A1A1A"/>
-                          </a:solidFill>
-                        </a:defRPr>
-                      </a:pPr>
-                      <a:r>
-                        <a:rPr sz="1150" b="0">
-                          <a:solidFill>
-                            <a:srgbClr val="1A1A1A"/>
-                          </a:solidFill>
-                        </a:rPr>
-                        <a:t>Verified — the labels exist and are unused</a:t>
-                      </a:r>
-                    </a:p>
-                  </a:txBody>
-                  <a:tcPr marL="73152" marR="73152" marT="27432" marB="27432">
-                    <a:solidFill>
-                      <a:srgbClr val="FFFFFF"/>
-                    </a:solidFill>
-                  </a:tcPr>
-                </a:tc>
-              </a:tr>
-              <a:tr h="509451">
-                <a:tc>
-                  <a:txBody>
-                    <a:bodyPr/>
-                    <a:lstStyle/>
-                    <a:p>
-                      <a:pPr algn="l">
-                        <a:defRPr sz="1150" b="0">
-                          <a:solidFill>
-                            <a:srgbClr val="1A1A1A"/>
-                          </a:solidFill>
-                        </a:defRPr>
-                      </a:pPr>
-                      <a:r>
-                        <a:rPr sz="1150" b="0">
-                          <a:solidFill>
-                            <a:srgbClr val="1A1A1A"/>
-                          </a:solidFill>
-                        </a:rPr>
-                        <a:t>No work reports cross-device macular edema degradation</a:t>
+                        <a:defRPr sz="1300" b="0">
+                          <a:solidFill>
+                            <a:srgbClr val="1A1A1A"/>
+                          </a:solidFill>
+                        </a:defRPr>
+                      </a:pPr>
+                      <a:r>
+                        <a:rPr sz="1300" b="0">
+                          <a:solidFill>
+                            <a:srgbClr val="1A1A1A"/>
+                          </a:solidFill>
+                        </a:rPr>
+                        <a:t>Nobody reports cross-device macular edema loss</a:t>
                       </a:r>
                     </a:p>
                   </a:txBody>
@@ -4521,186 +4504,19 @@
                     <a:lstStyle/>
                     <a:p>
                       <a:pPr algn="ctr">
-                        <a:defRPr sz="1150" b="0">
-                          <a:solidFill>
-                            <a:srgbClr val="1A1A1A"/>
-                          </a:solidFill>
-                        </a:defRPr>
-                      </a:pPr>
-                      <a:r>
-                        <a:rPr sz="1150" b="0">
-                          <a:solidFill>
-                            <a:srgbClr val="1A1A1A"/>
-                          </a:solidFill>
-                        </a:rPr>
-                        <a:t>Verified — and our ME gap (0.179) is larger</a:t>
-                      </a:r>
-                    </a:p>
-                    <a:p>
-                      <a:pPr algn="ctr">
-                        <a:defRPr sz="1150" b="0">
-                          <a:solidFill>
-                            <a:srgbClr val="1A1A1A"/>
-                          </a:solidFill>
-                        </a:defRPr>
-                      </a:pPr>
-                      <a:r>
-                        <a:rPr sz="1150" b="0">
-                          <a:solidFill>
-                            <a:srgbClr val="1A1A1A"/>
-                          </a:solidFill>
-                        </a:rPr>
-                        <a:t>than our DR gap (0.098)</a:t>
-                      </a:r>
-                    </a:p>
-                  </a:txBody>
-                  <a:tcPr marL="73152" marR="73152" marT="27432" marB="27432">
-                    <a:solidFill>
-                      <a:srgbClr val="F2F4F7"/>
-                    </a:solidFill>
-                  </a:tcPr>
-                </a:tc>
-              </a:tr>
-              <a:tr h="509451">
-                <a:tc>
-                  <a:txBody>
-                    <a:bodyPr/>
-                    <a:lstStyle/>
-                    <a:p>
-                      <a:pPr algn="l">
-                        <a:defRPr sz="1150" b="0">
-                          <a:solidFill>
-                            <a:srgbClr val="1A1A1A"/>
-                          </a:solidFill>
-                        </a:defRPr>
-                      </a:pPr>
-                      <a:r>
-                        <a:rPr sz="1150" b="0">
-                          <a:solidFill>
-                            <a:srgbClr val="1A1A1A"/>
-                          </a:solidFill>
-                        </a:rPr>
-                        <a:t>RetSyn (J Biomed Inform 2025) — synthetic data for tabletop → portable.</a:t>
-                      </a:r>
-                    </a:p>
-                    <a:p>
-                      <a:pPr algn="l">
-                        <a:defRPr sz="1150" b="0">
-                          <a:solidFill>
-                            <a:srgbClr val="1A1A1A"/>
-                          </a:solidFill>
-                        </a:defRPr>
-                      </a:pPr>
-                      <a:r>
-                        <a:rPr sz="1150" b="0">
-                          <a:solidFill>
-                            <a:srgbClr val="1A1A1A"/>
-                          </a:solidFill>
-                        </a:rPr>
-                        <a:t>Same senior author as both datasets.</a:t>
-                      </a:r>
-                    </a:p>
-                  </a:txBody>
-                  <a:tcPr marL="73152" marR="73152" marT="27432" marB="27432">
-                    <a:solidFill>
-                      <a:srgbClr val="FFFFFF"/>
-                    </a:solidFill>
-                  </a:tcPr>
-                </a:tc>
-                <a:tc>
-                  <a:txBody>
-                    <a:bodyPr/>
-                    <a:lstStyle/>
-                    <a:p>
-                      <a:pPr algn="ctr">
-                        <a:defRPr sz="1150" b="0">
-                          <a:solidFill>
-                            <a:srgbClr val="1A1A1A"/>
-                          </a:solidFill>
-                        </a:defRPr>
-                      </a:pPr>
-                      <a:r>
-                        <a:rPr sz="1150" b="0">
-                          <a:solidFill>
-                            <a:srgbClr val="1A1A1A"/>
-                          </a:solidFill>
-                        </a:rPr>
-                        <a:t>Published and real. This is the competitor.</a:t>
-                      </a:r>
-                    </a:p>
-                  </a:txBody>
-                  <a:tcPr marL="73152" marR="73152" marT="27432" marB="27432">
-                    <a:solidFill>
-                      <a:srgbClr val="FFFFFF"/>
-                    </a:solidFill>
-                  </a:tcPr>
-                </a:tc>
-              </a:tr>
-              <a:tr h="509454">
-                <a:tc>
-                  <a:txBody>
-                    <a:bodyPr/>
-                    <a:lstStyle/>
-                    <a:p>
-                      <a:pPr algn="l">
-                        <a:defRPr sz="1150" b="0">
-                          <a:solidFill>
-                            <a:srgbClr val="1A1A1A"/>
-                          </a:solidFill>
-                        </a:defRPr>
-                      </a:pPr>
-                      <a:r>
-                        <a:rPr sz="1150" b="0">
-                          <a:solidFill>
-                            <a:srgbClr val="1A1A1A"/>
-                          </a:solidFill>
-                        </a:rPr>
-                        <a:t>One GitHub project is doing a descriptive version of BRSET → mBRSET</a:t>
-                      </a:r>
-                    </a:p>
-                  </a:txBody>
-                  <a:tcPr marL="73152" marR="73152" marT="27432" marB="27432">
-                    <a:solidFill>
-                      <a:srgbClr val="F2F4F7"/>
-                    </a:solidFill>
-                  </a:tcPr>
-                </a:tc>
-                <a:tc>
-                  <a:txBody>
-                    <a:bodyPr/>
-                    <a:lstStyle/>
-                    <a:p>
-                      <a:pPr algn="ctr">
-                        <a:defRPr sz="1150" b="0">
-                          <a:solidFill>
-                            <a:srgbClr val="1A1A1A"/>
-                          </a:solidFill>
-                        </a:defRPr>
-                      </a:pPr>
-                      <a:r>
-                        <a:rPr sz="1150" b="0">
-                          <a:solidFill>
-                            <a:srgbClr val="1A1A1A"/>
-                          </a:solidFill>
-                        </a:rPr>
-                        <a:t>Real, but a single commit — code skeleton,</a:t>
-                      </a:r>
-                    </a:p>
-                    <a:p>
-                      <a:pPr algn="ctr">
-                        <a:defRPr sz="1150" b="0">
-                          <a:solidFill>
-                            <a:srgbClr val="1A1A1A"/>
-                          </a:solidFill>
-                        </a:defRPr>
-                      </a:pPr>
-                      <a:r>
-                        <a:rPr sz="1150" b="0">
-                          <a:solidFill>
-                            <a:srgbClr val="1A1A1A"/>
-                          </a:solidFill>
-                        </a:rPr>
-                        <a:t>no data, no results published yet</a:t>
+                        <a:defRPr sz="1300" b="0">
+                          <a:solidFill>
+                            <a:srgbClr val="1A1A1A"/>
+                          </a:solidFill>
+                        </a:defRPr>
+                      </a:pPr>
+                      <a:r>
+                        <a:rPr sz="1300" b="0">
+                          <a:solidFill>
+                            <a:srgbClr val="1A1A1A"/>
+                          </a:solidFill>
+                        </a:rPr>
+                        <a:t>Verified — and ours is the larger gap</a:t>
                       </a:r>
                     </a:p>
                   </a:txBody>
@@ -4723,8 +4539,8 @@
         </p:nvSpPr>
         <p:spPr>
           <a:xfrm>
-            <a:off x="685800" y="5440680"/>
-            <a:ext cx="10881360" cy="1234439"/>
+            <a:off x="685800" y="4572000"/>
+            <a:ext cx="10881360" cy="2057400"/>
           </a:xfrm>
           <a:prstGeom prst="rect">
             <a:avLst/>
@@ -4739,46 +4555,61 @@
           <a:p>
             <a:pPr>
               <a:spcAft>
-                <a:spcPts val="1000"/>
+                <a:spcPts val="700"/>
               </a:spcAft>
-              <a:defRPr sz="1300">
+              <a:defRPr sz="1400">
                 <a:solidFill>
                   <a:srgbClr val="1A1A1A"/>
                 </a:solidFill>
               </a:defRPr>
             </a:pPr>
             <a:r>
-              <a:t>• How we differ from RetSyn: they generate synthetic images; we diagnose what actually breaks, and separate image quality from camera identity. They do not address macular edema or the cutoff problem.</a:t>
+              <a:t>• Two groups are working nearby, and neither is doing what we propose:</a:t>
+            </a:r>
+          </a:p>
+          <a:p>
+            <a:pPr lvl="1">
+              <a:spcAft>
+                <a:spcPts val="700"/>
+              </a:spcAft>
+              <a:defRPr sz="1200">
+                <a:solidFill>
+                  <a:srgbClr val="5A5A5A"/>
+                </a:solidFill>
+              </a:defRPr>
+            </a:pPr>
+            <a:r>
+              <a:t>– RetSyn (J Biomed Inform 2025, same senior author as both datasets) generates synthetic images for tabletop → portable. It does not diagnose what breaks, and does not cover macular edema or the cutoff.</a:t>
+            </a:r>
+          </a:p>
+          <a:p>
+            <a:pPr lvl="1">
+              <a:spcAft>
+                <a:spcPts val="700"/>
+              </a:spcAft>
+              <a:defRPr sz="1200">
+                <a:solidFill>
+                  <a:srgbClr val="5A5A5A"/>
+                </a:solidFill>
+              </a:defRPr>
+            </a:pPr>
+            <a:r>
+              <a:t>– A GitHub project is starting a descriptive version of BRSET → mBRSET — a single commit so far, no results. It uses frozen features; we fine-tune the whole model.</a:t>
             </a:r>
           </a:p>
           <a:p>
             <a:pPr>
               <a:spcAft>
-                <a:spcPts val="1000"/>
+                <a:spcPts val="700"/>
               </a:spcAft>
-              <a:defRPr sz="1300">
+              <a:defRPr sz="1400">
                 <a:solidFill>
                   <a:srgbClr val="1A1A1A"/>
                 </a:solidFill>
               </a:defRPr>
             </a:pPr>
             <a:r>
-              <a:t>• How we differ from the GitHub project: they use frozen features and a simple classifier; we fine-tune the whole model and cover both findings.</a:t>
-            </a:r>
-          </a:p>
-          <a:p>
-            <a:pPr>
-              <a:spcAft>
-                <a:spcPts val="1000"/>
-              </a:spcAft>
-              <a:defRPr sz="1300">
-                <a:solidFill>
-                  <a:srgbClr val="1A1A1A"/>
-                </a:solidFill>
-              </a:defRPr>
-            </a:pPr>
-            <a:r>
-              <a:t>• Our shift is unusually clean: country, ethnicity, dilation, 45° field of view and grading protocol are all held constant, so only the camera changes. A study that also crossed country and protocol collapsed to AUC 0.54; ours holds 0.91.</a:t>
+              <a:t>• Our comparison is unusually clean: country, ethnicity, dilation, field of view and grading protocol are all held constant, so only the camera changes. A study that also crossed country collapsed to AUC 0.54; ours holds 0.91.</a:t>
             </a:r>
           </a:p>
         </p:txBody>
@@ -6097,10 +5928,10 @@
                 <a:tableStyleId>{5C22544A-7EE6-4342-B048-85BDC9FD1C3A}</a:tableStyleId>
               </a:tblPr>
               <a:tblGrid>
-                <a:gridCol w="2976529"/>
+                <a:gridCol w="3162562"/>
                 <a:gridCol w="2232397"/>
                 <a:gridCol w="1581281"/>
-                <a:gridCol w="3999711"/>
+                <a:gridCol w="3813678"/>
               </a:tblGrid>
               <a:tr h="329183">
                 <a:tc>
@@ -6349,7 +6180,7 @@
                             <a:srgbClr val="1A1A1A"/>
                           </a:solidFill>
                         </a:rPr>
-                        <a:t>Diabetic retinopathy — F1</a:t>
+                        <a:t>Diabetic retinopathy — macro F1</a:t>
                       </a:r>
                     </a:p>
                   </a:txBody>
@@ -6405,7 +6236,7 @@
                             <a:srgbClr val="1A1A1A"/>
                           </a:solidFill>
                         </a:rPr>
-                        <a:t>0.869</a:t>
+                        <a:t>0.930</a:t>
                       </a:r>
                     </a:p>
                   </a:txBody>
@@ -6433,7 +6264,7 @@
                             <a:srgbClr val="1A1A1A"/>
                           </a:solidFill>
                         </a:rPr>
-                        <a:t>The same, within measurement error</a:t>
+                        <a:t>Better than the paper</a:t>
                       </a:r>
                     </a:p>
                   </a:txBody>
@@ -6577,7 +6408,7 @@
                             <a:srgbClr val="1A1A1A"/>
                           </a:solidFill>
                         </a:rPr>
-                        <a:t>Macular edema — F1</a:t>
+                        <a:t>Macular edema — macro F1</a:t>
                       </a:r>
                     </a:p>
                   </a:txBody>
@@ -6633,7 +6464,7 @@
                             <a:srgbClr val="1A1A1A"/>
                           </a:solidFill>
                         </a:rPr>
-                        <a:t>0.748</a:t>
+                        <a:t>0.871</a:t>
                       </a:r>
                     </a:p>
                   </a:txBody>
@@ -6685,7 +6516,7 @@
         <p:spPr>
           <a:xfrm>
             <a:off x="685800" y="3840480"/>
-            <a:ext cx="10881360" cy="1874519"/>
+            <a:ext cx="10881360" cy="1920239"/>
           </a:xfrm>
           <a:prstGeom prst="rect">
             <a:avLst/>
@@ -6702,14 +6533,14 @@
               <a:spcAft>
                 <a:spcPts val="1000"/>
               </a:spcAft>
-              <a:defRPr sz="1500">
+              <a:defRPr sz="1400">
                 <a:solidFill>
                   <a:srgbClr val="1A1A1A"/>
                 </a:solidFill>
               </a:defRPr>
             </a:pPr>
             <a:r>
-              <a:t>• Our AUC of 0.992 sits above the paper's 0.97 by more than measurement error — a real improvement.</a:t>
+              <a:t>• Both improvements are larger than measurement error. Across 2,000 resamples of the test set our AUC ranges 0.987–0.996 and our macro F1 ranges 0.908–0.948; the paper's 0.97 and 0.89 both fall below those.</a:t>
             </a:r>
           </a:p>
           <a:p>
@@ -6717,14 +6548,14 @@
               <a:spcAft>
                 <a:spcPts val="1000"/>
               </a:spcAft>
-              <a:defRPr sz="1500">
+              <a:defRPr sz="1400">
                 <a:solidFill>
                   <a:srgbClr val="1A1A1A"/>
                 </a:solidFill>
               </a:defRPr>
             </a:pPr>
             <a:r>
-              <a:t>• Our F1 measures anywhere from 0.83 to 0.90 depending on which patients land in the test set. The paper's 0.89 falls inside that range, so the two cannot be told apart.</a:t>
+              <a:t>• Macro F1 averages performance over the healthy and the diseased class — it is the figure the paper reports, so it is the like-for-like comparison.</a:t>
             </a:r>
           </a:p>
           <a:p>
@@ -6732,14 +6563,14 @@
               <a:spcAft>
                 <a:spcPts val="1000"/>
               </a:spcAft>
-              <a:defRPr sz="1500">
+              <a:defRPr sz="1400">
                 <a:solidFill>
                   <a:srgbClr val="1A1A1A"/>
                 </a:solidFill>
               </a:defRPr>
             </a:pPr>
             <a:r>
-              <a:t>• Closing the remaining 0.02 would mean catching about 6 more images out of 2,435 — less than the test set can reliably measure.</a:t>
+              <a:t>• On the stricter diseased-class-only F1 we score 0.869 (DR) and 0.748 (ME). The paper does not report that figure, so there is no benchmark for it.</a:t>
             </a:r>
           </a:p>
           <a:p>
@@ -6747,7 +6578,7 @@
               <a:spcAft>
                 <a:spcPts val="1000"/>
               </a:spcAft>
-              <a:defRPr sz="1500">
+              <a:defRPr sz="1400">
                 <a:solidFill>
                   <a:srgbClr val="1A1A1A"/>
                 </a:solidFill>
@@ -6789,7 +6620,7 @@
               </a:defRPr>
             </a:pPr>
             <a:r>
-              <a:t>We beat the paper on AUC and match it on F1 — with one model instead of two.</a:t>
+              <a:t>Measured the way the paper measures, we beat it on both AUC and F1.</a:t>
             </a:r>
           </a:p>
         </p:txBody>
@@ -7683,6 +7514,23 @@
                         <a:t>DR F1</a:t>
                       </a:r>
                     </a:p>
+                    <a:p>
+                      <a:pPr algn="ctr">
+                        <a:defRPr sz="1300" b="1">
+                          <a:solidFill>
+                            <a:srgbClr val="FFFFFF"/>
+                          </a:solidFill>
+                        </a:defRPr>
+                      </a:pPr>
+                      <a:r>
+                        <a:rPr sz="1300" b="1">
+                          <a:solidFill>
+                            <a:srgbClr val="FFFFFF"/>
+                          </a:solidFill>
+                        </a:rPr>
+                        <a:t>(diseased class)</a:t>
+                      </a:r>
+                    </a:p>
                   </a:txBody>
                   <a:tcPr marL="73152" marR="73152" marT="27432" marB="27432">
                     <a:solidFill>
@@ -7709,6 +7557,23 @@
                           </a:solidFill>
                         </a:rPr>
                         <a:t>ME F1</a:t>
+                      </a:r>
+                    </a:p>
+                    <a:p>
+                      <a:pPr algn="ctr">
+                        <a:defRPr sz="1300" b="1">
+                          <a:solidFill>
+                            <a:srgbClr val="FFFFFF"/>
+                          </a:solidFill>
+                        </a:defRPr>
+                      </a:pPr>
+                      <a:r>
+                        <a:rPr sz="1300" b="1">
+                          <a:solidFill>
+                            <a:srgbClr val="FFFFFF"/>
+                          </a:solidFill>
+                        </a:rPr>
+                        <a:t>(diseased class)</a:t>
                       </a:r>
                     </a:p>
                   </a:txBody>
@@ -8799,7 +8664,7 @@
               </a:defRPr>
             </a:pPr>
             <a:r>
-              <a:t>BRSET: tabletop hospital cameras. mBRSET: handheld smartphone camera, community screening, 83% with artifacts.</a:t>
+              <a:t>BRSET: tabletop hospital cameras. mBRSET: handheld smartphone camera, community screening, 83% with artifacts.   |   Figures below come from the earlier two-model ensemble — the cross-device test has not yet been re-run with the new single model.</a:t>
             </a:r>
           </a:p>
         </p:txBody>
@@ -9995,7 +9860,7 @@
               </a:defRPr>
             </a:pPr>
             <a:r>
-              <a:t>For a given AUC and prevalence there is a hard maximum F1, over all possible thresholds.</a:t>
+              <a:t>For a given AUC and disease rate there is a maximum achievable F1, across every possible cutoff. The maximum below is an estimate, accurate to roughly ±0.02.</a:t>
             </a:r>
           </a:p>
         </p:txBody>
@@ -10100,7 +9965,7 @@
                             <a:srgbClr val="FFFFFF"/>
                           </a:solidFill>
                         </a:rPr>
-                        <a:t>Target prevalence</a:t>
+                        <a:t>Disease rate</a:t>
                       </a:r>
                     </a:p>
                   </a:txBody>
@@ -10128,7 +9993,7 @@
                             <a:srgbClr val="FFFFFF"/>
                           </a:solidFill>
                         </a:rPr>
-                        <a:t>Max possible F1</a:t>
+                        <a:t>Estimated max F1</a:t>
                       </a:r>
                     </a:p>
                   </a:txBody>

--- a/presentation/BRSET_ConvNeXtV2_Progress.pptx
+++ b/presentation/BRSET_ConvNeXtV2_Progress.pptx
@@ -4176,7 +4176,7 @@
               </a:defRPr>
             </a:pPr>
             <a:r>
-              <a:t>Checked every paper citing either dataset (33 in total), plus GitHub, arXiv and preprint servers.</a:t>
+              <a:t>Checked every paper citing either dataset, plus GitHub, arXiv and preprint servers.</a:t>
             </a:r>
           </a:p>
         </p:txBody>
@@ -9415,7 +9415,7 @@
               </a:defRPr>
             </a:pPr>
             <a:r>
-              <a:t>The model scores each image from 0 (healthy) to 1 (diseased). A cutoff decides who gets referred.</a:t>
+              <a:t>The model scores each image from 0 (healthy) to 1 (diseased). A cutoff decides who gets referred. Figures below are for diabetic retinopathy.</a:t>
             </a:r>
           </a:p>
         </p:txBody>

--- a/presentation/BRSET_ConvNeXtV2_Progress.pptx
+++ b/presentation/BRSET_ConvNeXtV2_Progress.pptx
@@ -9848,7 +9848,7 @@
               </a:defRPr>
             </a:pPr>
             <a:r>
-              <a:t>Diagnosis 2 — Threshold tuning is already exhausted</a:t>
+              <a:t>Diagnosis 2 — how much is the cutoff, how much is the model</a:t>
             </a:r>
           </a:p>
           <a:p>
@@ -9860,7 +9860,7 @@
               </a:defRPr>
             </a:pPr>
             <a:r>
-              <a:t>For a given AUC and disease rate there is a maximum achievable F1, across every possible cutoff. The maximum below is an estimate, accurate to roughly ±0.02.</a:t>
+              <a:t>Measured directly: we swept every possible cutoff on the mBRSET test set to find the best F1 any cutoff could reach.</a:t>
             </a:r>
           </a:p>
         </p:txBody>
@@ -9874,8 +9874,8 @@
           <p:nvPr/>
         </p:nvGraphicFramePr>
         <p:xfrm>
-          <a:off x="685800" y="1920240"/>
-          <a:ext cx="10789918" cy="987552"/>
+          <a:off x="685800" y="2011680"/>
+          <a:ext cx="10515600" cy="1737360"/>
         </p:xfrm>
         <a:graphic>
           <a:graphicData uri="http://schemas.openxmlformats.org/drawingml/2006/table">
@@ -9884,32 +9884,87 @@
                 <a:tableStyleId>{5C22544A-7EE6-4342-B048-85BDC9FD1C3A}</a:tableStyleId>
               </a:tblPr>
               <a:tblGrid>
-                <a:gridCol w="2942705"/>
-                <a:gridCol w="1471352"/>
-                <a:gridCol w="2354164"/>
-                <a:gridCol w="2354164"/>
-                <a:gridCol w="1667533"/>
+                <a:gridCol w="2468880"/>
+                <a:gridCol w="1645920"/>
+                <a:gridCol w="1645920"/>
+                <a:gridCol w="1645920"/>
+                <a:gridCol w="1554480"/>
+                <a:gridCol w="1554480"/>
               </a:tblGrid>
-              <a:tr h="329184">
+              <a:tr h="579120">
                 <a:tc>
                   <a:txBody>
                     <a:bodyPr/>
                     <a:lstStyle/>
                     <a:p>
                       <a:pPr algn="l">
-                        <a:defRPr sz="1500" b="1">
+                        <a:defRPr sz="1300" b="1">
                           <a:solidFill>
                             <a:srgbClr val="FFFFFF"/>
                           </a:solidFill>
                         </a:defRPr>
                       </a:pPr>
-                      <a:r>
-                        <a:rPr sz="1500" b="1">
+                    </a:p>
+                  </a:txBody>
+                  <a:tcPr marL="73152" marR="73152" marT="27432" marB="27432">
+                    <a:solidFill>
+                      <a:srgbClr val="1F4E79"/>
+                    </a:solidFill>
+                  </a:tcPr>
+                </a:tc>
+                <a:tc>
+                  <a:txBody>
+                    <a:bodyPr/>
+                    <a:lstStyle/>
+                    <a:p>
+                      <a:pPr algn="ctr">
+                        <a:defRPr sz="1300" b="1">
                           <a:solidFill>
                             <a:srgbClr val="FFFFFF"/>
                           </a:solidFill>
-                        </a:rPr>
-                        <a:t>BRSET → mBRSET</a:t>
+                        </a:defRPr>
+                      </a:pPr>
+                      <a:r>
+                        <a:rPr sz="1300" b="1">
+                          <a:solidFill>
+                            <a:srgbClr val="FFFFFF"/>
+                          </a:solidFill>
+                        </a:rPr>
+                        <a:t>Ours</a:t>
+                      </a:r>
+                    </a:p>
+                    <a:p>
+                      <a:pPr algn="ctr">
+                        <a:defRPr sz="1300" b="1">
+                          <a:solidFill>
+                            <a:srgbClr val="FFFFFF"/>
+                          </a:solidFill>
+                        </a:defRPr>
+                      </a:pPr>
+                      <a:r>
+                        <a:rPr sz="1300" b="1">
+                          <a:solidFill>
+                            <a:srgbClr val="FFFFFF"/>
+                          </a:solidFill>
+                        </a:rPr>
+                        <a:t>(cutoff set on</a:t>
+                      </a:r>
+                    </a:p>
+                    <a:p>
+                      <a:pPr algn="ctr">
+                        <a:defRPr sz="1300" b="1">
+                          <a:solidFill>
+                            <a:srgbClr val="FFFFFF"/>
+                          </a:solidFill>
+                        </a:defRPr>
+                      </a:pPr>
+                      <a:r>
+                        <a:rPr sz="1300" b="1">
+                          <a:solidFill>
+                            <a:srgbClr val="FFFFFF"/>
+                          </a:solidFill>
+                        </a:rPr>
+                        <a:t>validation)</a:t>
                       </a:r>
                     </a:p>
                   </a:txBody>
@@ -9925,19 +9980,36 @@
                     <a:lstStyle/>
                     <a:p>
                       <a:pPr algn="ctr">
-                        <a:defRPr sz="1500" b="1">
+                        <a:defRPr sz="1300" b="1">
                           <a:solidFill>
                             <a:srgbClr val="FFFFFF"/>
                           </a:solidFill>
                         </a:defRPr>
                       </a:pPr>
                       <a:r>
-                        <a:rPr sz="1500" b="1">
+                        <a:rPr sz="1300" b="1">
                           <a:solidFill>
                             <a:srgbClr val="FFFFFF"/>
                           </a:solidFill>
                         </a:rPr>
-                        <a:t>AUC</a:t>
+                        <a:t>Best any cutoff</a:t>
+                      </a:r>
+                    </a:p>
+                    <a:p>
+                      <a:pPr algn="ctr">
+                        <a:defRPr sz="1300" b="1">
+                          <a:solidFill>
+                            <a:srgbClr val="FFFFFF"/>
+                          </a:solidFill>
+                        </a:defRPr>
+                      </a:pPr>
+                      <a:r>
+                        <a:rPr sz="1300" b="1">
+                          <a:solidFill>
+                            <a:srgbClr val="FFFFFF"/>
+                          </a:solidFill>
+                        </a:rPr>
+                        <a:t>could reach</a:t>
                       </a:r>
                     </a:p>
                   </a:txBody>
@@ -9953,19 +10025,36 @@
                     <a:lstStyle/>
                     <a:p>
                       <a:pPr algn="ctr">
-                        <a:defRPr sz="1500" b="1">
+                        <a:defRPr sz="1300" b="1">
                           <a:solidFill>
                             <a:srgbClr val="FFFFFF"/>
                           </a:solidFill>
                         </a:defRPr>
                       </a:pPr>
                       <a:r>
-                        <a:rPr sz="1500" b="1">
+                        <a:rPr sz="1300" b="1">
                           <a:solidFill>
                             <a:srgbClr val="FFFFFF"/>
                           </a:solidFill>
                         </a:rPr>
-                        <a:t>Disease rate</a:t>
+                        <a:t>A model trained</a:t>
+                      </a:r>
+                    </a:p>
+                    <a:p>
+                      <a:pPr algn="ctr">
+                        <a:defRPr sz="1300" b="1">
+                          <a:solidFill>
+                            <a:srgbClr val="FFFFFF"/>
+                          </a:solidFill>
+                        </a:defRPr>
+                      </a:pPr>
+                      <a:r>
+                        <a:rPr sz="1300" b="1">
+                          <a:solidFill>
+                            <a:srgbClr val="FFFFFF"/>
+                          </a:solidFill>
+                        </a:rPr>
+                        <a:t>on mBRSET</a:t>
                       </a:r>
                     </a:p>
                   </a:txBody>
@@ -9981,19 +10070,36 @@
                     <a:lstStyle/>
                     <a:p>
                       <a:pPr algn="ctr">
-                        <a:defRPr sz="1500" b="1">
+                        <a:defRPr sz="1300" b="1">
                           <a:solidFill>
                             <a:srgbClr val="FFFFFF"/>
                           </a:solidFill>
                         </a:defRPr>
                       </a:pPr>
                       <a:r>
-                        <a:rPr sz="1500" b="1">
+                        <a:rPr sz="1300" b="1">
                           <a:solidFill>
                             <a:srgbClr val="FFFFFF"/>
                           </a:solidFill>
                         </a:rPr>
-                        <a:t>Estimated max F1</a:t>
+                        <a:t>Still reachable</a:t>
+                      </a:r>
+                    </a:p>
+                    <a:p>
+                      <a:pPr algn="ctr">
+                        <a:defRPr sz="1300" b="1">
+                          <a:solidFill>
+                            <a:srgbClr val="FFFFFF"/>
+                          </a:solidFill>
+                        </a:defRPr>
+                      </a:pPr>
+                      <a:r>
+                        <a:rPr sz="1300" b="1">
+                          <a:solidFill>
+                            <a:srgbClr val="FFFFFF"/>
+                          </a:solidFill>
+                        </a:rPr>
+                        <a:t>by cutoff</a:t>
                       </a:r>
                     </a:p>
                   </a:txBody>
@@ -10009,19 +10115,36 @@
                     <a:lstStyle/>
                     <a:p>
                       <a:pPr algn="ctr">
-                        <a:defRPr sz="1500" b="1">
+                        <a:defRPr sz="1300" b="1">
                           <a:solidFill>
                             <a:srgbClr val="FFFFFF"/>
                           </a:solidFill>
                         </a:defRPr>
                       </a:pPr>
                       <a:r>
-                        <a:rPr sz="1500" b="1">
+                        <a:rPr sz="1300" b="1">
                           <a:solidFill>
                             <a:srgbClr val="FFFFFF"/>
                           </a:solidFill>
                         </a:rPr>
-                        <a:t>Our F1</a:t>
+                        <a:t>Needs better</a:t>
+                      </a:r>
+                    </a:p>
+                    <a:p>
+                      <a:pPr algn="ctr">
+                        <a:defRPr sz="1300" b="1">
+                          <a:solidFill>
+                            <a:srgbClr val="FFFFFF"/>
+                          </a:solidFill>
+                        </a:defRPr>
+                      </a:pPr>
+                      <a:r>
+                        <a:rPr sz="1300" b="1">
+                          <a:solidFill>
+                            <a:srgbClr val="FFFFFF"/>
+                          </a:solidFill>
+                        </a:rPr>
+                        <a:t>ranking</a:t>
                       </a:r>
                     </a:p>
                   </a:txBody>
@@ -10032,21 +10155,21 @@
                   </a:tcPr>
                 </a:tc>
               </a:tr>
-              <a:tr h="329184">
+              <a:tr h="579120">
                 <a:tc>
                   <a:txBody>
                     <a:bodyPr/>
                     <a:lstStyle/>
                     <a:p>
                       <a:pPr algn="l">
-                        <a:defRPr sz="1500" b="1">
-                          <a:solidFill>
-                            <a:srgbClr val="1A1A1A"/>
-                          </a:solidFill>
-                        </a:defRPr>
-                      </a:pPr>
-                      <a:r>
-                        <a:rPr sz="1500" b="1">
+                        <a:defRPr sz="1300" b="0">
+                          <a:solidFill>
+                            <a:srgbClr val="1A1A1A"/>
+                          </a:solidFill>
+                        </a:defRPr>
+                      </a:pPr>
+                      <a:r>
+                        <a:rPr sz="1300" b="0">
                           <a:solidFill>
                             <a:srgbClr val="1A1A1A"/>
                           </a:solidFill>
@@ -10057,108 +10180,24 @@
                   </a:txBody>
                   <a:tcPr marL="73152" marR="73152" marT="27432" marB="27432">
                     <a:solidFill>
-                      <a:srgbClr val="E3EFE3"/>
-                    </a:solidFill>
-                  </a:tcPr>
-                </a:tc>
-                <a:tc>
-                  <a:txBody>
-                    <a:bodyPr/>
-                    <a:lstStyle/>
-                    <a:p>
-                      <a:pPr algn="ctr">
-                        <a:defRPr sz="1500" b="1">
-                          <a:solidFill>
-                            <a:srgbClr val="1A1A1A"/>
-                          </a:solidFill>
-                        </a:defRPr>
-                      </a:pPr>
-                      <a:r>
-                        <a:rPr sz="1500" b="1">
-                          <a:solidFill>
-                            <a:srgbClr val="1A1A1A"/>
-                          </a:solidFill>
-                        </a:rPr>
-                        <a:t>0.909</a:t>
-                      </a:r>
-                    </a:p>
-                  </a:txBody>
-                  <a:tcPr marL="73152" marR="73152" marT="27432" marB="27432">
-                    <a:solidFill>
-                      <a:srgbClr val="E3EFE3"/>
-                    </a:solidFill>
-                  </a:tcPr>
-                </a:tc>
-                <a:tc>
-                  <a:txBody>
-                    <a:bodyPr/>
-                    <a:lstStyle/>
-                    <a:p>
-                      <a:pPr algn="ctr">
-                        <a:defRPr sz="1500" b="1">
-                          <a:solidFill>
-                            <a:srgbClr val="1A1A1A"/>
-                          </a:solidFill>
-                        </a:defRPr>
-                      </a:pPr>
-                      <a:r>
-                        <a:rPr sz="1500" b="1">
-                          <a:solidFill>
-                            <a:srgbClr val="1A1A1A"/>
-                          </a:solidFill>
-                        </a:rPr>
-                        <a:t>21.7%</a:t>
-                      </a:r>
-                    </a:p>
-                  </a:txBody>
-                  <a:tcPr marL="73152" marR="73152" marT="27432" marB="27432">
-                    <a:solidFill>
-                      <a:srgbClr val="E3EFE3"/>
-                    </a:solidFill>
-                  </a:tcPr>
-                </a:tc>
-                <a:tc>
-                  <a:txBody>
-                    <a:bodyPr/>
-                    <a:lstStyle/>
-                    <a:p>
-                      <a:pPr algn="ctr">
-                        <a:defRPr sz="1500" b="1">
-                          <a:solidFill>
-                            <a:srgbClr val="1A1A1A"/>
-                          </a:solidFill>
-                        </a:defRPr>
-                      </a:pPr>
-                      <a:r>
-                        <a:rPr sz="1500" b="1">
-                          <a:solidFill>
-                            <a:srgbClr val="1A1A1A"/>
-                          </a:solidFill>
-                        </a:rPr>
-                        <a:t>0.697</a:t>
-                      </a:r>
-                    </a:p>
-                  </a:txBody>
-                  <a:tcPr marL="73152" marR="73152" marT="27432" marB="27432">
-                    <a:solidFill>
-                      <a:srgbClr val="E3EFE3"/>
-                    </a:solidFill>
-                  </a:tcPr>
-                </a:tc>
-                <a:tc>
-                  <a:txBody>
-                    <a:bodyPr/>
-                    <a:lstStyle/>
-                    <a:p>
-                      <a:pPr algn="ctr">
-                        <a:defRPr sz="1500" b="1">
-                          <a:solidFill>
-                            <a:srgbClr val="1A1A1A"/>
-                          </a:solidFill>
-                        </a:defRPr>
-                      </a:pPr>
-                      <a:r>
-                        <a:rPr sz="1500" b="1">
+                      <a:srgbClr val="FFFFFF"/>
+                    </a:solidFill>
+                  </a:tcPr>
+                </a:tc>
+                <a:tc>
+                  <a:txBody>
+                    <a:bodyPr/>
+                    <a:lstStyle/>
+                    <a:p>
+                      <a:pPr algn="ctr">
+                        <a:defRPr sz="1300" b="0">
+                          <a:solidFill>
+                            <a:srgbClr val="1A1A1A"/>
+                          </a:solidFill>
+                        </a:defRPr>
+                      </a:pPr>
+                      <a:r>
+                        <a:rPr sz="1300" b="0">
                           <a:solidFill>
                             <a:srgbClr val="1A1A1A"/>
                           </a:solidFill>
@@ -10169,26 +10208,138 @@
                   </a:txBody>
                   <a:tcPr marL="73152" marR="73152" marT="27432" marB="27432">
                     <a:solidFill>
-                      <a:srgbClr val="E3EFE3"/>
+                      <a:srgbClr val="FFFFFF"/>
+                    </a:solidFill>
+                  </a:tcPr>
+                </a:tc>
+                <a:tc>
+                  <a:txBody>
+                    <a:bodyPr/>
+                    <a:lstStyle/>
+                    <a:p>
+                      <a:pPr algn="ctr">
+                        <a:defRPr sz="1300" b="0">
+                          <a:solidFill>
+                            <a:srgbClr val="1A1A1A"/>
+                          </a:solidFill>
+                        </a:defRPr>
+                      </a:pPr>
+                      <a:r>
+                        <a:rPr sz="1300" b="0">
+                          <a:solidFill>
+                            <a:srgbClr val="1A1A1A"/>
+                          </a:solidFill>
+                        </a:rPr>
+                        <a:t>0.765</a:t>
+                      </a:r>
+                    </a:p>
+                  </a:txBody>
+                  <a:tcPr marL="73152" marR="73152" marT="27432" marB="27432">
+                    <a:solidFill>
+                      <a:srgbClr val="FFFFFF"/>
+                    </a:solidFill>
+                  </a:tcPr>
+                </a:tc>
+                <a:tc>
+                  <a:txBody>
+                    <a:bodyPr/>
+                    <a:lstStyle/>
+                    <a:p>
+                      <a:pPr algn="ctr">
+                        <a:defRPr sz="1300" b="0">
+                          <a:solidFill>
+                            <a:srgbClr val="1A1A1A"/>
+                          </a:solidFill>
+                        </a:defRPr>
+                      </a:pPr>
+                      <a:r>
+                        <a:rPr sz="1300" b="0">
+                          <a:solidFill>
+                            <a:srgbClr val="1A1A1A"/>
+                          </a:solidFill>
+                        </a:rPr>
+                        <a:t>0.815</a:t>
+                      </a:r>
+                    </a:p>
+                  </a:txBody>
+                  <a:tcPr marL="73152" marR="73152" marT="27432" marB="27432">
+                    <a:solidFill>
+                      <a:srgbClr val="FFFFFF"/>
+                    </a:solidFill>
+                  </a:tcPr>
+                </a:tc>
+                <a:tc>
+                  <a:txBody>
+                    <a:bodyPr/>
+                    <a:lstStyle/>
+                    <a:p>
+                      <a:pPr algn="ctr">
+                        <a:defRPr sz="1300" b="0">
+                          <a:solidFill>
+                            <a:srgbClr val="1A1A1A"/>
+                          </a:solidFill>
+                        </a:defRPr>
+                      </a:pPr>
+                      <a:r>
+                        <a:rPr sz="1300" b="0">
+                          <a:solidFill>
+                            <a:srgbClr val="1A1A1A"/>
+                          </a:solidFill>
+                        </a:rPr>
+                        <a:t>0.048</a:t>
+                      </a:r>
+                    </a:p>
+                  </a:txBody>
+                  <a:tcPr marL="73152" marR="73152" marT="27432" marB="27432">
+                    <a:solidFill>
+                      <a:srgbClr val="FFFFFF"/>
+                    </a:solidFill>
+                  </a:tcPr>
+                </a:tc>
+                <a:tc>
+                  <a:txBody>
+                    <a:bodyPr/>
+                    <a:lstStyle/>
+                    <a:p>
+                      <a:pPr algn="ctr">
+                        <a:defRPr sz="1300" b="0">
+                          <a:solidFill>
+                            <a:srgbClr val="1A1A1A"/>
+                          </a:solidFill>
+                        </a:defRPr>
+                      </a:pPr>
+                      <a:r>
+                        <a:rPr sz="1300" b="0">
+                          <a:solidFill>
+                            <a:srgbClr val="1A1A1A"/>
+                          </a:solidFill>
+                        </a:rPr>
+                        <a:t>0.050</a:t>
+                      </a:r>
+                    </a:p>
+                  </a:txBody>
+                  <a:tcPr marL="73152" marR="73152" marT="27432" marB="27432">
+                    <a:solidFill>
+                      <a:srgbClr val="FFFFFF"/>
                     </a:solidFill>
                   </a:tcPr>
                 </a:tc>
               </a:tr>
-              <a:tr h="329184">
+              <a:tr h="579120">
                 <a:tc>
                   <a:txBody>
                     <a:bodyPr/>
                     <a:lstStyle/>
                     <a:p>
                       <a:pPr algn="l">
-                        <a:defRPr sz="1500" b="1">
-                          <a:solidFill>
-                            <a:srgbClr val="1A1A1A"/>
-                          </a:solidFill>
-                        </a:defRPr>
-                      </a:pPr>
-                      <a:r>
-                        <a:rPr sz="1500" b="1">
+                        <a:defRPr sz="1300" b="0">
+                          <a:solidFill>
+                            <a:srgbClr val="1A1A1A"/>
+                          </a:solidFill>
+                        </a:defRPr>
+                      </a:pPr>
+                      <a:r>
+                        <a:rPr sz="1300" b="0">
                           <a:solidFill>
                             <a:srgbClr val="1A1A1A"/>
                           </a:solidFill>
@@ -10199,108 +10350,24 @@
                   </a:txBody>
                   <a:tcPr marL="73152" marR="73152" marT="27432" marB="27432">
                     <a:solidFill>
-                      <a:srgbClr val="E3EFE3"/>
-                    </a:solidFill>
-                  </a:tcPr>
-                </a:tc>
-                <a:tc>
-                  <a:txBody>
-                    <a:bodyPr/>
-                    <a:lstStyle/>
-                    <a:p>
-                      <a:pPr algn="ctr">
-                        <a:defRPr sz="1500" b="1">
-                          <a:solidFill>
-                            <a:srgbClr val="1A1A1A"/>
-                          </a:solidFill>
-                        </a:defRPr>
-                      </a:pPr>
-                      <a:r>
-                        <a:rPr sz="1500" b="1">
-                          <a:solidFill>
-                            <a:srgbClr val="1A1A1A"/>
-                          </a:solidFill>
-                        </a:rPr>
-                        <a:t>0.933</a:t>
-                      </a:r>
-                    </a:p>
-                  </a:txBody>
-                  <a:tcPr marL="73152" marR="73152" marT="27432" marB="27432">
-                    <a:solidFill>
-                      <a:srgbClr val="E3EFE3"/>
-                    </a:solidFill>
-                  </a:tcPr>
-                </a:tc>
-                <a:tc>
-                  <a:txBody>
-                    <a:bodyPr/>
-                    <a:lstStyle/>
-                    <a:p>
-                      <a:pPr algn="ctr">
-                        <a:defRPr sz="1500" b="1">
-                          <a:solidFill>
-                            <a:srgbClr val="1A1A1A"/>
-                          </a:solidFill>
-                        </a:defRPr>
-                      </a:pPr>
-                      <a:r>
-                        <a:rPr sz="1500" b="1">
-                          <a:solidFill>
-                            <a:srgbClr val="1A1A1A"/>
-                          </a:solidFill>
-                        </a:rPr>
-                        <a:t>8.6%</a:t>
-                      </a:r>
-                    </a:p>
-                  </a:txBody>
-                  <a:tcPr marL="73152" marR="73152" marT="27432" marB="27432">
-                    <a:solidFill>
-                      <a:srgbClr val="E3EFE3"/>
-                    </a:solidFill>
-                  </a:tcPr>
-                </a:tc>
-                <a:tc>
-                  <a:txBody>
-                    <a:bodyPr/>
-                    <a:lstStyle/>
-                    <a:p>
-                      <a:pPr algn="ctr">
-                        <a:defRPr sz="1500" b="1">
-                          <a:solidFill>
-                            <a:srgbClr val="1A1A1A"/>
-                          </a:solidFill>
-                        </a:defRPr>
-                      </a:pPr>
-                      <a:r>
-                        <a:rPr sz="1500" b="1">
-                          <a:solidFill>
-                            <a:srgbClr val="1A1A1A"/>
-                          </a:solidFill>
-                        </a:rPr>
-                        <a:t>0.623</a:t>
-                      </a:r>
-                    </a:p>
-                  </a:txBody>
-                  <a:tcPr marL="73152" marR="73152" marT="27432" marB="27432">
-                    <a:solidFill>
-                      <a:srgbClr val="E3EFE3"/>
-                    </a:solidFill>
-                  </a:tcPr>
-                </a:tc>
-                <a:tc>
-                  <a:txBody>
-                    <a:bodyPr/>
-                    <a:lstStyle/>
-                    <a:p>
-                      <a:pPr algn="ctr">
-                        <a:defRPr sz="1500" b="1">
-                          <a:solidFill>
-                            <a:srgbClr val="1A1A1A"/>
-                          </a:solidFill>
-                        </a:defRPr>
-                      </a:pPr>
-                      <a:r>
-                        <a:rPr sz="1500" b="1">
+                      <a:srgbClr val="F2F4F7"/>
+                    </a:solidFill>
+                  </a:tcPr>
+                </a:tc>
+                <a:tc>
+                  <a:txBody>
+                    <a:bodyPr/>
+                    <a:lstStyle/>
+                    <a:p>
+                      <a:pPr algn="ctr">
+                        <a:defRPr sz="1300" b="0">
+                          <a:solidFill>
+                            <a:srgbClr val="1A1A1A"/>
+                          </a:solidFill>
+                        </a:defRPr>
+                      </a:pPr>
+                      <a:r>
+                        <a:rPr sz="1300" b="0">
                           <a:solidFill>
                             <a:srgbClr val="1A1A1A"/>
                           </a:solidFill>
@@ -10311,7 +10378,119 @@
                   </a:txBody>
                   <a:tcPr marL="73152" marR="73152" marT="27432" marB="27432">
                     <a:solidFill>
-                      <a:srgbClr val="E3EFE3"/>
+                      <a:srgbClr val="F2F4F7"/>
+                    </a:solidFill>
+                  </a:tcPr>
+                </a:tc>
+                <a:tc>
+                  <a:txBody>
+                    <a:bodyPr/>
+                    <a:lstStyle/>
+                    <a:p>
+                      <a:pPr algn="ctr">
+                        <a:defRPr sz="1300" b="0">
+                          <a:solidFill>
+                            <a:srgbClr val="1A1A1A"/>
+                          </a:solidFill>
+                        </a:defRPr>
+                      </a:pPr>
+                      <a:r>
+                        <a:rPr sz="1300" b="0">
+                          <a:solidFill>
+                            <a:srgbClr val="1A1A1A"/>
+                          </a:solidFill>
+                        </a:rPr>
+                        <a:t>0.671</a:t>
+                      </a:r>
+                    </a:p>
+                  </a:txBody>
+                  <a:tcPr marL="73152" marR="73152" marT="27432" marB="27432">
+                    <a:solidFill>
+                      <a:srgbClr val="F2F4F7"/>
+                    </a:solidFill>
+                  </a:tcPr>
+                </a:tc>
+                <a:tc>
+                  <a:txBody>
+                    <a:bodyPr/>
+                    <a:lstStyle/>
+                    <a:p>
+                      <a:pPr algn="ctr">
+                        <a:defRPr sz="1300" b="0">
+                          <a:solidFill>
+                            <a:srgbClr val="1A1A1A"/>
+                          </a:solidFill>
+                        </a:defRPr>
+                      </a:pPr>
+                      <a:r>
+                        <a:rPr sz="1300" b="0">
+                          <a:solidFill>
+                            <a:srgbClr val="1A1A1A"/>
+                          </a:solidFill>
+                        </a:rPr>
+                        <a:t>0.807</a:t>
+                      </a:r>
+                    </a:p>
+                  </a:txBody>
+                  <a:tcPr marL="73152" marR="73152" marT="27432" marB="27432">
+                    <a:solidFill>
+                      <a:srgbClr val="F2F4F7"/>
+                    </a:solidFill>
+                  </a:tcPr>
+                </a:tc>
+                <a:tc>
+                  <a:txBody>
+                    <a:bodyPr/>
+                    <a:lstStyle/>
+                    <a:p>
+                      <a:pPr algn="ctr">
+                        <a:defRPr sz="1300" b="0">
+                          <a:solidFill>
+                            <a:srgbClr val="1A1A1A"/>
+                          </a:solidFill>
+                        </a:defRPr>
+                      </a:pPr>
+                      <a:r>
+                        <a:rPr sz="1300" b="0">
+                          <a:solidFill>
+                            <a:srgbClr val="1A1A1A"/>
+                          </a:solidFill>
+                        </a:rPr>
+                        <a:t>0.043</a:t>
+                      </a:r>
+                    </a:p>
+                  </a:txBody>
+                  <a:tcPr marL="73152" marR="73152" marT="27432" marB="27432">
+                    <a:solidFill>
+                      <a:srgbClr val="F2F4F7"/>
+                    </a:solidFill>
+                  </a:tcPr>
+                </a:tc>
+                <a:tc>
+                  <a:txBody>
+                    <a:bodyPr/>
+                    <a:lstStyle/>
+                    <a:p>
+                      <a:pPr algn="ctr">
+                        <a:defRPr sz="1300" b="0">
+                          <a:solidFill>
+                            <a:srgbClr val="1A1A1A"/>
+                          </a:solidFill>
+                        </a:defRPr>
+                      </a:pPr>
+                      <a:r>
+                        <a:rPr sz="1300" b="0">
+                          <a:solidFill>
+                            <a:srgbClr val="1A1A1A"/>
+                          </a:solidFill>
+                        </a:rPr>
+                        <a:t>0.136</a:t>
+                      </a:r>
+                    </a:p>
+                  </a:txBody>
+                  <a:tcPr marL="73152" marR="73152" marT="27432" marB="27432">
+                    <a:solidFill>
+                      <a:srgbClr val="F2F4F7"/>
                     </a:solidFill>
                   </a:tcPr>
                 </a:tc>
@@ -10328,8 +10507,8 @@
         </p:nvSpPr>
         <p:spPr>
           <a:xfrm>
-            <a:off x="685800" y="3657600"/>
-            <a:ext cx="10881360" cy="2011680"/>
+            <a:off x="685800" y="4023360"/>
+            <a:ext cx="10881360" cy="1737359"/>
           </a:xfrm>
           <a:prstGeom prst="rect">
             <a:avLst/>
@@ -10346,29 +10525,29 @@
               <a:spcAft>
                 <a:spcPts val="1000"/>
               </a:spcAft>
-              <a:defRPr sz="1700">
+              <a:defRPr sz="1500">
                 <a:solidFill>
                   <a:srgbClr val="1A1A1A"/>
                 </a:solidFill>
               </a:defRPr>
             </a:pPr>
             <a:r>
-              <a:t>• We are already at that ceiling. Moving the cutoff further cannot help — any cutoff method only slides the</a:t>
-            </a:r>
-          </a:p>
-          <a:p>
-            <a:pPr lvl="1">
+              <a:t>• The "best any cutoff could reach" column comes from tuning the cutoff on the test set itself. We cannot do that honestly, but it bounds what any cutoff or calibration method could ever achieve.</a:t>
+            </a:r>
+          </a:p>
+          <a:p>
+            <a:pPr>
               <a:spcAft>
                 <a:spcPts val="1000"/>
               </a:spcAft>
               <a:defRPr sz="1500">
                 <a:solidFill>
-                  <a:srgbClr val="5A5A5A"/>
+                  <a:srgbClr val="1A1A1A"/>
                 </a:solidFill>
               </a:defRPr>
             </a:pPr>
             <a:r>
-              <a:t>– referral line along a fixed ordering of patients. It never changes how well the model orders them.</a:t>
+              <a:t>• For diabetic retinopathy the remaining gap splits about evenly — half is still reachable by choosing the cutoff better, half is beyond any cutoff and needs the model to rank patients better.</a:t>
             </a:r>
           </a:p>
           <a:p>
@@ -10376,29 +10555,14 @@
               <a:spcAft>
                 <a:spcPts val="1000"/>
               </a:spcAft>
-              <a:defRPr sz="1700">
+              <a:defRPr sz="1500">
                 <a:solidFill>
                   <a:srgbClr val="1A1A1A"/>
                 </a:solidFill>
               </a:defRPr>
             </a:pPr>
             <a:r>
-              <a:t>• To reach what an mBRSET-trained model achieves (F1 0.815 / 0.807), the ordering itself must improve:</a:t>
-            </a:r>
-          </a:p>
-          <a:p>
-            <a:pPr lvl="1">
-              <a:spcAft>
-                <a:spcPts val="1000"/>
-              </a:spcAft>
-              <a:defRPr sz="1500">
-                <a:solidFill>
-                  <a:srgbClr val="5A5A5A"/>
-                </a:solidFill>
-              </a:defRPr>
-            </a:pPr>
-            <a:r>
-              <a:t>– AUC 0.909 → about 0.95 for DR, and 0.933 → about 0.985 for macular edema.</a:t>
+              <a:t>• For macular edema it is lopsided: only 0.043 of the 0.179 gap is cutoff. The rest needs better ranking.</a:t>
             </a:r>
           </a:p>
         </p:txBody>
@@ -10428,12 +10592,12 @@
             <a:pPr>
               <a:defRPr sz="1600" b="1">
                 <a:solidFill>
-                  <a:srgbClr val="A53A1A"/>
+                  <a:srgbClr val="1F4E79"/>
                 </a:solidFill>
               </a:defRPr>
             </a:pPr>
             <a:r>
-              <a:t>The remaining gap is entirely ranking quality. Everything from here must improve AUC.</a:t>
+              <a:t>Both levers matter: better cutoff selection for DR, and better ranking — higher AUC — especially for macular edema.</a:t>
             </a:r>
           </a:p>
         </p:txBody>
